--- a/5th sem/ComputerNetwork/Chapter new 5.pptx
+++ b/5th sem/ComputerNetwork/Chapter new 5.pptx
@@ -38,7 +38,6 @@
     <p:sldId id="276" r:id="rId33"/>
     <p:sldId id="277" r:id="rId34"/>
     <p:sldId id="278" r:id="rId35"/>
-    <p:sldId id="279" r:id="rId36"/>
   </p:sldIdLst>
   <p:sldSz cx="12192000" cy="6858000"/>
   <p:notesSz cx="7559675" cy="10691813"/>
@@ -75,7 +74,7 @@
         <p:spPr>
           <a:xfrm>
             <a:off x="838080" y="365040"/>
-            <a:ext cx="10515240" cy="1325160"/>
+            <a:ext cx="10514520" cy="1324440"/>
           </a:xfrm>
           <a:prstGeom prst="rect">
             <a:avLst/>
@@ -90,14 +89,14 @@
             <a:noAutofit/>
           </a:bodyPr>
           <a:p>
-            <a:pPr indent="0">
+            <a:pPr indent="0" algn="ctr">
               <a:buNone/>
             </a:pPr>
-            <a:endParaRPr b="0" lang="en-US" sz="1800" spc="-1" strike="noStrike">
-              <a:solidFill>
-                <a:schemeClr val="dk1"/>
-              </a:solidFill>
-              <a:latin typeface="Calibri"/>
+            <a:endParaRPr b="0" lang="en-US" sz="4400" spc="-1" strike="noStrike">
+              <a:solidFill>
+                <a:srgbClr val="000000"/>
+              </a:solidFill>
+              <a:latin typeface="Arial"/>
             </a:endParaRPr>
           </a:p>
         </p:txBody>
@@ -115,7 +114,7 @@
         <p:spPr>
           <a:xfrm>
             <a:off x="838080" y="1825560"/>
-            <a:ext cx="10515240" cy="4350960"/>
+            <a:ext cx="10514520" cy="4350240"/>
           </a:xfrm>
           <a:prstGeom prst="rect">
             <a:avLst/>
@@ -149,7 +148,7 @@
             <a:spLocks noGrp="1"/>
           </p:cNvSpPr>
           <p:nvPr>
-            <p:ph type="ftr" idx="2"/>
+            <p:ph type="ftr" idx="1"/>
           </p:nvPr>
         </p:nvSpPr>
         <p:spPr/>
@@ -169,14 +168,14 @@
             <a:spLocks noGrp="1"/>
           </p:cNvSpPr>
           <p:nvPr>
-            <p:ph type="sldNum" idx="3"/>
+            <p:ph type="sldNum" idx="2"/>
           </p:nvPr>
         </p:nvSpPr>
         <p:spPr/>
         <p:txBody>
           <a:bodyPr/>
           <a:p>
-            <a:fld id="{F07DDFD2-1E99-4E8A-8BAE-C584F89DF258}" type="slidenum">
+            <a:fld id="{19C0690D-7952-4974-8E70-FC238370AD8F}" type="slidenum">
               <a:t>&lt;#&gt;</a:t>
             </a:fld>
           </a:p>
@@ -189,7 +188,7 @@
             <a:spLocks noGrp="1"/>
           </p:cNvSpPr>
           <p:nvPr>
-            <p:ph type="dt" idx="1"/>
+            <p:ph type="dt" idx="3"/>
           </p:nvPr>
         </p:nvSpPr>
         <p:spPr/>
@@ -232,7 +231,7 @@
             <a:spLocks noGrp="1"/>
           </p:cNvSpPr>
           <p:nvPr>
-            <p:ph type="ftr" idx="29"/>
+            <p:ph type="ftr" idx="28"/>
           </p:nvPr>
         </p:nvSpPr>
         <p:spPr/>
@@ -252,14 +251,14 @@
             <a:spLocks noGrp="1"/>
           </p:cNvSpPr>
           <p:nvPr>
-            <p:ph type="sldNum" idx="30"/>
+            <p:ph type="sldNum" idx="29"/>
           </p:nvPr>
         </p:nvSpPr>
         <p:spPr/>
         <p:txBody>
           <a:bodyPr/>
           <a:p>
-            <a:fld id="{FE1642D2-ACFC-4657-87A0-D99628F8D502}" type="slidenum">
+            <a:fld id="{B89CB1C2-FEEA-4155-BC23-96ECAE3E8B0B}" type="slidenum">
               <a:t>&lt;#&gt;</a:t>
             </a:fld>
           </a:p>
@@ -272,7 +271,7 @@
             <a:spLocks noGrp="1"/>
           </p:cNvSpPr>
           <p:nvPr>
-            <p:ph type="dt" idx="28"/>
+            <p:ph type="dt" idx="30"/>
           </p:nvPr>
         </p:nvSpPr>
         <p:spPr/>
@@ -315,7 +314,7 @@
             <a:spLocks noGrp="1"/>
           </p:cNvSpPr>
           <p:nvPr>
-            <p:ph type="ftr" idx="32"/>
+            <p:ph type="ftr" idx="31"/>
           </p:nvPr>
         </p:nvSpPr>
         <p:spPr/>
@@ -335,14 +334,14 @@
             <a:spLocks noGrp="1"/>
           </p:cNvSpPr>
           <p:nvPr>
-            <p:ph type="sldNum" idx="33"/>
+            <p:ph type="sldNum" idx="32"/>
           </p:nvPr>
         </p:nvSpPr>
         <p:spPr/>
         <p:txBody>
           <a:bodyPr/>
           <a:p>
-            <a:fld id="{6A49AA52-7AB0-415C-AC6C-9F7045298F13}" type="slidenum">
+            <a:fld id="{6D0D4DB6-83C4-4D6E-B0E4-CA308D65C888}" type="slidenum">
               <a:t>&lt;#&gt;</a:t>
             </a:fld>
           </a:p>
@@ -355,7 +354,7 @@
             <a:spLocks noGrp="1"/>
           </p:cNvSpPr>
           <p:nvPr>
-            <p:ph type="dt" idx="31"/>
+            <p:ph type="dt" idx="33"/>
           </p:nvPr>
         </p:nvSpPr>
         <p:spPr/>
@@ -398,7 +397,7 @@
             <a:spLocks noGrp="1"/>
           </p:cNvSpPr>
           <p:nvPr>
-            <p:ph type="ftr" idx="5"/>
+            <p:ph type="ftr" idx="4"/>
           </p:nvPr>
         </p:nvSpPr>
         <p:spPr/>
@@ -418,14 +417,14 @@
             <a:spLocks noGrp="1"/>
           </p:cNvSpPr>
           <p:nvPr>
-            <p:ph type="sldNum" idx="6"/>
+            <p:ph type="sldNum" idx="5"/>
           </p:nvPr>
         </p:nvSpPr>
         <p:spPr/>
         <p:txBody>
           <a:bodyPr/>
           <a:p>
-            <a:fld id="{2FA6AA90-F885-4719-B3F4-2602FFC5CF75}" type="slidenum">
+            <a:fld id="{333B13A0-737E-4B28-AF6F-483EC5B3725C}" type="slidenum">
               <a:t>&lt;#&gt;</a:t>
             </a:fld>
           </a:p>
@@ -438,7 +437,7 @@
             <a:spLocks noGrp="1"/>
           </p:cNvSpPr>
           <p:nvPr>
-            <p:ph type="dt" idx="4"/>
+            <p:ph type="dt" idx="6"/>
           </p:nvPr>
         </p:nvSpPr>
         <p:spPr/>
@@ -481,7 +480,7 @@
             <a:spLocks noGrp="1"/>
           </p:cNvSpPr>
           <p:nvPr>
-            <p:ph type="ftr" idx="8"/>
+            <p:ph type="ftr" idx="7"/>
           </p:nvPr>
         </p:nvSpPr>
         <p:spPr/>
@@ -501,14 +500,14 @@
             <a:spLocks noGrp="1"/>
           </p:cNvSpPr>
           <p:nvPr>
-            <p:ph type="sldNum" idx="9"/>
+            <p:ph type="sldNum" idx="8"/>
           </p:nvPr>
         </p:nvSpPr>
         <p:spPr/>
         <p:txBody>
           <a:bodyPr/>
           <a:p>
-            <a:fld id="{48EC1BB9-9EAC-44E1-B473-2FEB0BB122B8}" type="slidenum">
+            <a:fld id="{19B39876-772C-4BBE-8C67-4F40A14233B2}" type="slidenum">
               <a:t>&lt;#&gt;</a:t>
             </a:fld>
           </a:p>
@@ -521,7 +520,7 @@
             <a:spLocks noGrp="1"/>
           </p:cNvSpPr>
           <p:nvPr>
-            <p:ph type="dt" idx="7"/>
+            <p:ph type="dt" idx="9"/>
           </p:nvPr>
         </p:nvSpPr>
         <p:spPr/>
@@ -559,7 +558,7 @@
       </p:grpSpPr>
       <p:sp>
         <p:nvSpPr>
-          <p:cNvPr id="22" name="PlaceHolder 1"/>
+          <p:cNvPr id="18" name="PlaceHolder 1"/>
           <p:cNvSpPr>
             <a:spLocks noGrp="1"/>
           </p:cNvSpPr>
@@ -570,7 +569,7 @@
         <p:spPr>
           <a:xfrm>
             <a:off x="838080" y="365040"/>
-            <a:ext cx="10515240" cy="1325160"/>
+            <a:ext cx="10514520" cy="1324440"/>
           </a:xfrm>
           <a:prstGeom prst="rect">
             <a:avLst/>
@@ -585,21 +584,21 @@
             <a:noAutofit/>
           </a:bodyPr>
           <a:p>
-            <a:pPr indent="0">
+            <a:pPr indent="0" algn="ctr">
               <a:buNone/>
             </a:pPr>
-            <a:endParaRPr b="0" lang="en-US" sz="1800" spc="-1" strike="noStrike">
-              <a:solidFill>
-                <a:schemeClr val="dk1"/>
-              </a:solidFill>
-              <a:latin typeface="Calibri"/>
+            <a:endParaRPr b="0" lang="en-US" sz="4400" spc="-1" strike="noStrike">
+              <a:solidFill>
+                <a:srgbClr val="000000"/>
+              </a:solidFill>
+              <a:latin typeface="Arial"/>
             </a:endParaRPr>
           </a:p>
         </p:txBody>
       </p:sp>
       <p:sp>
         <p:nvSpPr>
-          <p:cNvPr id="23" name="PlaceHolder 2"/>
+          <p:cNvPr id="19" name="PlaceHolder 2"/>
           <p:cNvSpPr>
             <a:spLocks noGrp="1"/>
           </p:cNvSpPr>
@@ -610,7 +609,7 @@
         <p:spPr>
           <a:xfrm>
             <a:off x="838080" y="1825560"/>
-            <a:ext cx="10515240" cy="4350960"/>
+            <a:ext cx="10514520" cy="4350240"/>
           </a:xfrm>
           <a:prstGeom prst="rect">
             <a:avLst/>
@@ -626,19 +625,16 @@
           </a:bodyPr>
           <a:p>
             <a:pPr indent="0">
-              <a:lnSpc>
-                <a:spcPct val="90000"/>
-              </a:lnSpc>
               <a:spcBef>
                 <a:spcPts val="1417"/>
               </a:spcBef>
               <a:buNone/>
             </a:pPr>
-            <a:endParaRPr b="0" lang="en-US" sz="2800" spc="-1" strike="noStrike">
-              <a:solidFill>
-                <a:schemeClr val="dk1"/>
-              </a:solidFill>
-              <a:latin typeface="Calibri"/>
+            <a:endParaRPr b="0" lang="en-US" sz="3200" spc="-1" strike="noStrike">
+              <a:solidFill>
+                <a:srgbClr val="000000"/>
+              </a:solidFill>
+              <a:latin typeface="Arial"/>
             </a:endParaRPr>
           </a:p>
         </p:txBody>
@@ -650,7 +646,7 @@
             <a:spLocks noGrp="1"/>
           </p:cNvSpPr>
           <p:nvPr>
-            <p:ph type="ftr" idx="11"/>
+            <p:ph type="ftr" idx="10"/>
           </p:nvPr>
         </p:nvSpPr>
         <p:spPr/>
@@ -670,14 +666,14 @@
             <a:spLocks noGrp="1"/>
           </p:cNvSpPr>
           <p:nvPr>
-            <p:ph type="sldNum" idx="12"/>
+            <p:ph type="sldNum" idx="11"/>
           </p:nvPr>
         </p:nvSpPr>
         <p:spPr/>
         <p:txBody>
           <a:bodyPr/>
           <a:p>
-            <a:fld id="{36D5BA15-853B-481B-B9E8-FDEE8434BE1B}" type="slidenum">
+            <a:fld id="{315B16A3-9E3F-4E79-BF0A-2142E57F7826}" type="slidenum">
               <a:t>&lt;#&gt;</a:t>
             </a:fld>
           </a:p>
@@ -690,7 +686,7 @@
             <a:spLocks noGrp="1"/>
           </p:cNvSpPr>
           <p:nvPr>
-            <p:ph type="dt" idx="10"/>
+            <p:ph type="dt" idx="12"/>
           </p:nvPr>
         </p:nvSpPr>
         <p:spPr/>
@@ -733,7 +729,7 @@
             <a:spLocks noGrp="1"/>
           </p:cNvSpPr>
           <p:nvPr>
-            <p:ph type="ftr" idx="14"/>
+            <p:ph type="ftr" idx="13"/>
           </p:nvPr>
         </p:nvSpPr>
         <p:spPr/>
@@ -753,14 +749,14 @@
             <a:spLocks noGrp="1"/>
           </p:cNvSpPr>
           <p:nvPr>
-            <p:ph type="sldNum" idx="15"/>
+            <p:ph type="sldNum" idx="14"/>
           </p:nvPr>
         </p:nvSpPr>
         <p:spPr/>
         <p:txBody>
           <a:bodyPr/>
           <a:p>
-            <a:fld id="{460D7A13-A404-48A6-B52F-2F27E3255B01}" type="slidenum">
+            <a:fld id="{589954E0-88A4-4951-9F62-19D8D48A14EE}" type="slidenum">
               <a:t>&lt;#&gt;</a:t>
             </a:fld>
           </a:p>
@@ -773,7 +769,7 @@
             <a:spLocks noGrp="1"/>
           </p:cNvSpPr>
           <p:nvPr>
-            <p:ph type="dt" idx="13"/>
+            <p:ph type="dt" idx="15"/>
           </p:nvPr>
         </p:nvSpPr>
         <p:spPr/>
@@ -811,7 +807,7 @@
       </p:grpSpPr>
       <p:sp>
         <p:nvSpPr>
-          <p:cNvPr id="35" name="PlaceHolder 1"/>
+          <p:cNvPr id="29" name="PlaceHolder 1"/>
           <p:cNvSpPr>
             <a:spLocks noGrp="1"/>
           </p:cNvSpPr>
@@ -822,7 +818,7 @@
         <p:spPr>
           <a:xfrm>
             <a:off x="838080" y="365040"/>
-            <a:ext cx="10515240" cy="1325160"/>
+            <a:ext cx="10514520" cy="1324440"/>
           </a:xfrm>
           <a:prstGeom prst="rect">
             <a:avLst/>
@@ -837,21 +833,21 @@
             <a:noAutofit/>
           </a:bodyPr>
           <a:p>
-            <a:pPr indent="0">
+            <a:pPr indent="0" algn="ctr">
               <a:buNone/>
             </a:pPr>
-            <a:endParaRPr b="0" lang="en-US" sz="1800" spc="-1" strike="noStrike">
-              <a:solidFill>
-                <a:schemeClr val="dk1"/>
-              </a:solidFill>
-              <a:latin typeface="Calibri"/>
+            <a:endParaRPr b="0" lang="en-US" sz="4400" spc="-1" strike="noStrike">
+              <a:solidFill>
+                <a:srgbClr val="000000"/>
+              </a:solidFill>
+              <a:latin typeface="Arial"/>
             </a:endParaRPr>
           </a:p>
         </p:txBody>
       </p:sp>
       <p:sp>
         <p:nvSpPr>
-          <p:cNvPr id="36" name="PlaceHolder 2"/>
+          <p:cNvPr id="30" name="PlaceHolder 2"/>
           <p:cNvSpPr>
             <a:spLocks noGrp="1"/>
           </p:cNvSpPr>
@@ -862,7 +858,7 @@
         <p:spPr>
           <a:xfrm>
             <a:off x="838080" y="1825560"/>
-            <a:ext cx="5131080" cy="4350960"/>
+            <a:ext cx="5131080" cy="4350240"/>
           </a:xfrm>
           <a:prstGeom prst="rect">
             <a:avLst/>
@@ -878,26 +874,23 @@
           </a:bodyPr>
           <a:p>
             <a:pPr indent="0">
-              <a:lnSpc>
-                <a:spcPct val="90000"/>
-              </a:lnSpc>
               <a:spcBef>
                 <a:spcPts val="1417"/>
               </a:spcBef>
               <a:buNone/>
             </a:pPr>
-            <a:endParaRPr b="0" lang="en-US" sz="2800" spc="-1" strike="noStrike">
-              <a:solidFill>
-                <a:schemeClr val="dk1"/>
-              </a:solidFill>
-              <a:latin typeface="Calibri"/>
+            <a:endParaRPr b="0" lang="en-US" sz="3200" spc="-1" strike="noStrike">
+              <a:solidFill>
+                <a:srgbClr val="000000"/>
+              </a:solidFill>
+              <a:latin typeface="Arial"/>
             </a:endParaRPr>
           </a:p>
         </p:txBody>
       </p:sp>
       <p:sp>
         <p:nvSpPr>
-          <p:cNvPr id="37" name="PlaceHolder 3"/>
+          <p:cNvPr id="31" name="PlaceHolder 3"/>
           <p:cNvSpPr>
             <a:spLocks noGrp="1"/>
           </p:cNvSpPr>
@@ -908,7 +901,7 @@
         <p:spPr>
           <a:xfrm>
             <a:off x="6226200" y="1825560"/>
-            <a:ext cx="5131080" cy="4350960"/>
+            <a:ext cx="5131080" cy="4350240"/>
           </a:xfrm>
           <a:prstGeom prst="rect">
             <a:avLst/>
@@ -924,19 +917,16 @@
           </a:bodyPr>
           <a:p>
             <a:pPr indent="0">
-              <a:lnSpc>
-                <a:spcPct val="90000"/>
-              </a:lnSpc>
               <a:spcBef>
                 <a:spcPts val="1417"/>
               </a:spcBef>
               <a:buNone/>
             </a:pPr>
-            <a:endParaRPr b="0" lang="en-US" sz="2800" spc="-1" strike="noStrike">
-              <a:solidFill>
-                <a:schemeClr val="dk1"/>
-              </a:solidFill>
-              <a:latin typeface="Calibri"/>
+            <a:endParaRPr b="0" lang="en-US" sz="3200" spc="-1" strike="noStrike">
+              <a:solidFill>
+                <a:srgbClr val="000000"/>
+              </a:solidFill>
+              <a:latin typeface="Arial"/>
             </a:endParaRPr>
           </a:p>
         </p:txBody>
@@ -948,7 +938,7 @@
             <a:spLocks noGrp="1"/>
           </p:cNvSpPr>
           <p:nvPr>
-            <p:ph type="ftr" idx="17"/>
+            <p:ph type="ftr" idx="16"/>
           </p:nvPr>
         </p:nvSpPr>
         <p:spPr/>
@@ -968,14 +958,14 @@
             <a:spLocks noGrp="1"/>
           </p:cNvSpPr>
           <p:nvPr>
-            <p:ph type="sldNum" idx="18"/>
+            <p:ph type="sldNum" idx="17"/>
           </p:nvPr>
         </p:nvSpPr>
         <p:spPr/>
         <p:txBody>
           <a:bodyPr/>
           <a:p>
-            <a:fld id="{6381F5B7-B268-4B01-AAA7-1E62B27EFE5E}" type="slidenum">
+            <a:fld id="{54E026D6-D0E5-4659-87C3-906427EFEFB1}" type="slidenum">
               <a:t>&lt;#&gt;</a:t>
             </a:fld>
           </a:p>
@@ -988,7 +978,7 @@
             <a:spLocks noGrp="1"/>
           </p:cNvSpPr>
           <p:nvPr>
-            <p:ph type="dt" idx="16"/>
+            <p:ph type="dt" idx="18"/>
           </p:nvPr>
         </p:nvSpPr>
         <p:spPr/>
@@ -1031,7 +1021,7 @@
             <a:spLocks noGrp="1"/>
           </p:cNvSpPr>
           <p:nvPr>
-            <p:ph type="ftr" idx="20"/>
+            <p:ph type="ftr" idx="19"/>
           </p:nvPr>
         </p:nvSpPr>
         <p:spPr/>
@@ -1051,14 +1041,14 @@
             <a:spLocks noGrp="1"/>
           </p:cNvSpPr>
           <p:nvPr>
-            <p:ph type="sldNum" idx="21"/>
+            <p:ph type="sldNum" idx="20"/>
           </p:nvPr>
         </p:nvSpPr>
         <p:spPr/>
         <p:txBody>
           <a:bodyPr/>
           <a:p>
-            <a:fld id="{438E61D2-1F34-4290-B04E-EF01CA398E24}" type="slidenum">
+            <a:fld id="{4963DB42-6196-487C-9C1C-CDA708BA3CEF}" type="slidenum">
               <a:t>&lt;#&gt;</a:t>
             </a:fld>
           </a:p>
@@ -1071,7 +1061,7 @@
             <a:spLocks noGrp="1"/>
           </p:cNvSpPr>
           <p:nvPr>
-            <p:ph type="dt" idx="19"/>
+            <p:ph type="dt" idx="21"/>
           </p:nvPr>
         </p:nvSpPr>
         <p:spPr/>
@@ -1109,7 +1099,7 @@
       </p:grpSpPr>
       <p:sp>
         <p:nvSpPr>
-          <p:cNvPr id="50" name="PlaceHolder 1"/>
+          <p:cNvPr id="39" name="PlaceHolder 1"/>
           <p:cNvSpPr>
             <a:spLocks noGrp="1"/>
           </p:cNvSpPr>
@@ -1120,7 +1110,7 @@
         <p:spPr>
           <a:xfrm>
             <a:off x="838080" y="365040"/>
-            <a:ext cx="10515240" cy="1325160"/>
+            <a:ext cx="10514520" cy="1324440"/>
           </a:xfrm>
           <a:prstGeom prst="rect">
             <a:avLst/>
@@ -1135,14 +1125,14 @@
             <a:noAutofit/>
           </a:bodyPr>
           <a:p>
-            <a:pPr indent="0">
+            <a:pPr indent="0" algn="ctr">
               <a:buNone/>
             </a:pPr>
-            <a:endParaRPr b="0" lang="en-US" sz="1800" spc="-1" strike="noStrike">
-              <a:solidFill>
-                <a:schemeClr val="dk1"/>
-              </a:solidFill>
-              <a:latin typeface="Calibri"/>
+            <a:endParaRPr b="0" lang="en-US" sz="4400" spc="-1" strike="noStrike">
+              <a:solidFill>
+                <a:srgbClr val="000000"/>
+              </a:solidFill>
+              <a:latin typeface="Arial"/>
             </a:endParaRPr>
           </a:p>
         </p:txBody>
@@ -1154,7 +1144,7 @@
             <a:spLocks noGrp="1"/>
           </p:cNvSpPr>
           <p:nvPr>
-            <p:ph type="ftr" idx="23"/>
+            <p:ph type="ftr" idx="22"/>
           </p:nvPr>
         </p:nvSpPr>
         <p:spPr/>
@@ -1174,14 +1164,14 @@
             <a:spLocks noGrp="1"/>
           </p:cNvSpPr>
           <p:nvPr>
-            <p:ph type="sldNum" idx="24"/>
+            <p:ph type="sldNum" idx="23"/>
           </p:nvPr>
         </p:nvSpPr>
         <p:spPr/>
         <p:txBody>
           <a:bodyPr/>
           <a:p>
-            <a:fld id="{70BDA97D-EFDB-4D4B-AE79-9D0884D268D7}" type="slidenum">
+            <a:fld id="{24D6873F-644C-4AFE-8C8B-122FDB55470B}" type="slidenum">
               <a:t>&lt;#&gt;</a:t>
             </a:fld>
           </a:p>
@@ -1194,7 +1184,7 @@
             <a:spLocks noGrp="1"/>
           </p:cNvSpPr>
           <p:nvPr>
-            <p:ph type="dt" idx="22"/>
+            <p:ph type="dt" idx="24"/>
           </p:nvPr>
         </p:nvSpPr>
         <p:spPr/>
@@ -1237,7 +1227,7 @@
             <a:spLocks noGrp="1"/>
           </p:cNvSpPr>
           <p:nvPr>
-            <p:ph type="ftr" idx="26"/>
+            <p:ph type="ftr" idx="25"/>
           </p:nvPr>
         </p:nvSpPr>
         <p:spPr/>
@@ -1257,14 +1247,14 @@
             <a:spLocks noGrp="1"/>
           </p:cNvSpPr>
           <p:nvPr>
-            <p:ph type="sldNum" idx="27"/>
+            <p:ph type="sldNum" idx="26"/>
           </p:nvPr>
         </p:nvSpPr>
         <p:spPr/>
         <p:txBody>
           <a:bodyPr/>
           <a:p>
-            <a:fld id="{F6A5236B-8B6B-40BC-928E-8B2204A48FF2}" type="slidenum">
+            <a:fld id="{C71999EB-C6F2-4D8E-A3F6-F09F40680722}" type="slidenum">
               <a:t>&lt;#&gt;</a:t>
             </a:fld>
           </a:p>
@@ -1277,7 +1267,7 @@
             <a:spLocks noGrp="1"/>
           </p:cNvSpPr>
           <p:nvPr>
-            <p:ph type="dt" idx="25"/>
+            <p:ph type="dt" idx="27"/>
           </p:nvPr>
         </p:nvSpPr>
         <p:spPr/>
@@ -1332,8 +1322,8 @@
         </p:nvSpPr>
         <p:spPr>
           <a:xfrm>
-            <a:off x="1523880" y="1122480"/>
-            <a:ext cx="9143640" cy="2387160"/>
+            <a:off x="838080" y="365040"/>
+            <a:ext cx="10514520" cy="1324440"/>
           </a:xfrm>
           <a:prstGeom prst="rect">
             <a:avLst/>
@@ -1344,30 +1334,27 @@
           </a:ln>
         </p:spPr>
         <p:txBody>
-          <a:bodyPr lIns="91440" rIns="91440" tIns="45720" bIns="45720" anchor="b">
+          <a:bodyPr lIns="0" rIns="0" tIns="0" bIns="0" anchor="ctr">
             <a:noAutofit/>
           </a:bodyPr>
           <a:p>
-            <a:pPr indent="0" algn="ctr" defTabSz="914400">
-              <a:lnSpc>
-                <a:spcPct val="90000"/>
-              </a:lnSpc>
+            <a:pPr indent="0">
               <a:buNone/>
             </a:pPr>
             <a:r>
-              <a:rPr b="0" lang="en-US" sz="6000" spc="-1" strike="noStrike">
-                <a:solidFill>
-                  <a:schemeClr val="dk1"/>
-                </a:solidFill>
-                <a:latin typeface="Calibri Light"/>
-              </a:rPr>
-              <a:t>Click to edit Master title style</a:t>
-            </a:r>
-            <a:endParaRPr b="0" lang="en-US" sz="6000" spc="-1" strike="noStrike">
-              <a:solidFill>
-                <a:schemeClr val="dk1"/>
-              </a:solidFill>
-              <a:latin typeface="Calibri"/>
+              <a:rPr b="0" lang="en-US" sz="1800" spc="-1" strike="noStrike">
+                <a:solidFill>
+                  <a:srgbClr val="000000"/>
+                </a:solidFill>
+                <a:latin typeface="Arial"/>
+              </a:rPr>
+              <a:t>Click to edit the title text format</a:t>
+            </a:r>
+            <a:endParaRPr b="0" lang="en-US" sz="1800" spc="-1" strike="noStrike">
+              <a:solidFill>
+                <a:srgbClr val="000000"/>
+              </a:solidFill>
+              <a:latin typeface="Arial"/>
             </a:endParaRPr>
           </a:p>
         </p:txBody>
@@ -1379,83 +1366,13 @@
             <a:spLocks noGrp="1"/>
           </p:cNvSpPr>
           <p:nvPr>
-            <p:ph type="dt" idx="1"/>
-          </p:nvPr>
-        </p:nvSpPr>
-        <p:spPr>
-          <a:xfrm>
-            <a:off x="838080" y="6356520"/>
-            <a:ext cx="2742840" cy="364680"/>
-          </a:xfrm>
-          <a:prstGeom prst="rect">
-            <a:avLst/>
-          </a:prstGeom>
-          <a:noFill/>
-          <a:ln w="0">
-            <a:noFill/>
-          </a:ln>
-        </p:spPr>
-        <p:txBody>
-          <a:bodyPr lIns="91440" rIns="91440" tIns="45720" bIns="45720" anchor="ctr">
-            <a:noAutofit/>
-          </a:bodyPr>
-          <a:lstStyle>
-            <a:lvl1pPr indent="0" defTabSz="914400">
-              <a:lnSpc>
-                <a:spcPct val="100000"/>
-              </a:lnSpc>
-              <a:buNone/>
-              <a:defRPr b="0" lang="en-US" sz="1200" spc="-1" strike="noStrike">
-                <a:solidFill>
-                  <a:schemeClr val="dk1">
-                    <a:tint val="75000"/>
-                  </a:schemeClr>
-                </a:solidFill>
-                <a:latin typeface="Calibri"/>
-              </a:defRPr>
-            </a:lvl1pPr>
-          </a:lstStyle>
-          <a:p>
-            <a:pPr indent="0" defTabSz="914400">
-              <a:lnSpc>
-                <a:spcPct val="100000"/>
-              </a:lnSpc>
-              <a:buNone/>
-            </a:pPr>
-            <a:r>
-              <a:rPr b="0" lang="en-US" sz="1200" spc="-1" strike="noStrike">
-                <a:solidFill>
-                  <a:schemeClr val="dk1">
-                    <a:tint val="75000"/>
-                  </a:schemeClr>
-                </a:solidFill>
-                <a:latin typeface="Calibri"/>
-              </a:rPr>
-              <a:t> </a:t>
-            </a:r>
-            <a:endParaRPr b="0" lang="en-US" sz="1200" spc="-1" strike="noStrike">
-              <a:solidFill>
-                <a:srgbClr val="000000"/>
-              </a:solidFill>
-              <a:latin typeface="Times New Roman"/>
-            </a:endParaRPr>
-          </a:p>
-        </p:txBody>
-      </p:sp>
-      <p:sp>
-        <p:nvSpPr>
-          <p:cNvPr id="2" name="PlaceHolder 3"/>
-          <p:cNvSpPr>
-            <a:spLocks noGrp="1"/>
-          </p:cNvSpPr>
-          <p:nvPr>
-            <p:ph type="ftr" idx="2"/>
+            <p:ph type="ftr" idx="1"/>
           </p:nvPr>
         </p:nvSpPr>
         <p:spPr>
           <a:xfrm>
             <a:off x="4038480" y="6356520"/>
-            <a:ext cx="4114440" cy="364680"/>
+            <a:ext cx="4113720" cy="363960"/>
           </a:xfrm>
           <a:prstGeom prst="rect">
             <a:avLst/>
@@ -1471,7 +1388,13 @@
           </a:bodyPr>
           <a:lstStyle>
             <a:lvl1pPr indent="0" algn="ctr">
+              <a:lnSpc>
+                <a:spcPct val="100000"/>
+              </a:lnSpc>
               <a:buNone/>
+              <a:tabLst>
+                <a:tab algn="l" pos="0"/>
+              </a:tabLst>
               <a:defRPr b="0" lang="en-US" sz="1400" spc="-1" strike="noStrike">
                 <a:solidFill>
                   <a:srgbClr val="000000"/>
@@ -1482,7 +1405,13 @@
           </a:lstStyle>
           <a:p>
             <a:pPr indent="0" algn="ctr">
+              <a:lnSpc>
+                <a:spcPct val="100000"/>
+              </a:lnSpc>
               <a:buNone/>
+              <a:tabLst>
+                <a:tab algn="l" pos="0"/>
+              </a:tabLst>
             </a:pPr>
             <a:r>
               <a:rPr b="0" lang="en-US" sz="1400" spc="-1" strike="noStrike">
@@ -1504,18 +1433,18 @@
       </p:sp>
       <p:sp>
         <p:nvSpPr>
-          <p:cNvPr id="3" name="PlaceHolder 4"/>
+          <p:cNvPr id="2" name="PlaceHolder 3"/>
           <p:cNvSpPr>
             <a:spLocks noGrp="1"/>
           </p:cNvSpPr>
           <p:nvPr>
-            <p:ph type="sldNum" idx="3"/>
+            <p:ph type="sldNum" idx="2"/>
           </p:nvPr>
         </p:nvSpPr>
         <p:spPr>
           <a:xfrm>
             <a:off x="8610480" y="6356520"/>
-            <a:ext cx="2742840" cy="364680"/>
+            <a:ext cx="2742120" cy="363960"/>
           </a:xfrm>
           <a:prstGeom prst="rect">
             <a:avLst/>
@@ -1535,6 +1464,9 @@
                 <a:spcPct val="100000"/>
               </a:lnSpc>
               <a:buNone/>
+              <a:tabLst>
+                <a:tab algn="l" pos="0"/>
+              </a:tabLst>
               <a:defRPr b="0" lang="en-US" sz="1200" spc="-1" strike="noStrike">
                 <a:solidFill>
                   <a:schemeClr val="dk1">
@@ -1551,8 +1483,11 @@
                 <a:spcPct val="100000"/>
               </a:lnSpc>
               <a:buNone/>
-            </a:pPr>
-            <a:fld id="{65137DD2-58A6-4F25-8F2A-B43EF852186B}" type="slidenum">
+              <a:tabLst>
+                <a:tab algn="l" pos="0"/>
+              </a:tabLst>
+            </a:pPr>
+            <a:fld id="{4E4F16DD-1E71-4B36-BC3E-419A396E369C}" type="slidenum">
               <a:rPr b="0" lang="en-US" sz="1200" spc="-1" strike="noStrike">
                 <a:solidFill>
                   <a:schemeClr val="dk1">
@@ -1561,9 +1496,69 @@
                 </a:solidFill>
                 <a:latin typeface="Calibri"/>
               </a:rPr>
-              <a:t>23</a:t>
+              <a:t>18</a:t>
             </a:fld>
             <a:endParaRPr b="0" lang="en-US" sz="1200" spc="-1" strike="noStrike">
+              <a:solidFill>
+                <a:srgbClr val="000000"/>
+              </a:solidFill>
+              <a:latin typeface="Times New Roman"/>
+            </a:endParaRPr>
+          </a:p>
+        </p:txBody>
+      </p:sp>
+      <p:sp>
+        <p:nvSpPr>
+          <p:cNvPr id="3" name="PlaceHolder 4"/>
+          <p:cNvSpPr>
+            <a:spLocks noGrp="1"/>
+          </p:cNvSpPr>
+          <p:nvPr>
+            <p:ph type="dt" idx="3"/>
+          </p:nvPr>
+        </p:nvSpPr>
+        <p:spPr>
+          <a:xfrm>
+            <a:off x="838080" y="6356520"/>
+            <a:ext cx="2742120" cy="363960"/>
+          </a:xfrm>
+          <a:prstGeom prst="rect">
+            <a:avLst/>
+          </a:prstGeom>
+          <a:noFill/>
+          <a:ln w="0">
+            <a:noFill/>
+          </a:ln>
+        </p:spPr>
+        <p:txBody>
+          <a:bodyPr lIns="91440" rIns="91440" tIns="45720" bIns="45720" anchor="ctr">
+            <a:noAutofit/>
+          </a:bodyPr>
+          <a:lstStyle>
+            <a:lvl1pPr indent="0">
+              <a:buNone/>
+              <a:defRPr b="0" lang="en-US" sz="1400" spc="-1" strike="noStrike">
+                <a:solidFill>
+                  <a:srgbClr val="000000"/>
+                </a:solidFill>
+                <a:latin typeface="Times New Roman"/>
+              </a:defRPr>
+            </a:lvl1pPr>
+          </a:lstStyle>
+          <a:p>
+            <a:pPr indent="0">
+              <a:buNone/>
+            </a:pPr>
+            <a:r>
+              <a:rPr b="0" lang="en-US" sz="1400" spc="-1" strike="noStrike">
+                <a:solidFill>
+                  <a:srgbClr val="000000"/>
+                </a:solidFill>
+                <a:latin typeface="Times New Roman"/>
+              </a:rPr>
+              <a:t> </a:t>
+            </a:r>
+            <a:endParaRPr b="0" lang="en-US" sz="1400" spc="-1" strike="noStrike">
               <a:solidFill>
                 <a:srgbClr val="000000"/>
               </a:solidFill>
@@ -1601,9 +1596,6 @@
           </a:bodyPr>
           <a:p>
             <a:pPr marL="432000" indent="-324000">
-              <a:lnSpc>
-                <a:spcPct val="90000"/>
-              </a:lnSpc>
               <a:spcBef>
                 <a:spcPts val="1417"/>
               </a:spcBef>
@@ -1615,26 +1607,23 @@
               <a:buChar char=""/>
             </a:pPr>
             <a:r>
-              <a:rPr b="0" lang="en-US" sz="2800" spc="-1" strike="noStrike">
-                <a:solidFill>
-                  <a:schemeClr val="dk1"/>
-                </a:solidFill>
-                <a:latin typeface="Calibri"/>
+              <a:rPr b="0" lang="en-US" sz="3200" spc="-1" strike="noStrike">
+                <a:solidFill>
+                  <a:srgbClr val="000000"/>
+                </a:solidFill>
+                <a:latin typeface="Arial"/>
               </a:rPr>
               <a:t>Click to edit the outline text format</a:t>
             </a:r>
-            <a:endParaRPr b="0" lang="en-US" sz="2800" spc="-1" strike="noStrike">
-              <a:solidFill>
-                <a:schemeClr val="dk1"/>
-              </a:solidFill>
-              <a:latin typeface="Calibri"/>
+            <a:endParaRPr b="0" lang="en-US" sz="3200" spc="-1" strike="noStrike">
+              <a:solidFill>
+                <a:srgbClr val="000000"/>
+              </a:solidFill>
+              <a:latin typeface="Arial"/>
             </a:endParaRPr>
           </a:p>
           <a:p>
             <a:pPr lvl="1" marL="864000" indent="-324000">
-              <a:lnSpc>
-                <a:spcPct val="90000"/>
-              </a:lnSpc>
               <a:spcBef>
                 <a:spcPts val="1134"/>
               </a:spcBef>
@@ -1646,26 +1635,23 @@
               <a:buChar char=""/>
             </a:pPr>
             <a:r>
-              <a:rPr b="0" lang="en-US" sz="2000" spc="-1" strike="noStrike">
-                <a:solidFill>
-                  <a:schemeClr val="dk1"/>
-                </a:solidFill>
-                <a:latin typeface="Calibri"/>
+              <a:rPr b="0" lang="en-US" sz="2800" spc="-1" strike="noStrike">
+                <a:solidFill>
+                  <a:srgbClr val="000000"/>
+                </a:solidFill>
+                <a:latin typeface="Arial"/>
               </a:rPr>
               <a:t>Second Outline Level</a:t>
             </a:r>
-            <a:endParaRPr b="0" lang="en-US" sz="2000" spc="-1" strike="noStrike">
-              <a:solidFill>
-                <a:schemeClr val="dk1"/>
-              </a:solidFill>
-              <a:latin typeface="Calibri"/>
+            <a:endParaRPr b="0" lang="en-US" sz="2800" spc="-1" strike="noStrike">
+              <a:solidFill>
+                <a:srgbClr val="000000"/>
+              </a:solidFill>
+              <a:latin typeface="Arial"/>
             </a:endParaRPr>
           </a:p>
           <a:p>
             <a:pPr lvl="2" marL="1296000" indent="-288000">
-              <a:lnSpc>
-                <a:spcPct val="90000"/>
-              </a:lnSpc>
               <a:spcBef>
                 <a:spcPts val="850"/>
               </a:spcBef>
@@ -1677,26 +1663,23 @@
               <a:buChar char=""/>
             </a:pPr>
             <a:r>
-              <a:rPr b="0" lang="en-US" sz="1800" spc="-1" strike="noStrike">
-                <a:solidFill>
-                  <a:schemeClr val="dk1"/>
-                </a:solidFill>
-                <a:latin typeface="Calibri"/>
+              <a:rPr b="0" lang="en-US" sz="2400" spc="-1" strike="noStrike">
+                <a:solidFill>
+                  <a:srgbClr val="000000"/>
+                </a:solidFill>
+                <a:latin typeface="Arial"/>
               </a:rPr>
               <a:t>Third Outline Level</a:t>
             </a:r>
-            <a:endParaRPr b="0" lang="en-US" sz="1800" spc="-1" strike="noStrike">
-              <a:solidFill>
-                <a:schemeClr val="dk1"/>
-              </a:solidFill>
-              <a:latin typeface="Calibri"/>
+            <a:endParaRPr b="0" lang="en-US" sz="2400" spc="-1" strike="noStrike">
+              <a:solidFill>
+                <a:srgbClr val="000000"/>
+              </a:solidFill>
+              <a:latin typeface="Arial"/>
             </a:endParaRPr>
           </a:p>
           <a:p>
             <a:pPr lvl="3" marL="1728000" indent="-216000">
-              <a:lnSpc>
-                <a:spcPct val="90000"/>
-              </a:lnSpc>
               <a:spcBef>
                 <a:spcPts val="567"/>
               </a:spcBef>
@@ -1708,26 +1691,23 @@
               <a:buChar char=""/>
             </a:pPr>
             <a:r>
-              <a:rPr b="0" lang="en-US" sz="1800" spc="-1" strike="noStrike">
-                <a:solidFill>
-                  <a:schemeClr val="dk1"/>
-                </a:solidFill>
-                <a:latin typeface="Calibri"/>
+              <a:rPr b="0" lang="en-US" sz="2000" spc="-1" strike="noStrike">
+                <a:solidFill>
+                  <a:srgbClr val="000000"/>
+                </a:solidFill>
+                <a:latin typeface="Arial"/>
               </a:rPr>
               <a:t>Fourth Outline Level</a:t>
             </a:r>
-            <a:endParaRPr b="0" lang="en-US" sz="1800" spc="-1" strike="noStrike">
-              <a:solidFill>
-                <a:schemeClr val="dk1"/>
-              </a:solidFill>
-              <a:latin typeface="Calibri"/>
+            <a:endParaRPr b="0" lang="en-US" sz="2000" spc="-1" strike="noStrike">
+              <a:solidFill>
+                <a:srgbClr val="000000"/>
+              </a:solidFill>
+              <a:latin typeface="Arial"/>
             </a:endParaRPr>
           </a:p>
           <a:p>
             <a:pPr lvl="4" marL="2160000" indent="-216000">
-              <a:lnSpc>
-                <a:spcPct val="90000"/>
-              </a:lnSpc>
               <a:spcBef>
                 <a:spcPts val="283"/>
               </a:spcBef>
@@ -1741,24 +1721,21 @@
             <a:r>
               <a:rPr b="0" lang="en-US" sz="2000" spc="-1" strike="noStrike">
                 <a:solidFill>
-                  <a:schemeClr val="dk1"/>
-                </a:solidFill>
-                <a:latin typeface="Calibri"/>
+                  <a:srgbClr val="000000"/>
+                </a:solidFill>
+                <a:latin typeface="Arial"/>
               </a:rPr>
               <a:t>Fifth Outline Level</a:t>
             </a:r>
             <a:endParaRPr b="0" lang="en-US" sz="2000" spc="-1" strike="noStrike">
               <a:solidFill>
-                <a:schemeClr val="dk1"/>
-              </a:solidFill>
-              <a:latin typeface="Calibri"/>
+                <a:srgbClr val="000000"/>
+              </a:solidFill>
+              <a:latin typeface="Arial"/>
             </a:endParaRPr>
           </a:p>
           <a:p>
             <a:pPr lvl="5" marL="2592000" indent="-216000">
-              <a:lnSpc>
-                <a:spcPct val="90000"/>
-              </a:lnSpc>
               <a:spcBef>
                 <a:spcPts val="283"/>
               </a:spcBef>
@@ -1772,24 +1749,21 @@
             <a:r>
               <a:rPr b="0" lang="en-US" sz="2000" spc="-1" strike="noStrike">
                 <a:solidFill>
-                  <a:schemeClr val="dk1"/>
-                </a:solidFill>
-                <a:latin typeface="Calibri"/>
+                  <a:srgbClr val="000000"/>
+                </a:solidFill>
+                <a:latin typeface="Arial"/>
               </a:rPr>
               <a:t>Sixth Outline Level</a:t>
             </a:r>
             <a:endParaRPr b="0" lang="en-US" sz="2000" spc="-1" strike="noStrike">
               <a:solidFill>
-                <a:schemeClr val="dk1"/>
-              </a:solidFill>
-              <a:latin typeface="Calibri"/>
+                <a:srgbClr val="000000"/>
+              </a:solidFill>
+              <a:latin typeface="Arial"/>
             </a:endParaRPr>
           </a:p>
           <a:p>
             <a:pPr lvl="6" marL="3024000" indent="-216000">
-              <a:lnSpc>
-                <a:spcPct val="90000"/>
-              </a:lnSpc>
               <a:spcBef>
                 <a:spcPts val="283"/>
               </a:spcBef>
@@ -1803,17 +1777,17 @@
             <a:r>
               <a:rPr b="0" lang="en-US" sz="2000" spc="-1" strike="noStrike">
                 <a:solidFill>
-                  <a:schemeClr val="dk1"/>
-                </a:solidFill>
-                <a:latin typeface="Calibri"/>
+                  <a:srgbClr val="000000"/>
+                </a:solidFill>
+                <a:latin typeface="Arial"/>
               </a:rPr>
               <a:t>Seventh Outline Level</a:t>
             </a:r>
             <a:endParaRPr b="0" lang="en-US" sz="2000" spc="-1" strike="noStrike">
               <a:solidFill>
-                <a:schemeClr val="dk1"/>
-              </a:solidFill>
-              <a:latin typeface="Calibri"/>
+                <a:srgbClr val="000000"/>
+              </a:solidFill>
+              <a:latin typeface="Arial"/>
             </a:endParaRPr>
           </a:p>
         </p:txBody>
@@ -1853,377 +1827,18 @@
       </p:grpSpPr>
       <p:sp>
         <p:nvSpPr>
-          <p:cNvPr id="54" name="PlaceHolder 1"/>
+          <p:cNvPr id="43" name="PlaceHolder 1"/>
           <p:cNvSpPr>
             <a:spLocks noGrp="1"/>
           </p:cNvSpPr>
           <p:nvPr>
-            <p:ph type="title"/>
-          </p:nvPr>
-        </p:nvSpPr>
-        <p:spPr>
-          <a:xfrm>
-            <a:off x="839880" y="457200"/>
-            <a:ext cx="3931920" cy="1599840"/>
-          </a:xfrm>
-          <a:prstGeom prst="rect">
-            <a:avLst/>
-          </a:prstGeom>
-          <a:noFill/>
-          <a:ln w="0">
-            <a:noFill/>
-          </a:ln>
-        </p:spPr>
-        <p:txBody>
-          <a:bodyPr lIns="91440" rIns="91440" tIns="45720" bIns="45720" anchor="b">
-            <a:noAutofit/>
-          </a:bodyPr>
-          <a:p>
-            <a:pPr indent="0" defTabSz="914400">
-              <a:lnSpc>
-                <a:spcPct val="90000"/>
-              </a:lnSpc>
-              <a:buNone/>
-            </a:pPr>
-            <a:r>
-              <a:rPr b="0" lang="en-US" sz="3200" spc="-1" strike="noStrike">
-                <a:solidFill>
-                  <a:schemeClr val="dk1"/>
-                </a:solidFill>
-                <a:latin typeface="Calibri Light"/>
-              </a:rPr>
-              <a:t>Click to edit Master title style</a:t>
-            </a:r>
-            <a:endParaRPr b="0" lang="en-US" sz="3200" spc="-1" strike="noStrike">
-              <a:solidFill>
-                <a:schemeClr val="dk1"/>
-              </a:solidFill>
-              <a:latin typeface="Calibri"/>
-            </a:endParaRPr>
-          </a:p>
-        </p:txBody>
-      </p:sp>
-      <p:sp>
-        <p:nvSpPr>
-          <p:cNvPr id="55" name="PlaceHolder 2"/>
-          <p:cNvSpPr>
-            <a:spLocks noGrp="1"/>
-          </p:cNvSpPr>
-          <p:nvPr>
-            <p:ph type="body"/>
-          </p:nvPr>
-        </p:nvSpPr>
-        <p:spPr>
-          <a:xfrm>
-            <a:off x="5183280" y="987480"/>
-            <a:ext cx="6171840" cy="4873320"/>
-          </a:xfrm>
-          <a:prstGeom prst="rect">
-            <a:avLst/>
-          </a:prstGeom>
-          <a:noFill/>
-          <a:ln w="0">
-            <a:noFill/>
-          </a:ln>
-        </p:spPr>
-        <p:txBody>
-          <a:bodyPr lIns="91440" rIns="91440" tIns="45720" bIns="45720" anchor="t">
-            <a:noAutofit/>
-          </a:bodyPr>
-          <a:p>
-            <a:pPr marL="228600" indent="-228600" defTabSz="914400">
-              <a:lnSpc>
-                <a:spcPct val="90000"/>
-              </a:lnSpc>
-              <a:spcBef>
-                <a:spcPts val="1001"/>
-              </a:spcBef>
-              <a:buClr>
-                <a:srgbClr val="000000"/>
-              </a:buClr>
-              <a:buFont typeface="Arial"/>
-              <a:buChar char="•"/>
-            </a:pPr>
-            <a:r>
-              <a:rPr b="0" lang="en-US" sz="3200" spc="-1" strike="noStrike">
-                <a:solidFill>
-                  <a:schemeClr val="dk1"/>
-                </a:solidFill>
-                <a:latin typeface="Calibri"/>
-              </a:rPr>
-              <a:t>Click to edit Master text styles</a:t>
-            </a:r>
-            <a:endParaRPr b="0" lang="en-US" sz="3200" spc="-1" strike="noStrike">
-              <a:solidFill>
-                <a:schemeClr val="dk1"/>
-              </a:solidFill>
-              <a:latin typeface="Calibri"/>
-            </a:endParaRPr>
-          </a:p>
-          <a:p>
-            <a:pPr lvl="1" marL="685800" indent="-228600" defTabSz="914400">
-              <a:lnSpc>
-                <a:spcPct val="90000"/>
-              </a:lnSpc>
-              <a:spcBef>
-                <a:spcPts val="499"/>
-              </a:spcBef>
-              <a:buClr>
-                <a:srgbClr val="000000"/>
-              </a:buClr>
-              <a:buFont typeface="Arial"/>
-              <a:buChar char="•"/>
-            </a:pPr>
-            <a:r>
-              <a:rPr b="0" lang="en-US" sz="2800" spc="-1" strike="noStrike">
-                <a:solidFill>
-                  <a:schemeClr val="dk1"/>
-                </a:solidFill>
-                <a:latin typeface="Calibri"/>
-              </a:rPr>
-              <a:t>Second level</a:t>
-            </a:r>
-            <a:endParaRPr b="0" lang="en-US" sz="2800" spc="-1" strike="noStrike">
-              <a:solidFill>
-                <a:schemeClr val="dk1"/>
-              </a:solidFill>
-              <a:latin typeface="Calibri"/>
-            </a:endParaRPr>
-          </a:p>
-          <a:p>
-            <a:pPr lvl="2" marL="1143000" indent="-228600" defTabSz="914400">
-              <a:lnSpc>
-                <a:spcPct val="90000"/>
-              </a:lnSpc>
-              <a:spcBef>
-                <a:spcPts val="499"/>
-              </a:spcBef>
-              <a:buClr>
-                <a:srgbClr val="000000"/>
-              </a:buClr>
-              <a:buFont typeface="Arial"/>
-              <a:buChar char="•"/>
-            </a:pPr>
-            <a:r>
-              <a:rPr b="0" lang="en-US" sz="2400" spc="-1" strike="noStrike">
-                <a:solidFill>
-                  <a:schemeClr val="dk1"/>
-                </a:solidFill>
-                <a:latin typeface="Calibri"/>
-              </a:rPr>
-              <a:t>Third level</a:t>
-            </a:r>
-            <a:endParaRPr b="0" lang="en-US" sz="2400" spc="-1" strike="noStrike">
-              <a:solidFill>
-                <a:schemeClr val="dk1"/>
-              </a:solidFill>
-              <a:latin typeface="Calibri"/>
-            </a:endParaRPr>
-          </a:p>
-          <a:p>
-            <a:pPr lvl="3" marL="1600200" indent="-228600" defTabSz="914400">
-              <a:lnSpc>
-                <a:spcPct val="90000"/>
-              </a:lnSpc>
-              <a:spcBef>
-                <a:spcPts val="499"/>
-              </a:spcBef>
-              <a:buClr>
-                <a:srgbClr val="000000"/>
-              </a:buClr>
-              <a:buFont typeface="Arial"/>
-              <a:buChar char="•"/>
-            </a:pPr>
-            <a:r>
-              <a:rPr b="0" lang="en-US" sz="2000" spc="-1" strike="noStrike">
-                <a:solidFill>
-                  <a:schemeClr val="dk1"/>
-                </a:solidFill>
-                <a:latin typeface="Calibri"/>
-              </a:rPr>
-              <a:t>Fourth level</a:t>
-            </a:r>
-            <a:endParaRPr b="0" lang="en-US" sz="2000" spc="-1" strike="noStrike">
-              <a:solidFill>
-                <a:schemeClr val="dk1"/>
-              </a:solidFill>
-              <a:latin typeface="Calibri"/>
-            </a:endParaRPr>
-          </a:p>
-          <a:p>
-            <a:pPr lvl="4" marL="2057400" indent="-228600" defTabSz="914400">
-              <a:lnSpc>
-                <a:spcPct val="90000"/>
-              </a:lnSpc>
-              <a:spcBef>
-                <a:spcPts val="499"/>
-              </a:spcBef>
-              <a:buClr>
-                <a:srgbClr val="000000"/>
-              </a:buClr>
-              <a:buFont typeface="Arial"/>
-              <a:buChar char="•"/>
-            </a:pPr>
-            <a:r>
-              <a:rPr b="0" lang="en-US" sz="2000" spc="-1" strike="noStrike">
-                <a:solidFill>
-                  <a:schemeClr val="dk1"/>
-                </a:solidFill>
-                <a:latin typeface="Calibri"/>
-              </a:rPr>
-              <a:t>Fifth level</a:t>
-            </a:r>
-            <a:endParaRPr b="0" lang="en-US" sz="2000" spc="-1" strike="noStrike">
-              <a:solidFill>
-                <a:schemeClr val="dk1"/>
-              </a:solidFill>
-              <a:latin typeface="Calibri"/>
-            </a:endParaRPr>
-          </a:p>
-        </p:txBody>
-      </p:sp>
-      <p:sp>
-        <p:nvSpPr>
-          <p:cNvPr id="56" name="PlaceHolder 3"/>
-          <p:cNvSpPr>
-            <a:spLocks noGrp="1"/>
-          </p:cNvSpPr>
-          <p:nvPr>
-            <p:ph type="body"/>
-          </p:nvPr>
-        </p:nvSpPr>
-        <p:spPr>
-          <a:xfrm>
-            <a:off x="839880" y="2057400"/>
-            <a:ext cx="3931920" cy="3811320"/>
-          </a:xfrm>
-          <a:prstGeom prst="rect">
-            <a:avLst/>
-          </a:prstGeom>
-          <a:noFill/>
-          <a:ln w="0">
-            <a:noFill/>
-          </a:ln>
-        </p:spPr>
-        <p:txBody>
-          <a:bodyPr lIns="91440" rIns="91440" tIns="45720" bIns="45720" anchor="t">
-            <a:noAutofit/>
-          </a:bodyPr>
-          <a:p>
-            <a:pPr indent="0" defTabSz="914400">
-              <a:lnSpc>
-                <a:spcPct val="90000"/>
-              </a:lnSpc>
-              <a:spcBef>
-                <a:spcPts val="1001"/>
-              </a:spcBef>
-              <a:buNone/>
-              <a:tabLst>
-                <a:tab algn="l" pos="0"/>
-              </a:tabLst>
-            </a:pPr>
-            <a:r>
-              <a:rPr b="0" lang="en-US" sz="1600" spc="-1" strike="noStrike">
-                <a:solidFill>
-                  <a:schemeClr val="dk1"/>
-                </a:solidFill>
-                <a:latin typeface="Calibri"/>
-              </a:rPr>
-              <a:t>Click to edit Master text styles</a:t>
-            </a:r>
-            <a:endParaRPr b="0" lang="en-US" sz="1600" spc="-1" strike="noStrike">
-              <a:solidFill>
-                <a:schemeClr val="dk1"/>
-              </a:solidFill>
-              <a:latin typeface="Calibri"/>
-            </a:endParaRPr>
-          </a:p>
-        </p:txBody>
-      </p:sp>
-      <p:sp>
-        <p:nvSpPr>
-          <p:cNvPr id="57" name="PlaceHolder 4"/>
-          <p:cNvSpPr>
-            <a:spLocks noGrp="1"/>
-          </p:cNvSpPr>
-          <p:nvPr>
-            <p:ph type="dt" idx="28"/>
-          </p:nvPr>
-        </p:nvSpPr>
-        <p:spPr>
-          <a:xfrm>
-            <a:off x="838080" y="6356520"/>
-            <a:ext cx="2742840" cy="364680"/>
-          </a:xfrm>
-          <a:prstGeom prst="rect">
-            <a:avLst/>
-          </a:prstGeom>
-          <a:noFill/>
-          <a:ln w="0">
-            <a:noFill/>
-          </a:ln>
-        </p:spPr>
-        <p:txBody>
-          <a:bodyPr lIns="91440" rIns="91440" tIns="45720" bIns="45720" anchor="ctr">
-            <a:noAutofit/>
-          </a:bodyPr>
-          <a:lstStyle>
-            <a:lvl1pPr indent="0" defTabSz="914400">
-              <a:lnSpc>
-                <a:spcPct val="100000"/>
-              </a:lnSpc>
-              <a:buNone/>
-              <a:defRPr b="0" lang="en-US" sz="1200" spc="-1" strike="noStrike">
-                <a:solidFill>
-                  <a:schemeClr val="dk1">
-                    <a:tint val="75000"/>
-                  </a:schemeClr>
-                </a:solidFill>
-                <a:latin typeface="Calibri"/>
-              </a:defRPr>
-            </a:lvl1pPr>
-          </a:lstStyle>
-          <a:p>
-            <a:pPr indent="0" defTabSz="914400">
-              <a:lnSpc>
-                <a:spcPct val="100000"/>
-              </a:lnSpc>
-              <a:buNone/>
-            </a:pPr>
-            <a:r>
-              <a:rPr b="0" lang="en-US" sz="1200" spc="-1" strike="noStrike">
-                <a:solidFill>
-                  <a:schemeClr val="dk1">
-                    <a:tint val="75000"/>
-                  </a:schemeClr>
-                </a:solidFill>
-                <a:latin typeface="Calibri"/>
-              </a:rPr>
-              <a:t>&lt;date/time&gt;</a:t>
-            </a:r>
-            <a:endParaRPr b="0" lang="en-US" sz="1200" spc="-1" strike="noStrike">
-              <a:solidFill>
-                <a:srgbClr val="000000"/>
-              </a:solidFill>
-              <a:latin typeface="Times New Roman"/>
-            </a:endParaRPr>
-          </a:p>
-        </p:txBody>
-      </p:sp>
-      <p:sp>
-        <p:nvSpPr>
-          <p:cNvPr id="58" name="PlaceHolder 5"/>
-          <p:cNvSpPr>
-            <a:spLocks noGrp="1"/>
-          </p:cNvSpPr>
-          <p:nvPr>
-            <p:ph type="ftr" idx="29"/>
+            <p:ph type="ftr" idx="28"/>
           </p:nvPr>
         </p:nvSpPr>
         <p:spPr>
           <a:xfrm>
             <a:off x="4038480" y="6356520"/>
-            <a:ext cx="4114440" cy="364680"/>
+            <a:ext cx="4113720" cy="363960"/>
           </a:xfrm>
           <a:prstGeom prst="rect">
             <a:avLst/>
@@ -2239,7 +1854,13 @@
           </a:bodyPr>
           <a:lstStyle>
             <a:lvl1pPr indent="0" algn="ctr">
+              <a:lnSpc>
+                <a:spcPct val="100000"/>
+              </a:lnSpc>
               <a:buNone/>
+              <a:tabLst>
+                <a:tab algn="l" pos="0"/>
+              </a:tabLst>
               <a:defRPr b="0" lang="en-US" sz="1400" spc="-1" strike="noStrike">
                 <a:solidFill>
                   <a:srgbClr val="000000"/>
@@ -2250,7 +1871,13 @@
           </a:lstStyle>
           <a:p>
             <a:pPr indent="0" algn="ctr">
+              <a:lnSpc>
+                <a:spcPct val="100000"/>
+              </a:lnSpc>
               <a:buNone/>
+              <a:tabLst>
+                <a:tab algn="l" pos="0"/>
+              </a:tabLst>
             </a:pPr>
             <a:r>
               <a:rPr b="0" lang="en-US" sz="1400" spc="-1" strike="noStrike">
@@ -2272,18 +1899,18 @@
       </p:sp>
       <p:sp>
         <p:nvSpPr>
-          <p:cNvPr id="59" name="PlaceHolder 6"/>
+          <p:cNvPr id="44" name="PlaceHolder 2"/>
           <p:cNvSpPr>
             <a:spLocks noGrp="1"/>
           </p:cNvSpPr>
           <p:nvPr>
-            <p:ph type="sldNum" idx="30"/>
+            <p:ph type="sldNum" idx="29"/>
           </p:nvPr>
         </p:nvSpPr>
         <p:spPr>
           <a:xfrm>
             <a:off x="8610480" y="6356520"/>
-            <a:ext cx="2742840" cy="364680"/>
+            <a:ext cx="2742120" cy="363960"/>
           </a:xfrm>
           <a:prstGeom prst="rect">
             <a:avLst/>
@@ -2303,6 +1930,9 @@
                 <a:spcPct val="100000"/>
               </a:lnSpc>
               <a:buNone/>
+              <a:tabLst>
+                <a:tab algn="l" pos="0"/>
+              </a:tabLst>
               <a:defRPr b="0" lang="en-US" sz="1200" spc="-1" strike="noStrike">
                 <a:solidFill>
                   <a:schemeClr val="dk1">
@@ -2319,8 +1949,11 @@
                 <a:spcPct val="100000"/>
               </a:lnSpc>
               <a:buNone/>
-            </a:pPr>
-            <a:fld id="{FF1C6355-395C-4C64-851A-66CB6B2ECC89}" type="slidenum">
+              <a:tabLst>
+                <a:tab algn="l" pos="0"/>
+              </a:tabLst>
+            </a:pPr>
+            <a:fld id="{A0C66036-6ACC-4F13-85F6-BCEB6731325A}" type="slidenum">
               <a:rPr b="0" lang="en-US" sz="1200" spc="-1" strike="noStrike">
                 <a:solidFill>
                   <a:schemeClr val="dk1">
@@ -2332,6 +1965,66 @@
               <a:t>&lt;number&gt;</a:t>
             </a:fld>
             <a:endParaRPr b="0" lang="en-US" sz="1200" spc="-1" strike="noStrike">
+              <a:solidFill>
+                <a:srgbClr val="000000"/>
+              </a:solidFill>
+              <a:latin typeface="Times New Roman"/>
+            </a:endParaRPr>
+          </a:p>
+        </p:txBody>
+      </p:sp>
+      <p:sp>
+        <p:nvSpPr>
+          <p:cNvPr id="45" name="PlaceHolder 3"/>
+          <p:cNvSpPr>
+            <a:spLocks noGrp="1"/>
+          </p:cNvSpPr>
+          <p:nvPr>
+            <p:ph type="dt" idx="30"/>
+          </p:nvPr>
+        </p:nvSpPr>
+        <p:spPr>
+          <a:xfrm>
+            <a:off x="838080" y="6356520"/>
+            <a:ext cx="2742120" cy="363960"/>
+          </a:xfrm>
+          <a:prstGeom prst="rect">
+            <a:avLst/>
+          </a:prstGeom>
+          <a:noFill/>
+          <a:ln w="0">
+            <a:noFill/>
+          </a:ln>
+        </p:spPr>
+        <p:txBody>
+          <a:bodyPr lIns="91440" rIns="91440" tIns="45720" bIns="45720" anchor="ctr">
+            <a:noAutofit/>
+          </a:bodyPr>
+          <a:lstStyle>
+            <a:lvl1pPr indent="0">
+              <a:buNone/>
+              <a:defRPr b="0" lang="en-US" sz="1400" spc="-1" strike="noStrike">
+                <a:solidFill>
+                  <a:srgbClr val="000000"/>
+                </a:solidFill>
+                <a:latin typeface="Times New Roman"/>
+              </a:defRPr>
+            </a:lvl1pPr>
+          </a:lstStyle>
+          <a:p>
+            <a:pPr indent="0">
+              <a:buNone/>
+            </a:pPr>
+            <a:r>
+              <a:rPr b="0" lang="en-US" sz="1400" spc="-1" strike="noStrike">
+                <a:solidFill>
+                  <a:srgbClr val="000000"/>
+                </a:solidFill>
+                <a:latin typeface="Times New Roman"/>
+              </a:rPr>
+              <a:t>&lt;date/time&gt;</a:t>
+            </a:r>
+            <a:endParaRPr b="0" lang="en-US" sz="1400" spc="-1" strike="noStrike">
               <a:solidFill>
                 <a:srgbClr val="000000"/>
               </a:solidFill>
@@ -2375,444 +2068,18 @@
       </p:grpSpPr>
       <p:sp>
         <p:nvSpPr>
-          <p:cNvPr id="60" name="PlaceHolder 1"/>
+          <p:cNvPr id="46" name="PlaceHolder 1"/>
           <p:cNvSpPr>
             <a:spLocks noGrp="1"/>
           </p:cNvSpPr>
           <p:nvPr>
-            <p:ph type="title"/>
-          </p:nvPr>
-        </p:nvSpPr>
-        <p:spPr>
-          <a:xfrm>
-            <a:off x="839880" y="457200"/>
-            <a:ext cx="3931920" cy="1599840"/>
-          </a:xfrm>
-          <a:prstGeom prst="rect">
-            <a:avLst/>
-          </a:prstGeom>
-          <a:noFill/>
-          <a:ln w="0">
-            <a:noFill/>
-          </a:ln>
-        </p:spPr>
-        <p:txBody>
-          <a:bodyPr lIns="91440" rIns="91440" tIns="45720" bIns="45720" anchor="b">
-            <a:noAutofit/>
-          </a:bodyPr>
-          <a:p>
-            <a:pPr indent="0" defTabSz="914400">
-              <a:lnSpc>
-                <a:spcPct val="90000"/>
-              </a:lnSpc>
-              <a:buNone/>
-            </a:pPr>
-            <a:r>
-              <a:rPr b="0" lang="en-US" sz="3200" spc="-1" strike="noStrike">
-                <a:solidFill>
-                  <a:schemeClr val="dk1"/>
-                </a:solidFill>
-                <a:latin typeface="Calibri Light"/>
-              </a:rPr>
-              <a:t>Click to edit Master title style</a:t>
-            </a:r>
-            <a:endParaRPr b="0" lang="en-US" sz="3200" spc="-1" strike="noStrike">
-              <a:solidFill>
-                <a:schemeClr val="dk1"/>
-              </a:solidFill>
-              <a:latin typeface="Calibri"/>
-            </a:endParaRPr>
-          </a:p>
-        </p:txBody>
-      </p:sp>
-      <p:sp>
-        <p:nvSpPr>
-          <p:cNvPr id="61" name="PlaceHolder 2"/>
-          <p:cNvSpPr>
-            <a:spLocks noGrp="1"/>
-          </p:cNvSpPr>
-          <p:nvPr>
-            <p:ph type="body"/>
-          </p:nvPr>
-        </p:nvSpPr>
-        <p:spPr>
-          <a:xfrm>
-            <a:off x="5183280" y="987480"/>
-            <a:ext cx="6171840" cy="4873320"/>
-          </a:xfrm>
-          <a:prstGeom prst="rect">
-            <a:avLst/>
-          </a:prstGeom>
-          <a:noFill/>
-          <a:ln w="0">
-            <a:noFill/>
-          </a:ln>
-        </p:spPr>
-        <p:txBody>
-          <a:bodyPr lIns="90000" rIns="90000" tIns="45000" bIns="45000" anchor="t">
-            <a:noAutofit/>
-          </a:bodyPr>
-          <a:p>
-            <a:pPr marL="432000" indent="-324000">
-              <a:lnSpc>
-                <a:spcPct val="90000"/>
-              </a:lnSpc>
-              <a:spcBef>
-                <a:spcPts val="1417"/>
-              </a:spcBef>
-              <a:buClr>
-                <a:srgbClr val="000000"/>
-              </a:buClr>
-              <a:buSzPct val="45000"/>
-              <a:buFont typeface="Wingdings" charset="2"/>
-              <a:buChar char=""/>
-            </a:pPr>
-            <a:r>
-              <a:rPr b="0" lang="en-US" sz="3200" spc="-1" strike="noStrike">
-                <a:solidFill>
-                  <a:schemeClr val="dk1"/>
-                </a:solidFill>
-                <a:latin typeface="Calibri"/>
-              </a:rPr>
-              <a:t>Click to edit the outline text format</a:t>
-            </a:r>
-            <a:endParaRPr b="0" lang="en-US" sz="3200" spc="-1" strike="noStrike">
-              <a:solidFill>
-                <a:schemeClr val="dk1"/>
-              </a:solidFill>
-              <a:latin typeface="Calibri"/>
-            </a:endParaRPr>
-          </a:p>
-          <a:p>
-            <a:pPr lvl="1" marL="864000" indent="-324000">
-              <a:lnSpc>
-                <a:spcPct val="90000"/>
-              </a:lnSpc>
-              <a:spcBef>
-                <a:spcPts val="1134"/>
-              </a:spcBef>
-              <a:buClr>
-                <a:srgbClr val="000000"/>
-              </a:buClr>
-              <a:buSzPct val="75000"/>
-              <a:buFont typeface="Symbol" charset="2"/>
-              <a:buChar char=""/>
-            </a:pPr>
-            <a:r>
-              <a:rPr b="0" lang="en-US" sz="3200" spc="-1" strike="noStrike">
-                <a:solidFill>
-                  <a:schemeClr val="dk1"/>
-                </a:solidFill>
-                <a:latin typeface="Calibri"/>
-              </a:rPr>
-              <a:t>Second Outline Level</a:t>
-            </a:r>
-            <a:endParaRPr b="0" lang="en-US" sz="3200" spc="-1" strike="noStrike">
-              <a:solidFill>
-                <a:schemeClr val="dk1"/>
-              </a:solidFill>
-              <a:latin typeface="Calibri"/>
-            </a:endParaRPr>
-          </a:p>
-          <a:p>
-            <a:pPr lvl="2" marL="1296000" indent="-288000">
-              <a:lnSpc>
-                <a:spcPct val="90000"/>
-              </a:lnSpc>
-              <a:spcBef>
-                <a:spcPts val="850"/>
-              </a:spcBef>
-              <a:buClr>
-                <a:srgbClr val="000000"/>
-              </a:buClr>
-              <a:buSzPct val="45000"/>
-              <a:buFont typeface="Wingdings" charset="2"/>
-              <a:buChar char=""/>
-            </a:pPr>
-            <a:r>
-              <a:rPr b="0" lang="en-US" sz="3200" spc="-1" strike="noStrike">
-                <a:solidFill>
-                  <a:schemeClr val="dk1"/>
-                </a:solidFill>
-                <a:latin typeface="Calibri"/>
-              </a:rPr>
-              <a:t>Third Outline Level</a:t>
-            </a:r>
-            <a:endParaRPr b="0" lang="en-US" sz="3200" spc="-1" strike="noStrike">
-              <a:solidFill>
-                <a:schemeClr val="dk1"/>
-              </a:solidFill>
-              <a:latin typeface="Calibri"/>
-            </a:endParaRPr>
-          </a:p>
-          <a:p>
-            <a:pPr lvl="3" marL="1728000" indent="-216000">
-              <a:lnSpc>
-                <a:spcPct val="90000"/>
-              </a:lnSpc>
-              <a:spcBef>
-                <a:spcPts val="567"/>
-              </a:spcBef>
-              <a:buClr>
-                <a:srgbClr val="000000"/>
-              </a:buClr>
-              <a:buSzPct val="75000"/>
-              <a:buFont typeface="Symbol" charset="2"/>
-              <a:buChar char=""/>
-            </a:pPr>
-            <a:r>
-              <a:rPr b="0" lang="en-US" sz="3200" spc="-1" strike="noStrike">
-                <a:solidFill>
-                  <a:schemeClr val="dk1"/>
-                </a:solidFill>
-                <a:latin typeface="Calibri"/>
-              </a:rPr>
-              <a:t>Fourth Outline Level</a:t>
-            </a:r>
-            <a:endParaRPr b="0" lang="en-US" sz="3200" spc="-1" strike="noStrike">
-              <a:solidFill>
-                <a:schemeClr val="dk1"/>
-              </a:solidFill>
-              <a:latin typeface="Calibri"/>
-            </a:endParaRPr>
-          </a:p>
-          <a:p>
-            <a:pPr lvl="4" marL="2160000" indent="-216000">
-              <a:lnSpc>
-                <a:spcPct val="90000"/>
-              </a:lnSpc>
-              <a:spcBef>
-                <a:spcPts val="283"/>
-              </a:spcBef>
-              <a:buClr>
-                <a:srgbClr val="000000"/>
-              </a:buClr>
-              <a:buSzPct val="45000"/>
-              <a:buFont typeface="Wingdings" charset="2"/>
-              <a:buChar char=""/>
-            </a:pPr>
-            <a:r>
-              <a:rPr b="0" lang="en-US" sz="3200" spc="-1" strike="noStrike">
-                <a:solidFill>
-                  <a:schemeClr val="dk1"/>
-                </a:solidFill>
-                <a:latin typeface="Calibri"/>
-              </a:rPr>
-              <a:t>Fifth Outline Level</a:t>
-            </a:r>
-            <a:endParaRPr b="0" lang="en-US" sz="3200" spc="-1" strike="noStrike">
-              <a:solidFill>
-                <a:schemeClr val="dk1"/>
-              </a:solidFill>
-              <a:latin typeface="Calibri"/>
-            </a:endParaRPr>
-          </a:p>
-          <a:p>
-            <a:pPr lvl="5" marL="2592000" indent="-216000">
-              <a:lnSpc>
-                <a:spcPct val="90000"/>
-              </a:lnSpc>
-              <a:spcBef>
-                <a:spcPts val="283"/>
-              </a:spcBef>
-              <a:buClr>
-                <a:srgbClr val="000000"/>
-              </a:buClr>
-              <a:buSzPct val="45000"/>
-              <a:buFont typeface="Wingdings" charset="2"/>
-              <a:buChar char=""/>
-            </a:pPr>
-            <a:r>
-              <a:rPr b="0" lang="en-US" sz="3200" spc="-1" strike="noStrike">
-                <a:solidFill>
-                  <a:schemeClr val="dk1"/>
-                </a:solidFill>
-                <a:latin typeface="Calibri"/>
-              </a:rPr>
-              <a:t>Sixth Outline Level</a:t>
-            </a:r>
-            <a:endParaRPr b="0" lang="en-US" sz="3200" spc="-1" strike="noStrike">
-              <a:solidFill>
-                <a:schemeClr val="dk1"/>
-              </a:solidFill>
-              <a:latin typeface="Calibri"/>
-            </a:endParaRPr>
-          </a:p>
-          <a:p>
-            <a:pPr lvl="6" marL="3024000" indent="-216000">
-              <a:lnSpc>
-                <a:spcPct val="90000"/>
-              </a:lnSpc>
-              <a:spcBef>
-                <a:spcPts val="283"/>
-              </a:spcBef>
-              <a:buClr>
-                <a:srgbClr val="000000"/>
-              </a:buClr>
-              <a:buSzPct val="45000"/>
-              <a:buFont typeface="Wingdings" charset="2"/>
-              <a:buChar char=""/>
-            </a:pPr>
-            <a:r>
-              <a:rPr b="0" lang="en-US" sz="3200" spc="-1" strike="noStrike">
-                <a:solidFill>
-                  <a:schemeClr val="dk1"/>
-                </a:solidFill>
-                <a:latin typeface="Calibri"/>
-              </a:rPr>
-              <a:t>Seventh Outline Level</a:t>
-            </a:r>
-            <a:endParaRPr b="0" lang="en-US" sz="3200" spc="-1" strike="noStrike">
-              <a:solidFill>
-                <a:schemeClr val="dk1"/>
-              </a:solidFill>
-              <a:latin typeface="Calibri"/>
-            </a:endParaRPr>
-          </a:p>
-        </p:txBody>
-      </p:sp>
-      <p:sp>
-        <p:nvSpPr>
-          <p:cNvPr id="62" name="PlaceHolder 3"/>
-          <p:cNvSpPr>
-            <a:spLocks noGrp="1"/>
-          </p:cNvSpPr>
-          <p:nvPr>
-            <p:ph type="body"/>
-          </p:nvPr>
-        </p:nvSpPr>
-        <p:spPr>
-          <a:xfrm>
-            <a:off x="839880" y="2057400"/>
-            <a:ext cx="3931920" cy="3811320"/>
-          </a:xfrm>
-          <a:prstGeom prst="rect">
-            <a:avLst/>
-          </a:prstGeom>
-          <a:noFill/>
-          <a:ln w="0">
-            <a:noFill/>
-          </a:ln>
-        </p:spPr>
-        <p:txBody>
-          <a:bodyPr lIns="91440" rIns="91440" tIns="45720" bIns="45720" anchor="t">
-            <a:noAutofit/>
-          </a:bodyPr>
-          <a:p>
-            <a:pPr indent="0" defTabSz="914400">
-              <a:lnSpc>
-                <a:spcPct val="90000"/>
-              </a:lnSpc>
-              <a:spcBef>
-                <a:spcPts val="1001"/>
-              </a:spcBef>
-              <a:buNone/>
-              <a:tabLst>
-                <a:tab algn="l" pos="0"/>
-              </a:tabLst>
-            </a:pPr>
-            <a:r>
-              <a:rPr b="0" lang="en-US" sz="1600" spc="-1" strike="noStrike">
-                <a:solidFill>
-                  <a:schemeClr val="dk1"/>
-                </a:solidFill>
-                <a:latin typeface="Calibri"/>
-              </a:rPr>
-              <a:t>Click to edit Master text styles</a:t>
-            </a:r>
-            <a:endParaRPr b="0" lang="en-US" sz="1600" spc="-1" strike="noStrike">
-              <a:solidFill>
-                <a:schemeClr val="dk1"/>
-              </a:solidFill>
-              <a:latin typeface="Calibri"/>
-            </a:endParaRPr>
-          </a:p>
-        </p:txBody>
-      </p:sp>
-      <p:sp>
-        <p:nvSpPr>
-          <p:cNvPr id="63" name="PlaceHolder 4"/>
-          <p:cNvSpPr>
-            <a:spLocks noGrp="1"/>
-          </p:cNvSpPr>
-          <p:nvPr>
-            <p:ph type="dt" idx="31"/>
-          </p:nvPr>
-        </p:nvSpPr>
-        <p:spPr>
-          <a:xfrm>
-            <a:off x="838080" y="6356520"/>
-            <a:ext cx="2742840" cy="364680"/>
-          </a:xfrm>
-          <a:prstGeom prst="rect">
-            <a:avLst/>
-          </a:prstGeom>
-          <a:noFill/>
-          <a:ln w="0">
-            <a:noFill/>
-          </a:ln>
-        </p:spPr>
-        <p:txBody>
-          <a:bodyPr lIns="91440" rIns="91440" tIns="45720" bIns="45720" anchor="ctr">
-            <a:noAutofit/>
-          </a:bodyPr>
-          <a:lstStyle>
-            <a:lvl1pPr indent="0" defTabSz="914400">
-              <a:lnSpc>
-                <a:spcPct val="100000"/>
-              </a:lnSpc>
-              <a:buNone/>
-              <a:defRPr b="0" lang="en-US" sz="1200" spc="-1" strike="noStrike">
-                <a:solidFill>
-                  <a:schemeClr val="dk1">
-                    <a:tint val="75000"/>
-                  </a:schemeClr>
-                </a:solidFill>
-                <a:latin typeface="Calibri"/>
-              </a:defRPr>
-            </a:lvl1pPr>
-          </a:lstStyle>
-          <a:p>
-            <a:pPr indent="0" defTabSz="914400">
-              <a:lnSpc>
-                <a:spcPct val="100000"/>
-              </a:lnSpc>
-              <a:buNone/>
-            </a:pPr>
-            <a:r>
-              <a:rPr b="0" lang="en-US" sz="1200" spc="-1" strike="noStrike">
-                <a:solidFill>
-                  <a:schemeClr val="dk1">
-                    <a:tint val="75000"/>
-                  </a:schemeClr>
-                </a:solidFill>
-                <a:latin typeface="Calibri"/>
-              </a:rPr>
-              <a:t>&lt;date/time&gt;</a:t>
-            </a:r>
-            <a:endParaRPr b="0" lang="en-US" sz="1200" spc="-1" strike="noStrike">
-              <a:solidFill>
-                <a:srgbClr val="000000"/>
-              </a:solidFill>
-              <a:latin typeface="Times New Roman"/>
-            </a:endParaRPr>
-          </a:p>
-        </p:txBody>
-      </p:sp>
-      <p:sp>
-        <p:nvSpPr>
-          <p:cNvPr id="64" name="PlaceHolder 5"/>
-          <p:cNvSpPr>
-            <a:spLocks noGrp="1"/>
-          </p:cNvSpPr>
-          <p:nvPr>
-            <p:ph type="ftr" idx="32"/>
+            <p:ph type="ftr" idx="31"/>
           </p:nvPr>
         </p:nvSpPr>
         <p:spPr>
           <a:xfrm>
             <a:off x="4038480" y="6356520"/>
-            <a:ext cx="4114440" cy="364680"/>
+            <a:ext cx="4113720" cy="363960"/>
           </a:xfrm>
           <a:prstGeom prst="rect">
             <a:avLst/>
@@ -2828,7 +2095,13 @@
           </a:bodyPr>
           <a:lstStyle>
             <a:lvl1pPr indent="0" algn="ctr">
+              <a:lnSpc>
+                <a:spcPct val="100000"/>
+              </a:lnSpc>
               <a:buNone/>
+              <a:tabLst>
+                <a:tab algn="l" pos="0"/>
+              </a:tabLst>
               <a:defRPr b="0" lang="en-US" sz="1400" spc="-1" strike="noStrike">
                 <a:solidFill>
                   <a:srgbClr val="000000"/>
@@ -2839,7 +2112,13 @@
           </a:lstStyle>
           <a:p>
             <a:pPr indent="0" algn="ctr">
+              <a:lnSpc>
+                <a:spcPct val="100000"/>
+              </a:lnSpc>
               <a:buNone/>
+              <a:tabLst>
+                <a:tab algn="l" pos="0"/>
+              </a:tabLst>
             </a:pPr>
             <a:r>
               <a:rPr b="0" lang="en-US" sz="1400" spc="-1" strike="noStrike">
@@ -2861,18 +2140,18 @@
       </p:sp>
       <p:sp>
         <p:nvSpPr>
-          <p:cNvPr id="65" name="PlaceHolder 6"/>
+          <p:cNvPr id="47" name="PlaceHolder 2"/>
           <p:cNvSpPr>
             <a:spLocks noGrp="1"/>
           </p:cNvSpPr>
           <p:nvPr>
-            <p:ph type="sldNum" idx="33"/>
+            <p:ph type="sldNum" idx="32"/>
           </p:nvPr>
         </p:nvSpPr>
         <p:spPr>
           <a:xfrm>
             <a:off x="8610480" y="6356520"/>
-            <a:ext cx="2742840" cy="364680"/>
+            <a:ext cx="2742120" cy="363960"/>
           </a:xfrm>
           <a:prstGeom prst="rect">
             <a:avLst/>
@@ -2892,6 +2171,9 @@
                 <a:spcPct val="100000"/>
               </a:lnSpc>
               <a:buNone/>
+              <a:tabLst>
+                <a:tab algn="l" pos="0"/>
+              </a:tabLst>
               <a:defRPr b="0" lang="en-US" sz="1200" spc="-1" strike="noStrike">
                 <a:solidFill>
                   <a:schemeClr val="dk1">
@@ -2908,8 +2190,11 @@
                 <a:spcPct val="100000"/>
               </a:lnSpc>
               <a:buNone/>
-            </a:pPr>
-            <a:fld id="{178CD873-9DFE-42F1-AE83-6B62234DCF33}" type="slidenum">
+              <a:tabLst>
+                <a:tab algn="l" pos="0"/>
+              </a:tabLst>
+            </a:pPr>
+            <a:fld id="{85098BBA-7FBC-45A5-9267-78649CDCFFC0}" type="slidenum">
               <a:rPr b="0" lang="en-US" sz="1200" spc="-1" strike="noStrike">
                 <a:solidFill>
                   <a:schemeClr val="dk1">
@@ -2921,6 +2206,66 @@
               <a:t>&lt;number&gt;</a:t>
             </a:fld>
             <a:endParaRPr b="0" lang="en-US" sz="1200" spc="-1" strike="noStrike">
+              <a:solidFill>
+                <a:srgbClr val="000000"/>
+              </a:solidFill>
+              <a:latin typeface="Times New Roman"/>
+            </a:endParaRPr>
+          </a:p>
+        </p:txBody>
+      </p:sp>
+      <p:sp>
+        <p:nvSpPr>
+          <p:cNvPr id="48" name="PlaceHolder 3"/>
+          <p:cNvSpPr>
+            <a:spLocks noGrp="1"/>
+          </p:cNvSpPr>
+          <p:nvPr>
+            <p:ph type="dt" idx="33"/>
+          </p:nvPr>
+        </p:nvSpPr>
+        <p:spPr>
+          <a:xfrm>
+            <a:off x="838080" y="6356520"/>
+            <a:ext cx="2742120" cy="363960"/>
+          </a:xfrm>
+          <a:prstGeom prst="rect">
+            <a:avLst/>
+          </a:prstGeom>
+          <a:noFill/>
+          <a:ln w="0">
+            <a:noFill/>
+          </a:ln>
+        </p:spPr>
+        <p:txBody>
+          <a:bodyPr lIns="91440" rIns="91440" tIns="45720" bIns="45720" anchor="ctr">
+            <a:noAutofit/>
+          </a:bodyPr>
+          <a:lstStyle>
+            <a:lvl1pPr indent="0">
+              <a:buNone/>
+              <a:defRPr b="0" lang="en-US" sz="1400" spc="-1" strike="noStrike">
+                <a:solidFill>
+                  <a:srgbClr val="000000"/>
+                </a:solidFill>
+                <a:latin typeface="Times New Roman"/>
+              </a:defRPr>
+            </a:lvl1pPr>
+          </a:lstStyle>
+          <a:p>
+            <a:pPr indent="0">
+              <a:buNone/>
+            </a:pPr>
+            <a:r>
+              <a:rPr b="0" lang="en-US" sz="1400" spc="-1" strike="noStrike">
+                <a:solidFill>
+                  <a:srgbClr val="000000"/>
+                </a:solidFill>
+                <a:latin typeface="Times New Roman"/>
+              </a:rPr>
+              <a:t>&lt;date/time&gt;</a:t>
+            </a:r>
+            <a:endParaRPr b="0" lang="en-US" sz="1400" spc="-1" strike="noStrike">
               <a:solidFill>
                 <a:srgbClr val="000000"/>
               </a:solidFill>
@@ -2969,314 +2314,13 @@
             <a:spLocks noGrp="1"/>
           </p:cNvSpPr>
           <p:nvPr>
-            <p:ph type="title"/>
-          </p:nvPr>
-        </p:nvSpPr>
-        <p:spPr>
-          <a:xfrm>
-            <a:off x="838080" y="365040"/>
-            <a:ext cx="10515240" cy="1325160"/>
-          </a:xfrm>
-          <a:prstGeom prst="rect">
-            <a:avLst/>
-          </a:prstGeom>
-          <a:noFill/>
-          <a:ln w="0">
-            <a:noFill/>
-          </a:ln>
-        </p:spPr>
-        <p:txBody>
-          <a:bodyPr lIns="91440" rIns="91440" tIns="45720" bIns="45720" anchor="ctr">
-            <a:noAutofit/>
-          </a:bodyPr>
-          <a:p>
-            <a:pPr indent="0" defTabSz="914400">
-              <a:lnSpc>
-                <a:spcPct val="90000"/>
-              </a:lnSpc>
-              <a:buNone/>
-            </a:pPr>
-            <a:r>
-              <a:rPr b="0" lang="en-US" sz="4400" spc="-1" strike="noStrike">
-                <a:solidFill>
-                  <a:schemeClr val="dk1"/>
-                </a:solidFill>
-                <a:latin typeface="Calibri Light"/>
-              </a:rPr>
-              <a:t>Click to edit Master title style</a:t>
-            </a:r>
-            <a:endParaRPr b="0" lang="en-US" sz="4400" spc="-1" strike="noStrike">
-              <a:solidFill>
-                <a:schemeClr val="dk1"/>
-              </a:solidFill>
-              <a:latin typeface="Calibri"/>
-            </a:endParaRPr>
-          </a:p>
-        </p:txBody>
-      </p:sp>
-      <p:sp>
-        <p:nvSpPr>
-          <p:cNvPr id="8" name="PlaceHolder 2"/>
-          <p:cNvSpPr>
-            <a:spLocks noGrp="1"/>
-          </p:cNvSpPr>
-          <p:nvPr>
-            <p:ph type="body"/>
-          </p:nvPr>
-        </p:nvSpPr>
-        <p:spPr>
-          <a:xfrm>
-            <a:off x="838080" y="1825560"/>
-            <a:ext cx="10515240" cy="4350960"/>
-          </a:xfrm>
-          <a:prstGeom prst="rect">
-            <a:avLst/>
-          </a:prstGeom>
-          <a:noFill/>
-          <a:ln w="0">
-            <a:noFill/>
-          </a:ln>
-        </p:spPr>
-        <p:txBody>
-          <a:bodyPr lIns="91440" rIns="91440" tIns="45720" bIns="45720" anchor="t" vert="eaVert">
-            <a:noAutofit/>
-          </a:bodyPr>
-          <a:p>
-            <a:pPr marL="228600" indent="-228600" defTabSz="914400">
-              <a:lnSpc>
-                <a:spcPct val="90000"/>
-              </a:lnSpc>
-              <a:spcBef>
-                <a:spcPts val="1001"/>
-              </a:spcBef>
-              <a:buClr>
-                <a:srgbClr val="000000"/>
-              </a:buClr>
-              <a:buFont typeface="Arial"/>
-              <a:buChar char="•"/>
-            </a:pPr>
-            <a:r>
-              <a:rPr b="0" lang="en-US" sz="2800" spc="-1" strike="noStrike">
-                <a:solidFill>
-                  <a:schemeClr val="dk1"/>
-                </a:solidFill>
-                <a:latin typeface="Calibri"/>
-              </a:rPr>
-              <a:t>Click to edit Master text styles</a:t>
-            </a:r>
-            <a:endParaRPr b="0" lang="en-US" sz="2800" spc="-1" strike="noStrike">
-              <a:solidFill>
-                <a:schemeClr val="dk1"/>
-              </a:solidFill>
-              <a:latin typeface="Calibri"/>
-            </a:endParaRPr>
-          </a:p>
-          <a:p>
-            <a:pPr lvl="1" marL="685800" indent="-228600" defTabSz="914400">
-              <a:lnSpc>
-                <a:spcPct val="90000"/>
-              </a:lnSpc>
-              <a:spcBef>
-                <a:spcPts val="499"/>
-              </a:spcBef>
-              <a:buClr>
-                <a:srgbClr val="000000"/>
-              </a:buClr>
-              <a:buFont typeface="Arial"/>
-              <a:buChar char="•"/>
-            </a:pPr>
-            <a:r>
-              <a:rPr b="0" lang="en-US" sz="2400" spc="-1" strike="noStrike">
-                <a:solidFill>
-                  <a:schemeClr val="dk1"/>
-                </a:solidFill>
-                <a:latin typeface="Calibri"/>
-              </a:rPr>
-              <a:t>Second level</a:t>
-            </a:r>
-            <a:endParaRPr b="0" lang="en-US" sz="2400" spc="-1" strike="noStrike">
-              <a:solidFill>
-                <a:schemeClr val="dk1"/>
-              </a:solidFill>
-              <a:latin typeface="Calibri"/>
-            </a:endParaRPr>
-          </a:p>
-          <a:p>
-            <a:pPr lvl="2" marL="1143000" indent="-228600" defTabSz="914400">
-              <a:lnSpc>
-                <a:spcPct val="90000"/>
-              </a:lnSpc>
-              <a:spcBef>
-                <a:spcPts val="499"/>
-              </a:spcBef>
-              <a:buClr>
-                <a:srgbClr val="000000"/>
-              </a:buClr>
-              <a:buFont typeface="Arial"/>
-              <a:buChar char="•"/>
-            </a:pPr>
-            <a:r>
-              <a:rPr b="0" lang="en-US" sz="2000" spc="-1" strike="noStrike">
-                <a:solidFill>
-                  <a:schemeClr val="dk1"/>
-                </a:solidFill>
-                <a:latin typeface="Calibri"/>
-              </a:rPr>
-              <a:t>Third level</a:t>
-            </a:r>
-            <a:endParaRPr b="0" lang="en-US" sz="2000" spc="-1" strike="noStrike">
-              <a:solidFill>
-                <a:schemeClr val="dk1"/>
-              </a:solidFill>
-              <a:latin typeface="Calibri"/>
-            </a:endParaRPr>
-          </a:p>
-          <a:p>
-            <a:pPr lvl="3" marL="1600200" indent="-228600" defTabSz="914400">
-              <a:lnSpc>
-                <a:spcPct val="90000"/>
-              </a:lnSpc>
-              <a:spcBef>
-                <a:spcPts val="499"/>
-              </a:spcBef>
-              <a:buClr>
-                <a:srgbClr val="000000"/>
-              </a:buClr>
-              <a:buFont typeface="Arial"/>
-              <a:buChar char="•"/>
-            </a:pPr>
-            <a:r>
-              <a:rPr b="0" lang="en-US" sz="1800" spc="-1" strike="noStrike">
-                <a:solidFill>
-                  <a:schemeClr val="dk1"/>
-                </a:solidFill>
-                <a:latin typeface="Calibri"/>
-              </a:rPr>
-              <a:t>Fourth level</a:t>
-            </a:r>
-            <a:endParaRPr b="0" lang="en-US" sz="1800" spc="-1" strike="noStrike">
-              <a:solidFill>
-                <a:schemeClr val="dk1"/>
-              </a:solidFill>
-              <a:latin typeface="Calibri"/>
-            </a:endParaRPr>
-          </a:p>
-          <a:p>
-            <a:pPr lvl="4" marL="2057400" indent="-228600" defTabSz="914400">
-              <a:lnSpc>
-                <a:spcPct val="90000"/>
-              </a:lnSpc>
-              <a:spcBef>
-                <a:spcPts val="499"/>
-              </a:spcBef>
-              <a:buClr>
-                <a:srgbClr val="000000"/>
-              </a:buClr>
-              <a:buFont typeface="Arial"/>
-              <a:buChar char="•"/>
-            </a:pPr>
-            <a:r>
-              <a:rPr b="0" lang="en-US" sz="1800" spc="-1" strike="noStrike">
-                <a:solidFill>
-                  <a:schemeClr val="dk1"/>
-                </a:solidFill>
-                <a:latin typeface="Calibri"/>
-              </a:rPr>
-              <a:t>Fifth level</a:t>
-            </a:r>
-            <a:endParaRPr b="0" lang="en-US" sz="1800" spc="-1" strike="noStrike">
-              <a:solidFill>
-                <a:schemeClr val="dk1"/>
-              </a:solidFill>
-              <a:latin typeface="Calibri"/>
-            </a:endParaRPr>
-          </a:p>
-        </p:txBody>
-      </p:sp>
-      <p:sp>
-        <p:nvSpPr>
-          <p:cNvPr id="9" name="PlaceHolder 3"/>
-          <p:cNvSpPr>
-            <a:spLocks noGrp="1"/>
-          </p:cNvSpPr>
-          <p:nvPr>
-            <p:ph type="dt" idx="4"/>
-          </p:nvPr>
-        </p:nvSpPr>
-        <p:spPr>
-          <a:xfrm>
-            <a:off x="838080" y="6356520"/>
-            <a:ext cx="2742840" cy="364680"/>
-          </a:xfrm>
-          <a:prstGeom prst="rect">
-            <a:avLst/>
-          </a:prstGeom>
-          <a:noFill/>
-          <a:ln w="0">
-            <a:noFill/>
-          </a:ln>
-        </p:spPr>
-        <p:txBody>
-          <a:bodyPr lIns="91440" rIns="91440" tIns="45720" bIns="45720" anchor="ctr">
-            <a:noAutofit/>
-          </a:bodyPr>
-          <a:lstStyle>
-            <a:lvl1pPr indent="0" defTabSz="914400">
-              <a:lnSpc>
-                <a:spcPct val="100000"/>
-              </a:lnSpc>
-              <a:buNone/>
-              <a:defRPr b="0" lang="en-US" sz="1200" spc="-1" strike="noStrike">
-                <a:solidFill>
-                  <a:schemeClr val="dk1">
-                    <a:tint val="75000"/>
-                  </a:schemeClr>
-                </a:solidFill>
-                <a:latin typeface="Calibri"/>
-              </a:defRPr>
-            </a:lvl1pPr>
-          </a:lstStyle>
-          <a:p>
-            <a:pPr indent="0" defTabSz="914400">
-              <a:lnSpc>
-                <a:spcPct val="100000"/>
-              </a:lnSpc>
-              <a:buNone/>
-            </a:pPr>
-            <a:r>
-              <a:rPr b="0" lang="en-US" sz="1200" spc="-1" strike="noStrike">
-                <a:solidFill>
-                  <a:schemeClr val="dk1">
-                    <a:tint val="75000"/>
-                  </a:schemeClr>
-                </a:solidFill>
-                <a:latin typeface="Calibri"/>
-              </a:rPr>
-              <a:t>&lt;date/time&gt;</a:t>
-            </a:r>
-            <a:endParaRPr b="0" lang="en-US" sz="1200" spc="-1" strike="noStrike">
-              <a:solidFill>
-                <a:srgbClr val="000000"/>
-              </a:solidFill>
-              <a:latin typeface="Times New Roman"/>
-            </a:endParaRPr>
-          </a:p>
-        </p:txBody>
-      </p:sp>
-      <p:sp>
-        <p:nvSpPr>
-          <p:cNvPr id="10" name="PlaceHolder 4"/>
-          <p:cNvSpPr>
-            <a:spLocks noGrp="1"/>
-          </p:cNvSpPr>
-          <p:nvPr>
-            <p:ph type="ftr" idx="5"/>
+            <p:ph type="ftr" idx="4"/>
           </p:nvPr>
         </p:nvSpPr>
         <p:spPr>
           <a:xfrm>
             <a:off x="4038480" y="6356520"/>
-            <a:ext cx="4114440" cy="364680"/>
+            <a:ext cx="4113720" cy="363960"/>
           </a:xfrm>
           <a:prstGeom prst="rect">
             <a:avLst/>
@@ -3292,7 +2336,13 @@
           </a:bodyPr>
           <a:lstStyle>
             <a:lvl1pPr indent="0" algn="ctr">
+              <a:lnSpc>
+                <a:spcPct val="100000"/>
+              </a:lnSpc>
               <a:buNone/>
+              <a:tabLst>
+                <a:tab algn="l" pos="0"/>
+              </a:tabLst>
               <a:defRPr b="0" lang="en-US" sz="1400" spc="-1" strike="noStrike">
                 <a:solidFill>
                   <a:srgbClr val="000000"/>
@@ -3303,7 +2353,13 @@
           </a:lstStyle>
           <a:p>
             <a:pPr indent="0" algn="ctr">
+              <a:lnSpc>
+                <a:spcPct val="100000"/>
+              </a:lnSpc>
               <a:buNone/>
+              <a:tabLst>
+                <a:tab algn="l" pos="0"/>
+              </a:tabLst>
             </a:pPr>
             <a:r>
               <a:rPr b="0" lang="en-US" sz="1400" spc="-1" strike="noStrike">
@@ -3325,18 +2381,18 @@
       </p:sp>
       <p:sp>
         <p:nvSpPr>
-          <p:cNvPr id="11" name="PlaceHolder 5"/>
+          <p:cNvPr id="8" name="PlaceHolder 2"/>
           <p:cNvSpPr>
             <a:spLocks noGrp="1"/>
           </p:cNvSpPr>
           <p:nvPr>
-            <p:ph type="sldNum" idx="6"/>
+            <p:ph type="sldNum" idx="5"/>
           </p:nvPr>
         </p:nvSpPr>
         <p:spPr>
           <a:xfrm>
             <a:off x="8610480" y="6356520"/>
-            <a:ext cx="2742840" cy="364680"/>
+            <a:ext cx="2742120" cy="363960"/>
           </a:xfrm>
           <a:prstGeom prst="rect">
             <a:avLst/>
@@ -3356,6 +2412,9 @@
                 <a:spcPct val="100000"/>
               </a:lnSpc>
               <a:buNone/>
+              <a:tabLst>
+                <a:tab algn="l" pos="0"/>
+              </a:tabLst>
               <a:defRPr b="0" lang="en-US" sz="1200" spc="-1" strike="noStrike">
                 <a:solidFill>
                   <a:schemeClr val="dk1">
@@ -3372,8 +2431,11 @@
                 <a:spcPct val="100000"/>
               </a:lnSpc>
               <a:buNone/>
-            </a:pPr>
-            <a:fld id="{0B0822C4-26BA-4AAE-B1B0-EC44EA8431BB}" type="slidenum">
+              <a:tabLst>
+                <a:tab algn="l" pos="0"/>
+              </a:tabLst>
+            </a:pPr>
+            <a:fld id="{410319D3-B24A-48C7-BFE4-088DD4210751}" type="slidenum">
               <a:rPr b="0" lang="en-US" sz="1200" spc="-1" strike="noStrike">
                 <a:solidFill>
                   <a:schemeClr val="dk1">
@@ -3385,6 +2447,66 @@
               <a:t>&lt;number&gt;</a:t>
             </a:fld>
             <a:endParaRPr b="0" lang="en-US" sz="1200" spc="-1" strike="noStrike">
+              <a:solidFill>
+                <a:srgbClr val="000000"/>
+              </a:solidFill>
+              <a:latin typeface="Times New Roman"/>
+            </a:endParaRPr>
+          </a:p>
+        </p:txBody>
+      </p:sp>
+      <p:sp>
+        <p:nvSpPr>
+          <p:cNvPr id="9" name="PlaceHolder 3"/>
+          <p:cNvSpPr>
+            <a:spLocks noGrp="1"/>
+          </p:cNvSpPr>
+          <p:nvPr>
+            <p:ph type="dt" idx="6"/>
+          </p:nvPr>
+        </p:nvSpPr>
+        <p:spPr>
+          <a:xfrm>
+            <a:off x="838080" y="6356520"/>
+            <a:ext cx="2742120" cy="363960"/>
+          </a:xfrm>
+          <a:prstGeom prst="rect">
+            <a:avLst/>
+          </a:prstGeom>
+          <a:noFill/>
+          <a:ln w="0">
+            <a:noFill/>
+          </a:ln>
+        </p:spPr>
+        <p:txBody>
+          <a:bodyPr lIns="91440" rIns="91440" tIns="45720" bIns="45720" anchor="ctr">
+            <a:noAutofit/>
+          </a:bodyPr>
+          <a:lstStyle>
+            <a:lvl1pPr indent="0">
+              <a:buNone/>
+              <a:defRPr b="0" lang="en-US" sz="1400" spc="-1" strike="noStrike">
+                <a:solidFill>
+                  <a:srgbClr val="000000"/>
+                </a:solidFill>
+                <a:latin typeface="Times New Roman"/>
+              </a:defRPr>
+            </a:lvl1pPr>
+          </a:lstStyle>
+          <a:p>
+            <a:pPr indent="0">
+              <a:buNone/>
+            </a:pPr>
+            <a:r>
+              <a:rPr b="0" lang="en-US" sz="1400" spc="-1" strike="noStrike">
+                <a:solidFill>
+                  <a:srgbClr val="000000"/>
+                </a:solidFill>
+                <a:latin typeface="Times New Roman"/>
+              </a:rPr>
+              <a:t>&lt;date/time&gt;</a:t>
+            </a:r>
+            <a:endParaRPr b="0" lang="en-US" sz="1400" spc="-1" strike="noStrike">
               <a:solidFill>
                 <a:srgbClr val="000000"/>
               </a:solidFill>
@@ -3428,319 +2550,18 @@
       </p:grpSpPr>
       <p:sp>
         <p:nvSpPr>
-          <p:cNvPr id="12" name="PlaceHolder 1"/>
+          <p:cNvPr id="10" name="PlaceHolder 1"/>
           <p:cNvSpPr>
             <a:spLocks noGrp="1"/>
           </p:cNvSpPr>
           <p:nvPr>
-            <p:ph type="title"/>
-          </p:nvPr>
-        </p:nvSpPr>
-        <p:spPr>
-          <a:xfrm>
-            <a:off x="8724960" y="365040"/>
-            <a:ext cx="2628720" cy="5811480"/>
-          </a:xfrm>
-          <a:prstGeom prst="rect">
-            <a:avLst/>
-          </a:prstGeom>
-          <a:noFill/>
-          <a:ln w="0">
-            <a:noFill/>
-          </a:ln>
-        </p:spPr>
-        <p:txBody>
-          <a:bodyPr lIns="91440" rIns="91440" tIns="45720" bIns="45720" anchor="ctr" vert="eaVert">
-            <a:noAutofit/>
-          </a:bodyPr>
-          <a:p>
-            <a:pPr indent="0" defTabSz="914400">
-              <a:lnSpc>
-                <a:spcPct val="90000"/>
-              </a:lnSpc>
-              <a:buNone/>
-            </a:pPr>
-            <a:r>
-              <a:rPr b="0" lang="en-US" sz="4400" spc="-1" strike="noStrike">
-                <a:solidFill>
-                  <a:schemeClr val="dk1"/>
-                </a:solidFill>
-                <a:latin typeface="Calibri Light"/>
-              </a:rPr>
-              <a:t>Click to edit Master title style</a:t>
-            </a:r>
-            <a:endParaRPr b="0" lang="en-US" sz="4400" spc="-1" strike="noStrike">
-              <a:solidFill>
-                <a:schemeClr val="dk1"/>
-              </a:solidFill>
-              <a:latin typeface="Calibri"/>
-            </a:endParaRPr>
-          </a:p>
-        </p:txBody>
-      </p:sp>
-      <p:sp>
-        <p:nvSpPr>
-          <p:cNvPr id="13" name="PlaceHolder 2"/>
-          <p:cNvSpPr>
-            <a:spLocks noGrp="1"/>
-          </p:cNvSpPr>
-          <p:nvPr>
-            <p:ph type="body"/>
-          </p:nvPr>
-        </p:nvSpPr>
-        <p:spPr>
-          <a:xfrm>
-            <a:off x="838080" y="365040"/>
-            <a:ext cx="7733880" cy="5811480"/>
-          </a:xfrm>
-          <a:prstGeom prst="rect">
-            <a:avLst/>
-          </a:prstGeom>
-          <a:noFill/>
-          <a:ln w="0">
-            <a:noFill/>
-          </a:ln>
-        </p:spPr>
-        <p:txBody>
-          <a:bodyPr lIns="91440" rIns="91440" tIns="45720" bIns="45720" anchor="t" vert="eaVert">
-            <a:noAutofit/>
-          </a:bodyPr>
-          <a:p>
-            <a:pPr marL="228600" indent="-228600" defTabSz="914400">
-              <a:lnSpc>
-                <a:spcPct val="90000"/>
-              </a:lnSpc>
-              <a:spcBef>
-                <a:spcPts val="1001"/>
-              </a:spcBef>
-              <a:buClr>
-                <a:srgbClr val="000000"/>
-              </a:buClr>
-              <a:buFont typeface="Arial"/>
-              <a:buChar char="•"/>
-            </a:pPr>
-            <a:r>
-              <a:rPr b="0" lang="en-US" sz="2800" spc="-1" strike="noStrike">
-                <a:solidFill>
-                  <a:schemeClr val="dk1"/>
-                </a:solidFill>
-                <a:latin typeface="Calibri"/>
-              </a:rPr>
-              <a:t>Click to edit Master text styles</a:t>
-            </a:r>
-            <a:endParaRPr b="0" lang="en-US" sz="2800" spc="-1" strike="noStrike">
-              <a:solidFill>
-                <a:schemeClr val="dk1"/>
-              </a:solidFill>
-              <a:latin typeface="Calibri"/>
-            </a:endParaRPr>
-          </a:p>
-          <a:p>
-            <a:pPr lvl="1" marL="685800" indent="-228600" defTabSz="914400">
-              <a:lnSpc>
-                <a:spcPct val="90000"/>
-              </a:lnSpc>
-              <a:spcBef>
-                <a:spcPts val="499"/>
-              </a:spcBef>
-              <a:buClr>
-                <a:srgbClr val="000000"/>
-              </a:buClr>
-              <a:buFont typeface="Arial"/>
-              <a:buChar char="•"/>
-            </a:pPr>
-            <a:r>
-              <a:rPr b="0" lang="en-US" sz="2400" spc="-1" strike="noStrike">
-                <a:solidFill>
-                  <a:schemeClr val="dk1"/>
-                </a:solidFill>
-                <a:latin typeface="Calibri"/>
-              </a:rPr>
-              <a:t>Second level</a:t>
-            </a:r>
-            <a:endParaRPr b="0" lang="en-US" sz="2400" spc="-1" strike="noStrike">
-              <a:solidFill>
-                <a:schemeClr val="dk1"/>
-              </a:solidFill>
-              <a:latin typeface="Calibri"/>
-            </a:endParaRPr>
-          </a:p>
-          <a:p>
-            <a:pPr lvl="2" marL="1143000" indent="-228600" defTabSz="914400">
-              <a:lnSpc>
-                <a:spcPct val="90000"/>
-              </a:lnSpc>
-              <a:spcBef>
-                <a:spcPts val="499"/>
-              </a:spcBef>
-              <a:buClr>
-                <a:srgbClr val="000000"/>
-              </a:buClr>
-              <a:buFont typeface="Arial"/>
-              <a:buChar char="•"/>
-            </a:pPr>
-            <a:r>
-              <a:rPr b="0" lang="en-US" sz="2000" spc="-1" strike="noStrike">
-                <a:solidFill>
-                  <a:schemeClr val="dk1"/>
-                </a:solidFill>
-                <a:latin typeface="Calibri"/>
-              </a:rPr>
-              <a:t>Third level</a:t>
-            </a:r>
-            <a:endParaRPr b="0" lang="en-US" sz="2000" spc="-1" strike="noStrike">
-              <a:solidFill>
-                <a:schemeClr val="dk1"/>
-              </a:solidFill>
-              <a:latin typeface="Calibri"/>
-            </a:endParaRPr>
-          </a:p>
-          <a:p>
-            <a:pPr lvl="3" marL="1600200" indent="-228600" defTabSz="914400">
-              <a:lnSpc>
-                <a:spcPct val="90000"/>
-              </a:lnSpc>
-              <a:spcBef>
-                <a:spcPts val="499"/>
-              </a:spcBef>
-              <a:buClr>
-                <a:srgbClr val="000000"/>
-              </a:buClr>
-              <a:buFont typeface="Arial"/>
-              <a:buChar char="•"/>
-            </a:pPr>
-            <a:r>
-              <a:rPr b="0" lang="en-US" sz="1800" spc="-1" strike="noStrike">
-                <a:solidFill>
-                  <a:schemeClr val="dk1"/>
-                </a:solidFill>
-                <a:latin typeface="Calibri"/>
-              </a:rPr>
-              <a:t>Fourth level</a:t>
-            </a:r>
-            <a:endParaRPr b="0" lang="en-US" sz="1800" spc="-1" strike="noStrike">
-              <a:solidFill>
-                <a:schemeClr val="dk1"/>
-              </a:solidFill>
-              <a:latin typeface="Calibri"/>
-            </a:endParaRPr>
-          </a:p>
-          <a:p>
-            <a:pPr lvl="4" marL="2057400" indent="-228600" defTabSz="914400">
-              <a:lnSpc>
-                <a:spcPct val="90000"/>
-              </a:lnSpc>
-              <a:spcBef>
-                <a:spcPts val="499"/>
-              </a:spcBef>
-              <a:buClr>
-                <a:srgbClr val="000000"/>
-              </a:buClr>
-              <a:buFont typeface="Arial"/>
-              <a:buChar char="•"/>
-            </a:pPr>
-            <a:r>
-              <a:rPr b="0" lang="en-US" sz="1800" spc="-1" strike="noStrike">
-                <a:solidFill>
-                  <a:schemeClr val="dk1"/>
-                </a:solidFill>
-                <a:latin typeface="Calibri"/>
-              </a:rPr>
-              <a:t>Fifth level</a:t>
-            </a:r>
-            <a:endParaRPr b="0" lang="en-US" sz="1800" spc="-1" strike="noStrike">
-              <a:solidFill>
-                <a:schemeClr val="dk1"/>
-              </a:solidFill>
-              <a:latin typeface="Calibri"/>
-            </a:endParaRPr>
-          </a:p>
-        </p:txBody>
-      </p:sp>
-      <p:sp>
-        <p:nvSpPr>
-          <p:cNvPr id="14" name="PlaceHolder 3"/>
-          <p:cNvSpPr>
-            <a:spLocks noGrp="1"/>
-          </p:cNvSpPr>
-          <p:nvPr>
-            <p:ph type="dt" idx="7"/>
-          </p:nvPr>
-        </p:nvSpPr>
-        <p:spPr>
-          <a:xfrm>
-            <a:off x="838080" y="6356520"/>
-            <a:ext cx="2742840" cy="364680"/>
-          </a:xfrm>
-          <a:prstGeom prst="rect">
-            <a:avLst/>
-          </a:prstGeom>
-          <a:noFill/>
-          <a:ln w="0">
-            <a:noFill/>
-          </a:ln>
-        </p:spPr>
-        <p:txBody>
-          <a:bodyPr lIns="91440" rIns="91440" tIns="45720" bIns="45720" anchor="ctr">
-            <a:noAutofit/>
-          </a:bodyPr>
-          <a:lstStyle>
-            <a:lvl1pPr indent="0" defTabSz="914400">
-              <a:lnSpc>
-                <a:spcPct val="100000"/>
-              </a:lnSpc>
-              <a:buNone/>
-              <a:defRPr b="0" lang="en-US" sz="1200" spc="-1" strike="noStrike">
-                <a:solidFill>
-                  <a:schemeClr val="dk1">
-                    <a:tint val="75000"/>
-                  </a:schemeClr>
-                </a:solidFill>
-                <a:latin typeface="Calibri"/>
-              </a:defRPr>
-            </a:lvl1pPr>
-          </a:lstStyle>
-          <a:p>
-            <a:pPr indent="0" defTabSz="914400">
-              <a:lnSpc>
-                <a:spcPct val="100000"/>
-              </a:lnSpc>
-              <a:buNone/>
-            </a:pPr>
-            <a:r>
-              <a:rPr b="0" lang="en-US" sz="1200" spc="-1" strike="noStrike">
-                <a:solidFill>
-                  <a:schemeClr val="dk1">
-                    <a:tint val="75000"/>
-                  </a:schemeClr>
-                </a:solidFill>
-                <a:latin typeface="Calibri"/>
-              </a:rPr>
-              <a:t>&lt;date/time&gt;</a:t>
-            </a:r>
-            <a:endParaRPr b="0" lang="en-US" sz="1200" spc="-1" strike="noStrike">
-              <a:solidFill>
-                <a:srgbClr val="000000"/>
-              </a:solidFill>
-              <a:latin typeface="Times New Roman"/>
-            </a:endParaRPr>
-          </a:p>
-        </p:txBody>
-      </p:sp>
-      <p:sp>
-        <p:nvSpPr>
-          <p:cNvPr id="15" name="PlaceHolder 4"/>
-          <p:cNvSpPr>
-            <a:spLocks noGrp="1"/>
-          </p:cNvSpPr>
-          <p:nvPr>
-            <p:ph type="ftr" idx="8"/>
+            <p:ph type="ftr" idx="7"/>
           </p:nvPr>
         </p:nvSpPr>
         <p:spPr>
           <a:xfrm>
             <a:off x="4038480" y="6356520"/>
-            <a:ext cx="4114440" cy="364680"/>
+            <a:ext cx="4113720" cy="363960"/>
           </a:xfrm>
           <a:prstGeom prst="rect">
             <a:avLst/>
@@ -3756,7 +2577,13 @@
           </a:bodyPr>
           <a:lstStyle>
             <a:lvl1pPr indent="0" algn="ctr">
+              <a:lnSpc>
+                <a:spcPct val="100000"/>
+              </a:lnSpc>
               <a:buNone/>
+              <a:tabLst>
+                <a:tab algn="l" pos="0"/>
+              </a:tabLst>
               <a:defRPr b="0" lang="en-US" sz="1400" spc="-1" strike="noStrike">
                 <a:solidFill>
                   <a:srgbClr val="000000"/>
@@ -3767,7 +2594,13 @@
           </a:lstStyle>
           <a:p>
             <a:pPr indent="0" algn="ctr">
+              <a:lnSpc>
+                <a:spcPct val="100000"/>
+              </a:lnSpc>
               <a:buNone/>
+              <a:tabLst>
+                <a:tab algn="l" pos="0"/>
+              </a:tabLst>
             </a:pPr>
             <a:r>
               <a:rPr b="0" lang="en-US" sz="1400" spc="-1" strike="noStrike">
@@ -3789,18 +2622,18 @@
       </p:sp>
       <p:sp>
         <p:nvSpPr>
-          <p:cNvPr id="16" name="PlaceHolder 5"/>
+          <p:cNvPr id="11" name="PlaceHolder 2"/>
           <p:cNvSpPr>
             <a:spLocks noGrp="1"/>
           </p:cNvSpPr>
           <p:nvPr>
-            <p:ph type="sldNum" idx="9"/>
+            <p:ph type="sldNum" idx="8"/>
           </p:nvPr>
         </p:nvSpPr>
         <p:spPr>
           <a:xfrm>
             <a:off x="8610480" y="6356520"/>
-            <a:ext cx="2742840" cy="364680"/>
+            <a:ext cx="2742120" cy="363960"/>
           </a:xfrm>
           <a:prstGeom prst="rect">
             <a:avLst/>
@@ -3820,6 +2653,9 @@
                 <a:spcPct val="100000"/>
               </a:lnSpc>
               <a:buNone/>
+              <a:tabLst>
+                <a:tab algn="l" pos="0"/>
+              </a:tabLst>
               <a:defRPr b="0" lang="en-US" sz="1200" spc="-1" strike="noStrike">
                 <a:solidFill>
                   <a:schemeClr val="dk1">
@@ -3836,8 +2672,11 @@
                 <a:spcPct val="100000"/>
               </a:lnSpc>
               <a:buNone/>
-            </a:pPr>
-            <a:fld id="{734AA799-FDF3-4ED4-AD1E-F619CABA4158}" type="slidenum">
+              <a:tabLst>
+                <a:tab algn="l" pos="0"/>
+              </a:tabLst>
+            </a:pPr>
+            <a:fld id="{63772C6B-0BAE-4687-9F9C-1AF0A23AFDF5}" type="slidenum">
               <a:rPr b="0" lang="en-US" sz="1200" spc="-1" strike="noStrike">
                 <a:solidFill>
                   <a:schemeClr val="dk1">
@@ -3849,6 +2688,66 @@
               <a:t>&lt;number&gt;</a:t>
             </a:fld>
             <a:endParaRPr b="0" lang="en-US" sz="1200" spc="-1" strike="noStrike">
+              <a:solidFill>
+                <a:srgbClr val="000000"/>
+              </a:solidFill>
+              <a:latin typeface="Times New Roman"/>
+            </a:endParaRPr>
+          </a:p>
+        </p:txBody>
+      </p:sp>
+      <p:sp>
+        <p:nvSpPr>
+          <p:cNvPr id="12" name="PlaceHolder 3"/>
+          <p:cNvSpPr>
+            <a:spLocks noGrp="1"/>
+          </p:cNvSpPr>
+          <p:nvPr>
+            <p:ph type="dt" idx="9"/>
+          </p:nvPr>
+        </p:nvSpPr>
+        <p:spPr>
+          <a:xfrm>
+            <a:off x="838080" y="6356520"/>
+            <a:ext cx="2742120" cy="363960"/>
+          </a:xfrm>
+          <a:prstGeom prst="rect">
+            <a:avLst/>
+          </a:prstGeom>
+          <a:noFill/>
+          <a:ln w="0">
+            <a:noFill/>
+          </a:ln>
+        </p:spPr>
+        <p:txBody>
+          <a:bodyPr lIns="91440" rIns="91440" tIns="45720" bIns="45720" anchor="ctr">
+            <a:noAutofit/>
+          </a:bodyPr>
+          <a:lstStyle>
+            <a:lvl1pPr indent="0">
+              <a:buNone/>
+              <a:defRPr b="0" lang="en-US" sz="1400" spc="-1" strike="noStrike">
+                <a:solidFill>
+                  <a:srgbClr val="000000"/>
+                </a:solidFill>
+                <a:latin typeface="Times New Roman"/>
+              </a:defRPr>
+            </a:lvl1pPr>
+          </a:lstStyle>
+          <a:p>
+            <a:pPr indent="0">
+              <a:buNone/>
+            </a:pPr>
+            <a:r>
+              <a:rPr b="0" lang="en-US" sz="1400" spc="-1" strike="noStrike">
+                <a:solidFill>
+                  <a:srgbClr val="000000"/>
+                </a:solidFill>
+                <a:latin typeface="Times New Roman"/>
+              </a:rPr>
+              <a:t>&lt;date/time&gt;</a:t>
+            </a:r>
+            <a:endParaRPr b="0" lang="en-US" sz="1400" spc="-1" strike="noStrike">
               <a:solidFill>
                 <a:srgbClr val="000000"/>
               </a:solidFill>
@@ -3892,7 +2791,7 @@
       </p:grpSpPr>
       <p:sp>
         <p:nvSpPr>
-          <p:cNvPr id="17" name="PlaceHolder 1"/>
+          <p:cNvPr id="13" name="PlaceHolder 1"/>
           <p:cNvSpPr>
             <a:spLocks noGrp="1"/>
           </p:cNvSpPr>
@@ -3903,7 +2802,7 @@
         <p:spPr>
           <a:xfrm>
             <a:off x="838080" y="365040"/>
-            <a:ext cx="10515240" cy="1325160"/>
+            <a:ext cx="10514520" cy="1324440"/>
           </a:xfrm>
           <a:prstGeom prst="rect">
             <a:avLst/>
@@ -3914,37 +2813,34 @@
           </a:ln>
         </p:spPr>
         <p:txBody>
-          <a:bodyPr lIns="91440" rIns="91440" tIns="45720" bIns="45720" anchor="ctr">
+          <a:bodyPr lIns="0" rIns="0" tIns="0" bIns="0" anchor="ctr">
             <a:noAutofit/>
           </a:bodyPr>
           <a:p>
-            <a:pPr indent="0" defTabSz="914400">
-              <a:lnSpc>
-                <a:spcPct val="90000"/>
-              </a:lnSpc>
+            <a:pPr indent="0">
               <a:buNone/>
             </a:pPr>
             <a:r>
-              <a:rPr b="0" lang="en-US" sz="4400" spc="-1" strike="noStrike">
-                <a:solidFill>
-                  <a:schemeClr val="dk1"/>
-                </a:solidFill>
-                <a:latin typeface="Calibri Light"/>
-              </a:rPr>
-              <a:t>Click to edit Master title style</a:t>
-            </a:r>
-            <a:endParaRPr b="0" lang="en-US" sz="4400" spc="-1" strike="noStrike">
-              <a:solidFill>
-                <a:schemeClr val="dk1"/>
-              </a:solidFill>
-              <a:latin typeface="Calibri"/>
+              <a:rPr b="0" lang="en-US" sz="1800" spc="-1" strike="noStrike">
+                <a:solidFill>
+                  <a:srgbClr val="000000"/>
+                </a:solidFill>
+                <a:latin typeface="Arial"/>
+              </a:rPr>
+              <a:t>Click to edit the title text format</a:t>
+            </a:r>
+            <a:endParaRPr b="0" lang="en-US" sz="1800" spc="-1" strike="noStrike">
+              <a:solidFill>
+                <a:srgbClr val="000000"/>
+              </a:solidFill>
+              <a:latin typeface="Arial"/>
             </a:endParaRPr>
           </a:p>
         </p:txBody>
       </p:sp>
       <p:sp>
         <p:nvSpPr>
-          <p:cNvPr id="18" name="PlaceHolder 2"/>
+          <p:cNvPr id="14" name="PlaceHolder 2"/>
           <p:cNvSpPr>
             <a:spLocks noGrp="1"/>
           </p:cNvSpPr>
@@ -3955,7 +2851,7 @@
         <p:spPr>
           <a:xfrm>
             <a:off x="838080" y="1825560"/>
-            <a:ext cx="10515240" cy="4350960"/>
+            <a:ext cx="10514520" cy="4350240"/>
           </a:xfrm>
           <a:prstGeom prst="rect">
             <a:avLst/>
@@ -3966,245 +2862,221 @@
           </a:ln>
         </p:spPr>
         <p:txBody>
-          <a:bodyPr lIns="91440" rIns="91440" tIns="45720" bIns="45720" anchor="t">
-            <a:noAutofit/>
+          <a:bodyPr lIns="0" rIns="0" tIns="0" bIns="0" anchor="t">
+            <a:normAutofit/>
           </a:bodyPr>
           <a:p>
-            <a:pPr marL="228600" indent="-228600" defTabSz="914400">
-              <a:lnSpc>
-                <a:spcPct val="90000"/>
-              </a:lnSpc>
-              <a:spcBef>
-                <a:spcPts val="1001"/>
+            <a:pPr marL="432000" indent="-324000">
+              <a:spcBef>
+                <a:spcPts val="1417"/>
               </a:spcBef>
               <a:buClr>
                 <a:srgbClr val="000000"/>
               </a:buClr>
-              <a:buFont typeface="Arial"/>
-              <a:buChar char="•"/>
-            </a:pPr>
-            <a:r>
-              <a:rPr b="0" lang="en-US" sz="2800" spc="-1" strike="noStrike">
-                <a:solidFill>
-                  <a:schemeClr val="dk1"/>
-                </a:solidFill>
-                <a:latin typeface="Calibri"/>
-              </a:rPr>
-              <a:t>Click to edit Master text styles</a:t>
-            </a:r>
-            <a:endParaRPr b="0" lang="en-US" sz="2800" spc="-1" strike="noStrike">
-              <a:solidFill>
-                <a:schemeClr val="dk1"/>
-              </a:solidFill>
-              <a:latin typeface="Calibri"/>
-            </a:endParaRPr>
-          </a:p>
-          <a:p>
-            <a:pPr lvl="1" marL="685800" indent="-228600" defTabSz="914400">
-              <a:lnSpc>
-                <a:spcPct val="90000"/>
-              </a:lnSpc>
-              <a:spcBef>
-                <a:spcPts val="499"/>
+              <a:buSzPct val="45000"/>
+              <a:buFont typeface="Wingdings" charset="2"/>
+              <a:buChar char=""/>
+            </a:pPr>
+            <a:r>
+              <a:rPr b="0" lang="en-US" sz="1800" spc="-1" strike="noStrike">
+                <a:solidFill>
+                  <a:srgbClr val="000000"/>
+                </a:solidFill>
+                <a:latin typeface="Arial"/>
+              </a:rPr>
+              <a:t>Click to edit the outline text format</a:t>
+            </a:r>
+            <a:endParaRPr b="0" lang="en-US" sz="1800" spc="-1" strike="noStrike">
+              <a:solidFill>
+                <a:srgbClr val="000000"/>
+              </a:solidFill>
+              <a:latin typeface="Arial"/>
+            </a:endParaRPr>
+          </a:p>
+          <a:p>
+            <a:pPr lvl="1" marL="864000" indent="-324000">
+              <a:spcBef>
+                <a:spcPts val="1134"/>
               </a:spcBef>
               <a:buClr>
                 <a:srgbClr val="000000"/>
               </a:buClr>
-              <a:buFont typeface="Arial"/>
-              <a:buChar char="•"/>
-            </a:pPr>
-            <a:r>
-              <a:rPr b="0" lang="en-US" sz="2400" spc="-1" strike="noStrike">
-                <a:solidFill>
-                  <a:schemeClr val="dk1"/>
-                </a:solidFill>
-                <a:latin typeface="Calibri"/>
-              </a:rPr>
-              <a:t>Second level</a:t>
-            </a:r>
-            <a:endParaRPr b="0" lang="en-US" sz="2400" spc="-1" strike="noStrike">
-              <a:solidFill>
-                <a:schemeClr val="dk1"/>
-              </a:solidFill>
-              <a:latin typeface="Calibri"/>
-            </a:endParaRPr>
-          </a:p>
-          <a:p>
-            <a:pPr lvl="2" marL="1143000" indent="-228600" defTabSz="914400">
-              <a:lnSpc>
-                <a:spcPct val="90000"/>
-              </a:lnSpc>
-              <a:spcBef>
-                <a:spcPts val="499"/>
+              <a:buSzPct val="75000"/>
+              <a:buFont typeface="Symbol" charset="2"/>
+              <a:buChar char=""/>
+            </a:pPr>
+            <a:r>
+              <a:rPr b="0" lang="en-US" sz="1800" spc="-1" strike="noStrike">
+                <a:solidFill>
+                  <a:srgbClr val="000000"/>
+                </a:solidFill>
+                <a:latin typeface="Arial"/>
+              </a:rPr>
+              <a:t>Second Outline Level</a:t>
+            </a:r>
+            <a:endParaRPr b="0" lang="en-US" sz="1800" spc="-1" strike="noStrike">
+              <a:solidFill>
+                <a:srgbClr val="000000"/>
+              </a:solidFill>
+              <a:latin typeface="Arial"/>
+            </a:endParaRPr>
+          </a:p>
+          <a:p>
+            <a:pPr lvl="2" marL="1296000" indent="-288000">
+              <a:spcBef>
+                <a:spcPts val="850"/>
               </a:spcBef>
               <a:buClr>
                 <a:srgbClr val="000000"/>
               </a:buClr>
-              <a:buFont typeface="Arial"/>
-              <a:buChar char="•"/>
-            </a:pPr>
-            <a:r>
-              <a:rPr b="0" lang="en-US" sz="2000" spc="-1" strike="noStrike">
-                <a:solidFill>
-                  <a:schemeClr val="dk1"/>
-                </a:solidFill>
-                <a:latin typeface="Calibri"/>
-              </a:rPr>
-              <a:t>Third level</a:t>
-            </a:r>
-            <a:endParaRPr b="0" lang="en-US" sz="2000" spc="-1" strike="noStrike">
-              <a:solidFill>
-                <a:schemeClr val="dk1"/>
-              </a:solidFill>
-              <a:latin typeface="Calibri"/>
-            </a:endParaRPr>
-          </a:p>
-          <a:p>
-            <a:pPr lvl="3" marL="1600200" indent="-228600" defTabSz="914400">
-              <a:lnSpc>
-                <a:spcPct val="90000"/>
-              </a:lnSpc>
-              <a:spcBef>
-                <a:spcPts val="499"/>
+              <a:buSzPct val="45000"/>
+              <a:buFont typeface="Wingdings" charset="2"/>
+              <a:buChar char=""/>
+            </a:pPr>
+            <a:r>
+              <a:rPr b="0" lang="en-US" sz="1800" spc="-1" strike="noStrike">
+                <a:solidFill>
+                  <a:srgbClr val="000000"/>
+                </a:solidFill>
+                <a:latin typeface="Arial"/>
+              </a:rPr>
+              <a:t>Third Outline Level</a:t>
+            </a:r>
+            <a:endParaRPr b="0" lang="en-US" sz="1800" spc="-1" strike="noStrike">
+              <a:solidFill>
+                <a:srgbClr val="000000"/>
+              </a:solidFill>
+              <a:latin typeface="Arial"/>
+            </a:endParaRPr>
+          </a:p>
+          <a:p>
+            <a:pPr lvl="3" marL="1728000" indent="-216000">
+              <a:spcBef>
+                <a:spcPts val="567"/>
               </a:spcBef>
               <a:buClr>
                 <a:srgbClr val="000000"/>
               </a:buClr>
-              <a:buFont typeface="Arial"/>
-              <a:buChar char="•"/>
+              <a:buSzPct val="75000"/>
+              <a:buFont typeface="Symbol" charset="2"/>
+              <a:buChar char=""/>
             </a:pPr>
             <a:r>
               <a:rPr b="0" lang="en-US" sz="1800" spc="-1" strike="noStrike">
                 <a:solidFill>
-                  <a:schemeClr val="dk1"/>
-                </a:solidFill>
-                <a:latin typeface="Calibri"/>
-              </a:rPr>
-              <a:t>Fourth level</a:t>
+                  <a:srgbClr val="000000"/>
+                </a:solidFill>
+                <a:latin typeface="Arial"/>
+              </a:rPr>
+              <a:t>Fourth Outline Level</a:t>
             </a:r>
             <a:endParaRPr b="0" lang="en-US" sz="1800" spc="-1" strike="noStrike">
               <a:solidFill>
-                <a:schemeClr val="dk1"/>
-              </a:solidFill>
-              <a:latin typeface="Calibri"/>
-            </a:endParaRPr>
-          </a:p>
-          <a:p>
-            <a:pPr lvl="4" marL="2057400" indent="-228600" defTabSz="914400">
-              <a:lnSpc>
-                <a:spcPct val="90000"/>
-              </a:lnSpc>
-              <a:spcBef>
-                <a:spcPts val="499"/>
+                <a:srgbClr val="000000"/>
+              </a:solidFill>
+              <a:latin typeface="Arial"/>
+            </a:endParaRPr>
+          </a:p>
+          <a:p>
+            <a:pPr lvl="4" marL="2160000" indent="-216000">
+              <a:spcBef>
+                <a:spcPts val="283"/>
               </a:spcBef>
               <a:buClr>
                 <a:srgbClr val="000000"/>
               </a:buClr>
-              <a:buFont typeface="Arial"/>
-              <a:buChar char="•"/>
+              <a:buSzPct val="45000"/>
+              <a:buFont typeface="Wingdings" charset="2"/>
+              <a:buChar char=""/>
             </a:pPr>
             <a:r>
               <a:rPr b="0" lang="en-US" sz="1800" spc="-1" strike="noStrike">
                 <a:solidFill>
-                  <a:schemeClr val="dk1"/>
-                </a:solidFill>
-                <a:latin typeface="Calibri"/>
-              </a:rPr>
-              <a:t>Fifth level</a:t>
+                  <a:srgbClr val="000000"/>
+                </a:solidFill>
+                <a:latin typeface="Arial"/>
+              </a:rPr>
+              <a:t>Fifth Outline Level</a:t>
             </a:r>
             <a:endParaRPr b="0" lang="en-US" sz="1800" spc="-1" strike="noStrike">
               <a:solidFill>
-                <a:schemeClr val="dk1"/>
-              </a:solidFill>
-              <a:latin typeface="Calibri"/>
+                <a:srgbClr val="000000"/>
+              </a:solidFill>
+              <a:latin typeface="Arial"/>
+            </a:endParaRPr>
+          </a:p>
+          <a:p>
+            <a:pPr lvl="5" marL="2592000" indent="-216000">
+              <a:spcBef>
+                <a:spcPts val="283"/>
+              </a:spcBef>
+              <a:buClr>
+                <a:srgbClr val="000000"/>
+              </a:buClr>
+              <a:buSzPct val="45000"/>
+              <a:buFont typeface="Wingdings" charset="2"/>
+              <a:buChar char=""/>
+            </a:pPr>
+            <a:r>
+              <a:rPr b="0" lang="en-US" sz="1800" spc="-1" strike="noStrike">
+                <a:solidFill>
+                  <a:srgbClr val="000000"/>
+                </a:solidFill>
+                <a:latin typeface="Arial"/>
+              </a:rPr>
+              <a:t>Sixth Outline Level</a:t>
+            </a:r>
+            <a:endParaRPr b="0" lang="en-US" sz="1800" spc="-1" strike="noStrike">
+              <a:solidFill>
+                <a:srgbClr val="000000"/>
+              </a:solidFill>
+              <a:latin typeface="Arial"/>
+            </a:endParaRPr>
+          </a:p>
+          <a:p>
+            <a:pPr lvl="6" marL="3024000" indent="-216000">
+              <a:spcBef>
+                <a:spcPts val="283"/>
+              </a:spcBef>
+              <a:buClr>
+                <a:srgbClr val="000000"/>
+              </a:buClr>
+              <a:buSzPct val="45000"/>
+              <a:buFont typeface="Wingdings" charset="2"/>
+              <a:buChar char=""/>
+            </a:pPr>
+            <a:r>
+              <a:rPr b="0" lang="en-US" sz="1800" spc="-1" strike="noStrike">
+                <a:solidFill>
+                  <a:srgbClr val="000000"/>
+                </a:solidFill>
+                <a:latin typeface="Arial"/>
+              </a:rPr>
+              <a:t>Seventh Outline Level</a:t>
+            </a:r>
+            <a:endParaRPr b="0" lang="en-US" sz="1800" spc="-1" strike="noStrike">
+              <a:solidFill>
+                <a:srgbClr val="000000"/>
+              </a:solidFill>
+              <a:latin typeface="Arial"/>
             </a:endParaRPr>
           </a:p>
         </p:txBody>
       </p:sp>
       <p:sp>
         <p:nvSpPr>
-          <p:cNvPr id="19" name="PlaceHolder 3"/>
+          <p:cNvPr id="15" name="PlaceHolder 3"/>
           <p:cNvSpPr>
             <a:spLocks noGrp="1"/>
           </p:cNvSpPr>
           <p:nvPr>
-            <p:ph type="dt" idx="10"/>
-          </p:nvPr>
-        </p:nvSpPr>
-        <p:spPr>
-          <a:xfrm>
-            <a:off x="838080" y="6356520"/>
-            <a:ext cx="2742840" cy="364680"/>
-          </a:xfrm>
-          <a:prstGeom prst="rect">
-            <a:avLst/>
-          </a:prstGeom>
-          <a:noFill/>
-          <a:ln w="0">
-            <a:noFill/>
-          </a:ln>
-        </p:spPr>
-        <p:txBody>
-          <a:bodyPr lIns="91440" rIns="91440" tIns="45720" bIns="45720" anchor="ctr">
-            <a:noAutofit/>
-          </a:bodyPr>
-          <a:lstStyle>
-            <a:lvl1pPr indent="0" defTabSz="914400">
-              <a:lnSpc>
-                <a:spcPct val="100000"/>
-              </a:lnSpc>
-              <a:buNone/>
-              <a:defRPr b="0" lang="en-US" sz="1200" spc="-1" strike="noStrike">
-                <a:solidFill>
-                  <a:schemeClr val="dk1">
-                    <a:tint val="75000"/>
-                  </a:schemeClr>
-                </a:solidFill>
-                <a:latin typeface="Calibri"/>
-              </a:defRPr>
-            </a:lvl1pPr>
-          </a:lstStyle>
-          <a:p>
-            <a:pPr indent="0" defTabSz="914400">
-              <a:lnSpc>
-                <a:spcPct val="100000"/>
-              </a:lnSpc>
-              <a:buNone/>
-            </a:pPr>
-            <a:r>
-              <a:rPr b="0" lang="en-US" sz="1200" spc="-1" strike="noStrike">
-                <a:solidFill>
-                  <a:schemeClr val="dk1">
-                    <a:tint val="75000"/>
-                  </a:schemeClr>
-                </a:solidFill>
-                <a:latin typeface="Calibri"/>
-              </a:rPr>
-              <a:t>&lt;date/time&gt;</a:t>
-            </a:r>
-            <a:endParaRPr b="0" lang="en-US" sz="1200" spc="-1" strike="noStrike">
-              <a:solidFill>
-                <a:srgbClr val="000000"/>
-              </a:solidFill>
-              <a:latin typeface="Times New Roman"/>
-            </a:endParaRPr>
-          </a:p>
-        </p:txBody>
-      </p:sp>
-      <p:sp>
-        <p:nvSpPr>
-          <p:cNvPr id="20" name="PlaceHolder 4"/>
-          <p:cNvSpPr>
-            <a:spLocks noGrp="1"/>
-          </p:cNvSpPr>
-          <p:nvPr>
-            <p:ph type="ftr" idx="11"/>
+            <p:ph type="ftr" idx="10"/>
           </p:nvPr>
         </p:nvSpPr>
         <p:spPr>
           <a:xfrm>
             <a:off x="4038480" y="6356520"/>
-            <a:ext cx="4114440" cy="364680"/>
+            <a:ext cx="4113720" cy="363960"/>
           </a:xfrm>
           <a:prstGeom prst="rect">
             <a:avLst/>
@@ -4220,7 +3092,13 @@
           </a:bodyPr>
           <a:lstStyle>
             <a:lvl1pPr indent="0" algn="ctr">
+              <a:lnSpc>
+                <a:spcPct val="100000"/>
+              </a:lnSpc>
               <a:buNone/>
+              <a:tabLst>
+                <a:tab algn="l" pos="0"/>
+              </a:tabLst>
               <a:defRPr b="0" lang="en-US" sz="1400" spc="-1" strike="noStrike">
                 <a:solidFill>
                   <a:srgbClr val="000000"/>
@@ -4231,7 +3109,13 @@
           </a:lstStyle>
           <a:p>
             <a:pPr indent="0" algn="ctr">
+              <a:lnSpc>
+                <a:spcPct val="100000"/>
+              </a:lnSpc>
               <a:buNone/>
+              <a:tabLst>
+                <a:tab algn="l" pos="0"/>
+              </a:tabLst>
             </a:pPr>
             <a:r>
               <a:rPr b="0" lang="en-US" sz="1400" spc="-1" strike="noStrike">
@@ -4253,18 +3137,18 @@
       </p:sp>
       <p:sp>
         <p:nvSpPr>
-          <p:cNvPr id="21" name="PlaceHolder 5"/>
+          <p:cNvPr id="16" name="PlaceHolder 4"/>
           <p:cNvSpPr>
             <a:spLocks noGrp="1"/>
           </p:cNvSpPr>
           <p:nvPr>
-            <p:ph type="sldNum" idx="12"/>
+            <p:ph type="sldNum" idx="11"/>
           </p:nvPr>
         </p:nvSpPr>
         <p:spPr>
           <a:xfrm>
             <a:off x="8610480" y="6356520"/>
-            <a:ext cx="2742840" cy="364680"/>
+            <a:ext cx="2742120" cy="363960"/>
           </a:xfrm>
           <a:prstGeom prst="rect">
             <a:avLst/>
@@ -4284,6 +3168,9 @@
                 <a:spcPct val="100000"/>
               </a:lnSpc>
               <a:buNone/>
+              <a:tabLst>
+                <a:tab algn="l" pos="0"/>
+              </a:tabLst>
               <a:defRPr b="0" lang="en-US" sz="1200" spc="-1" strike="noStrike">
                 <a:solidFill>
                   <a:schemeClr val="dk1">
@@ -4300,8 +3187,11 @@
                 <a:spcPct val="100000"/>
               </a:lnSpc>
               <a:buNone/>
-            </a:pPr>
-            <a:fld id="{7D907C46-8262-46B3-BD48-BFFE3D49E765}" type="slidenum">
+              <a:tabLst>
+                <a:tab algn="l" pos="0"/>
+              </a:tabLst>
+            </a:pPr>
+            <a:fld id="{0C3A23AA-7E45-4ECB-94F0-8D5F33898F7D}" type="slidenum">
               <a:rPr b="0" lang="en-US" sz="1200" spc="-1" strike="noStrike">
                 <a:solidFill>
                   <a:schemeClr val="dk1">
@@ -4313,6 +3203,66 @@
               <a:t>&lt;number&gt;</a:t>
             </a:fld>
             <a:endParaRPr b="0" lang="en-US" sz="1200" spc="-1" strike="noStrike">
+              <a:solidFill>
+                <a:srgbClr val="000000"/>
+              </a:solidFill>
+              <a:latin typeface="Times New Roman"/>
+            </a:endParaRPr>
+          </a:p>
+        </p:txBody>
+      </p:sp>
+      <p:sp>
+        <p:nvSpPr>
+          <p:cNvPr id="17" name="PlaceHolder 5"/>
+          <p:cNvSpPr>
+            <a:spLocks noGrp="1"/>
+          </p:cNvSpPr>
+          <p:nvPr>
+            <p:ph type="dt" idx="12"/>
+          </p:nvPr>
+        </p:nvSpPr>
+        <p:spPr>
+          <a:xfrm>
+            <a:off x="838080" y="6356520"/>
+            <a:ext cx="2742120" cy="363960"/>
+          </a:xfrm>
+          <a:prstGeom prst="rect">
+            <a:avLst/>
+          </a:prstGeom>
+          <a:noFill/>
+          <a:ln w="0">
+            <a:noFill/>
+          </a:ln>
+        </p:spPr>
+        <p:txBody>
+          <a:bodyPr lIns="91440" rIns="91440" tIns="45720" bIns="45720" anchor="ctr">
+            <a:noAutofit/>
+          </a:bodyPr>
+          <a:lstStyle>
+            <a:lvl1pPr indent="0">
+              <a:buNone/>
+              <a:defRPr b="0" lang="en-US" sz="1400" spc="-1" strike="noStrike">
+                <a:solidFill>
+                  <a:srgbClr val="000000"/>
+                </a:solidFill>
+                <a:latin typeface="Times New Roman"/>
+              </a:defRPr>
+            </a:lvl1pPr>
+          </a:lstStyle>
+          <a:p>
+            <a:pPr indent="0">
+              <a:buNone/>
+            </a:pPr>
+            <a:r>
+              <a:rPr b="0" lang="en-US" sz="1400" spc="-1" strike="noStrike">
+                <a:solidFill>
+                  <a:srgbClr val="000000"/>
+                </a:solidFill>
+                <a:latin typeface="Times New Roman"/>
+              </a:rPr>
+              <a:t>&lt;date/time&gt;</a:t>
+            </a:r>
+            <a:endParaRPr b="0" lang="en-US" sz="1400" spc="-1" strike="noStrike">
               <a:solidFill>
                 <a:srgbClr val="000000"/>
               </a:solidFill>
@@ -4356,200 +3306,18 @@
       </p:grpSpPr>
       <p:sp>
         <p:nvSpPr>
-          <p:cNvPr id="24" name="PlaceHolder 1"/>
+          <p:cNvPr id="20" name="PlaceHolder 1"/>
           <p:cNvSpPr>
             <a:spLocks noGrp="1"/>
           </p:cNvSpPr>
           <p:nvPr>
-            <p:ph type="title"/>
-          </p:nvPr>
-        </p:nvSpPr>
-        <p:spPr>
-          <a:xfrm>
-            <a:off x="831960" y="1709640"/>
-            <a:ext cx="10515240" cy="2852280"/>
-          </a:xfrm>
-          <a:prstGeom prst="rect">
-            <a:avLst/>
-          </a:prstGeom>
-          <a:noFill/>
-          <a:ln w="0">
-            <a:noFill/>
-          </a:ln>
-        </p:spPr>
-        <p:txBody>
-          <a:bodyPr lIns="91440" rIns="91440" tIns="45720" bIns="45720" anchor="b">
-            <a:noAutofit/>
-          </a:bodyPr>
-          <a:p>
-            <a:pPr indent="0" defTabSz="914400">
-              <a:lnSpc>
-                <a:spcPct val="90000"/>
-              </a:lnSpc>
-              <a:buNone/>
-            </a:pPr>
-            <a:r>
-              <a:rPr b="0" lang="en-US" sz="6000" spc="-1" strike="noStrike">
-                <a:solidFill>
-                  <a:schemeClr val="dk1"/>
-                </a:solidFill>
-                <a:latin typeface="Calibri Light"/>
-              </a:rPr>
-              <a:t>Click to edit Master title style</a:t>
-            </a:r>
-            <a:endParaRPr b="0" lang="en-US" sz="6000" spc="-1" strike="noStrike">
-              <a:solidFill>
-                <a:schemeClr val="dk1"/>
-              </a:solidFill>
-              <a:latin typeface="Calibri"/>
-            </a:endParaRPr>
-          </a:p>
-        </p:txBody>
-      </p:sp>
-      <p:sp>
-        <p:nvSpPr>
-          <p:cNvPr id="25" name="PlaceHolder 2"/>
-          <p:cNvSpPr>
-            <a:spLocks noGrp="1"/>
-          </p:cNvSpPr>
-          <p:nvPr>
-            <p:ph type="body"/>
-          </p:nvPr>
-        </p:nvSpPr>
-        <p:spPr>
-          <a:xfrm>
-            <a:off x="831960" y="4589640"/>
-            <a:ext cx="10515240" cy="1499760"/>
-          </a:xfrm>
-          <a:prstGeom prst="rect">
-            <a:avLst/>
-          </a:prstGeom>
-          <a:noFill/>
-          <a:ln w="0">
-            <a:noFill/>
-          </a:ln>
-        </p:spPr>
-        <p:txBody>
-          <a:bodyPr lIns="91440" rIns="91440" tIns="45720" bIns="45720" anchor="t">
-            <a:noAutofit/>
-          </a:bodyPr>
-          <a:p>
-            <a:pPr indent="0" defTabSz="914400">
-              <a:lnSpc>
-                <a:spcPct val="90000"/>
-              </a:lnSpc>
-              <a:spcBef>
-                <a:spcPts val="1001"/>
-              </a:spcBef>
-              <a:buNone/>
-              <a:tabLst>
-                <a:tab algn="l" pos="0"/>
-              </a:tabLst>
-            </a:pPr>
-            <a:r>
-              <a:rPr b="0" lang="en-US" sz="2400" spc="-1" strike="noStrike">
-                <a:solidFill>
-                  <a:schemeClr val="dk1">
-                    <a:tint val="75000"/>
-                  </a:schemeClr>
-                </a:solidFill>
-                <a:latin typeface="Calibri"/>
-              </a:rPr>
-              <a:t>Click to edit Master text styles</a:t>
-            </a:r>
-            <a:endParaRPr b="0" lang="en-US" sz="2400" spc="-1" strike="noStrike">
-              <a:solidFill>
-                <a:schemeClr val="dk1"/>
-              </a:solidFill>
-              <a:latin typeface="Calibri"/>
-            </a:endParaRPr>
-          </a:p>
-        </p:txBody>
-      </p:sp>
-      <p:sp>
-        <p:nvSpPr>
-          <p:cNvPr id="26" name="PlaceHolder 3"/>
-          <p:cNvSpPr>
-            <a:spLocks noGrp="1"/>
-          </p:cNvSpPr>
-          <p:nvPr>
-            <p:ph type="dt" idx="13"/>
-          </p:nvPr>
-        </p:nvSpPr>
-        <p:spPr>
-          <a:xfrm>
-            <a:off x="838080" y="6356520"/>
-            <a:ext cx="2742840" cy="364680"/>
-          </a:xfrm>
-          <a:prstGeom prst="rect">
-            <a:avLst/>
-          </a:prstGeom>
-          <a:noFill/>
-          <a:ln w="0">
-            <a:noFill/>
-          </a:ln>
-        </p:spPr>
-        <p:txBody>
-          <a:bodyPr lIns="91440" rIns="91440" tIns="45720" bIns="45720" anchor="ctr">
-            <a:noAutofit/>
-          </a:bodyPr>
-          <a:lstStyle>
-            <a:lvl1pPr indent="0" defTabSz="914400">
-              <a:lnSpc>
-                <a:spcPct val="100000"/>
-              </a:lnSpc>
-              <a:buNone/>
-              <a:defRPr b="0" lang="en-US" sz="1200" spc="-1" strike="noStrike">
-                <a:solidFill>
-                  <a:schemeClr val="dk1">
-                    <a:tint val="75000"/>
-                  </a:schemeClr>
-                </a:solidFill>
-                <a:latin typeface="Calibri"/>
-              </a:defRPr>
-            </a:lvl1pPr>
-          </a:lstStyle>
-          <a:p>
-            <a:pPr indent="0" defTabSz="914400">
-              <a:lnSpc>
-                <a:spcPct val="100000"/>
-              </a:lnSpc>
-              <a:buNone/>
-            </a:pPr>
-            <a:r>
-              <a:rPr b="0" lang="en-US" sz="1200" spc="-1" strike="noStrike">
-                <a:solidFill>
-                  <a:schemeClr val="dk1">
-                    <a:tint val="75000"/>
-                  </a:schemeClr>
-                </a:solidFill>
-                <a:latin typeface="Calibri"/>
-              </a:rPr>
-              <a:t>&lt;date/time&gt;</a:t>
-            </a:r>
-            <a:endParaRPr b="0" lang="en-US" sz="1200" spc="-1" strike="noStrike">
-              <a:solidFill>
-                <a:srgbClr val="000000"/>
-              </a:solidFill>
-              <a:latin typeface="Times New Roman"/>
-            </a:endParaRPr>
-          </a:p>
-        </p:txBody>
-      </p:sp>
-      <p:sp>
-        <p:nvSpPr>
-          <p:cNvPr id="27" name="PlaceHolder 4"/>
-          <p:cNvSpPr>
-            <a:spLocks noGrp="1"/>
-          </p:cNvSpPr>
-          <p:nvPr>
-            <p:ph type="ftr" idx="14"/>
+            <p:ph type="ftr" idx="13"/>
           </p:nvPr>
         </p:nvSpPr>
         <p:spPr>
           <a:xfrm>
             <a:off x="4038480" y="6356520"/>
-            <a:ext cx="4114440" cy="364680"/>
+            <a:ext cx="4113720" cy="363960"/>
           </a:xfrm>
           <a:prstGeom prst="rect">
             <a:avLst/>
@@ -4565,7 +3333,13 @@
           </a:bodyPr>
           <a:lstStyle>
             <a:lvl1pPr indent="0" algn="ctr">
+              <a:lnSpc>
+                <a:spcPct val="100000"/>
+              </a:lnSpc>
               <a:buNone/>
+              <a:tabLst>
+                <a:tab algn="l" pos="0"/>
+              </a:tabLst>
               <a:defRPr b="0" lang="en-US" sz="1400" spc="-1" strike="noStrike">
                 <a:solidFill>
                   <a:srgbClr val="000000"/>
@@ -4576,7 +3350,13 @@
           </a:lstStyle>
           <a:p>
             <a:pPr indent="0" algn="ctr">
+              <a:lnSpc>
+                <a:spcPct val="100000"/>
+              </a:lnSpc>
               <a:buNone/>
+              <a:tabLst>
+                <a:tab algn="l" pos="0"/>
+              </a:tabLst>
             </a:pPr>
             <a:r>
               <a:rPr b="0" lang="en-US" sz="1400" spc="-1" strike="noStrike">
@@ -4598,18 +3378,18 @@
       </p:sp>
       <p:sp>
         <p:nvSpPr>
-          <p:cNvPr id="28" name="PlaceHolder 5"/>
+          <p:cNvPr id="21" name="PlaceHolder 2"/>
           <p:cNvSpPr>
             <a:spLocks noGrp="1"/>
           </p:cNvSpPr>
           <p:nvPr>
-            <p:ph type="sldNum" idx="15"/>
+            <p:ph type="sldNum" idx="14"/>
           </p:nvPr>
         </p:nvSpPr>
         <p:spPr>
           <a:xfrm>
             <a:off x="8610480" y="6356520"/>
-            <a:ext cx="2742840" cy="364680"/>
+            <a:ext cx="2742120" cy="363960"/>
           </a:xfrm>
           <a:prstGeom prst="rect">
             <a:avLst/>
@@ -4629,6 +3409,9 @@
                 <a:spcPct val="100000"/>
               </a:lnSpc>
               <a:buNone/>
+              <a:tabLst>
+                <a:tab algn="l" pos="0"/>
+              </a:tabLst>
               <a:defRPr b="0" lang="en-US" sz="1200" spc="-1" strike="noStrike">
                 <a:solidFill>
                   <a:schemeClr val="dk1">
@@ -4645,8 +3428,11 @@
                 <a:spcPct val="100000"/>
               </a:lnSpc>
               <a:buNone/>
-            </a:pPr>
-            <a:fld id="{A6CF9A47-0353-41EB-B7CE-3B1B3D31C9C1}" type="slidenum">
+              <a:tabLst>
+                <a:tab algn="l" pos="0"/>
+              </a:tabLst>
+            </a:pPr>
+            <a:fld id="{742DDED4-AB9A-4FD1-8B12-738138A6679E}" type="slidenum">
               <a:rPr b="0" lang="en-US" sz="1200" spc="-1" strike="noStrike">
                 <a:solidFill>
                   <a:schemeClr val="dk1">
@@ -4658,6 +3444,66 @@
               <a:t>&lt;number&gt;</a:t>
             </a:fld>
             <a:endParaRPr b="0" lang="en-US" sz="1200" spc="-1" strike="noStrike">
+              <a:solidFill>
+                <a:srgbClr val="000000"/>
+              </a:solidFill>
+              <a:latin typeface="Times New Roman"/>
+            </a:endParaRPr>
+          </a:p>
+        </p:txBody>
+      </p:sp>
+      <p:sp>
+        <p:nvSpPr>
+          <p:cNvPr id="22" name="PlaceHolder 3"/>
+          <p:cNvSpPr>
+            <a:spLocks noGrp="1"/>
+          </p:cNvSpPr>
+          <p:nvPr>
+            <p:ph type="dt" idx="15"/>
+          </p:nvPr>
+        </p:nvSpPr>
+        <p:spPr>
+          <a:xfrm>
+            <a:off x="838080" y="6356520"/>
+            <a:ext cx="2742120" cy="363960"/>
+          </a:xfrm>
+          <a:prstGeom prst="rect">
+            <a:avLst/>
+          </a:prstGeom>
+          <a:noFill/>
+          <a:ln w="0">
+            <a:noFill/>
+          </a:ln>
+        </p:spPr>
+        <p:txBody>
+          <a:bodyPr lIns="91440" rIns="91440" tIns="45720" bIns="45720" anchor="ctr">
+            <a:noAutofit/>
+          </a:bodyPr>
+          <a:lstStyle>
+            <a:lvl1pPr indent="0">
+              <a:buNone/>
+              <a:defRPr b="0" lang="en-US" sz="1400" spc="-1" strike="noStrike">
+                <a:solidFill>
+                  <a:srgbClr val="000000"/>
+                </a:solidFill>
+                <a:latin typeface="Times New Roman"/>
+              </a:defRPr>
+            </a:lvl1pPr>
+          </a:lstStyle>
+          <a:p>
+            <a:pPr indent="0">
+              <a:buNone/>
+            </a:pPr>
+            <a:r>
+              <a:rPr b="0" lang="en-US" sz="1400" spc="-1" strike="noStrike">
+                <a:solidFill>
+                  <a:srgbClr val="000000"/>
+                </a:solidFill>
+                <a:latin typeface="Times New Roman"/>
+              </a:rPr>
+              <a:t>&lt;date/time&gt;</a:t>
+            </a:r>
+            <a:endParaRPr b="0" lang="en-US" sz="1400" spc="-1" strike="noStrike">
               <a:solidFill>
                 <a:srgbClr val="000000"/>
               </a:solidFill>
@@ -4701,7 +3547,7 @@
       </p:grpSpPr>
       <p:sp>
         <p:nvSpPr>
-          <p:cNvPr id="29" name="PlaceHolder 1"/>
+          <p:cNvPr id="23" name="PlaceHolder 1"/>
           <p:cNvSpPr>
             <a:spLocks noGrp="1"/>
           </p:cNvSpPr>
@@ -4712,7 +3558,7 @@
         <p:spPr>
           <a:xfrm>
             <a:off x="838080" y="365040"/>
-            <a:ext cx="10515240" cy="1325160"/>
+            <a:ext cx="10514520" cy="1324440"/>
           </a:xfrm>
           <a:prstGeom prst="rect">
             <a:avLst/>
@@ -4723,37 +3569,34 @@
           </a:ln>
         </p:spPr>
         <p:txBody>
-          <a:bodyPr lIns="91440" rIns="91440" tIns="45720" bIns="45720" anchor="ctr">
+          <a:bodyPr lIns="0" rIns="0" tIns="0" bIns="0" anchor="ctr">
             <a:noAutofit/>
           </a:bodyPr>
           <a:p>
-            <a:pPr indent="0" defTabSz="914400">
-              <a:lnSpc>
-                <a:spcPct val="90000"/>
-              </a:lnSpc>
+            <a:pPr indent="0">
               <a:buNone/>
             </a:pPr>
             <a:r>
-              <a:rPr b="0" lang="en-US" sz="4400" spc="-1" strike="noStrike">
-                <a:solidFill>
-                  <a:schemeClr val="dk1"/>
-                </a:solidFill>
-                <a:latin typeface="Calibri Light"/>
-              </a:rPr>
-              <a:t>Click to edit Master title style</a:t>
-            </a:r>
-            <a:endParaRPr b="0" lang="en-US" sz="4400" spc="-1" strike="noStrike">
-              <a:solidFill>
-                <a:schemeClr val="dk1"/>
-              </a:solidFill>
-              <a:latin typeface="Calibri"/>
+              <a:rPr b="0" lang="en-US" sz="1800" spc="-1" strike="noStrike">
+                <a:solidFill>
+                  <a:srgbClr val="000000"/>
+                </a:solidFill>
+                <a:latin typeface="Arial"/>
+              </a:rPr>
+              <a:t>Click to edit the title text format</a:t>
+            </a:r>
+            <a:endParaRPr b="0" lang="en-US" sz="1800" spc="-1" strike="noStrike">
+              <a:solidFill>
+                <a:srgbClr val="000000"/>
+              </a:solidFill>
+              <a:latin typeface="Arial"/>
             </a:endParaRPr>
           </a:p>
         </p:txBody>
       </p:sp>
       <p:sp>
         <p:nvSpPr>
-          <p:cNvPr id="30" name="PlaceHolder 2"/>
+          <p:cNvPr id="24" name="PlaceHolder 2"/>
           <p:cNvSpPr>
             <a:spLocks noGrp="1"/>
           </p:cNvSpPr>
@@ -4764,7 +3607,7 @@
         <p:spPr>
           <a:xfrm>
             <a:off x="838080" y="1825560"/>
-            <a:ext cx="5181120" cy="4350960"/>
+            <a:ext cx="5130720" cy="4350240"/>
           </a:xfrm>
           <a:prstGeom prst="rect">
             <a:avLst/>
@@ -4775,164 +3618,210 @@
           </a:ln>
         </p:spPr>
         <p:txBody>
-          <a:bodyPr lIns="91440" rIns="91440" tIns="45720" bIns="45720" anchor="t">
-            <a:noAutofit/>
+          <a:bodyPr lIns="0" rIns="0" tIns="0" bIns="0" anchor="t">
+            <a:normAutofit/>
           </a:bodyPr>
           <a:p>
-            <a:pPr marL="228600" indent="-228600" defTabSz="914400">
-              <a:lnSpc>
-                <a:spcPct val="90000"/>
-              </a:lnSpc>
-              <a:spcBef>
-                <a:spcPts val="1001"/>
+            <a:pPr marL="432000" indent="-324000">
+              <a:spcBef>
+                <a:spcPts val="1417"/>
               </a:spcBef>
               <a:buClr>
                 <a:srgbClr val="000000"/>
               </a:buClr>
-              <a:buFont typeface="Arial"/>
-              <a:buChar char="•"/>
-            </a:pPr>
-            <a:r>
-              <a:rPr b="0" lang="en-US" sz="2800" spc="-1" strike="noStrike">
-                <a:solidFill>
-                  <a:schemeClr val="dk1"/>
-                </a:solidFill>
-                <a:latin typeface="Calibri"/>
-              </a:rPr>
-              <a:t>Click to edit Master text styles</a:t>
-            </a:r>
-            <a:endParaRPr b="0" lang="en-US" sz="2800" spc="-1" strike="noStrike">
-              <a:solidFill>
-                <a:schemeClr val="dk1"/>
-              </a:solidFill>
-              <a:latin typeface="Calibri"/>
-            </a:endParaRPr>
-          </a:p>
-          <a:p>
-            <a:pPr lvl="1" marL="685800" indent="-228600" defTabSz="914400">
-              <a:lnSpc>
-                <a:spcPct val="90000"/>
-              </a:lnSpc>
-              <a:spcBef>
-                <a:spcPts val="499"/>
+              <a:buSzPct val="45000"/>
+              <a:buFont typeface="Wingdings" charset="2"/>
+              <a:buChar char=""/>
+            </a:pPr>
+            <a:r>
+              <a:rPr b="0" lang="en-US" sz="1800" spc="-1" strike="noStrike">
+                <a:solidFill>
+                  <a:srgbClr val="000000"/>
+                </a:solidFill>
+                <a:latin typeface="Arial"/>
+              </a:rPr>
+              <a:t>Click to edit the outline text format</a:t>
+            </a:r>
+            <a:endParaRPr b="0" lang="en-US" sz="1800" spc="-1" strike="noStrike">
+              <a:solidFill>
+                <a:srgbClr val="000000"/>
+              </a:solidFill>
+              <a:latin typeface="Arial"/>
+            </a:endParaRPr>
+          </a:p>
+          <a:p>
+            <a:pPr lvl="1" marL="864000" indent="-324000">
+              <a:spcBef>
+                <a:spcPts val="1134"/>
               </a:spcBef>
               <a:buClr>
                 <a:srgbClr val="000000"/>
               </a:buClr>
-              <a:buFont typeface="Arial"/>
-              <a:buChar char="•"/>
-            </a:pPr>
-            <a:r>
-              <a:rPr b="0" lang="en-US" sz="2400" spc="-1" strike="noStrike">
-                <a:solidFill>
-                  <a:schemeClr val="dk1"/>
-                </a:solidFill>
-                <a:latin typeface="Calibri"/>
-              </a:rPr>
-              <a:t>Second level</a:t>
-            </a:r>
-            <a:endParaRPr b="0" lang="en-US" sz="2400" spc="-1" strike="noStrike">
-              <a:solidFill>
-                <a:schemeClr val="dk1"/>
-              </a:solidFill>
-              <a:latin typeface="Calibri"/>
-            </a:endParaRPr>
-          </a:p>
-          <a:p>
-            <a:pPr lvl="2" marL="1143000" indent="-228600" defTabSz="914400">
-              <a:lnSpc>
-                <a:spcPct val="90000"/>
-              </a:lnSpc>
-              <a:spcBef>
-                <a:spcPts val="499"/>
+              <a:buSzPct val="75000"/>
+              <a:buFont typeface="Symbol" charset="2"/>
+              <a:buChar char=""/>
+            </a:pPr>
+            <a:r>
+              <a:rPr b="0" lang="en-US" sz="1800" spc="-1" strike="noStrike">
+                <a:solidFill>
+                  <a:srgbClr val="000000"/>
+                </a:solidFill>
+                <a:latin typeface="Arial"/>
+              </a:rPr>
+              <a:t>Second Outline Level</a:t>
+            </a:r>
+            <a:endParaRPr b="0" lang="en-US" sz="1800" spc="-1" strike="noStrike">
+              <a:solidFill>
+                <a:srgbClr val="000000"/>
+              </a:solidFill>
+              <a:latin typeface="Arial"/>
+            </a:endParaRPr>
+          </a:p>
+          <a:p>
+            <a:pPr lvl="2" marL="1296000" indent="-288000">
+              <a:spcBef>
+                <a:spcPts val="850"/>
               </a:spcBef>
               <a:buClr>
                 <a:srgbClr val="000000"/>
               </a:buClr>
-              <a:buFont typeface="Arial"/>
-              <a:buChar char="•"/>
-            </a:pPr>
-            <a:r>
-              <a:rPr b="0" lang="en-US" sz="2000" spc="-1" strike="noStrike">
-                <a:solidFill>
-                  <a:schemeClr val="dk1"/>
-                </a:solidFill>
-                <a:latin typeface="Calibri"/>
-              </a:rPr>
-              <a:t>Third level</a:t>
-            </a:r>
-            <a:endParaRPr b="0" lang="en-US" sz="2000" spc="-1" strike="noStrike">
-              <a:solidFill>
-                <a:schemeClr val="dk1"/>
-              </a:solidFill>
-              <a:latin typeface="Calibri"/>
-            </a:endParaRPr>
-          </a:p>
-          <a:p>
-            <a:pPr lvl="3" marL="1600200" indent="-228600" defTabSz="914400">
-              <a:lnSpc>
-                <a:spcPct val="90000"/>
-              </a:lnSpc>
-              <a:spcBef>
-                <a:spcPts val="499"/>
+              <a:buSzPct val="45000"/>
+              <a:buFont typeface="Wingdings" charset="2"/>
+              <a:buChar char=""/>
+            </a:pPr>
+            <a:r>
+              <a:rPr b="0" lang="en-US" sz="1800" spc="-1" strike="noStrike">
+                <a:solidFill>
+                  <a:srgbClr val="000000"/>
+                </a:solidFill>
+                <a:latin typeface="Arial"/>
+              </a:rPr>
+              <a:t>Third Outline Level</a:t>
+            </a:r>
+            <a:endParaRPr b="0" lang="en-US" sz="1800" spc="-1" strike="noStrike">
+              <a:solidFill>
+                <a:srgbClr val="000000"/>
+              </a:solidFill>
+              <a:latin typeface="Arial"/>
+            </a:endParaRPr>
+          </a:p>
+          <a:p>
+            <a:pPr lvl="3" marL="1728000" indent="-216000">
+              <a:spcBef>
+                <a:spcPts val="567"/>
               </a:spcBef>
               <a:buClr>
                 <a:srgbClr val="000000"/>
               </a:buClr>
-              <a:buFont typeface="Arial"/>
-              <a:buChar char="•"/>
+              <a:buSzPct val="75000"/>
+              <a:buFont typeface="Symbol" charset="2"/>
+              <a:buChar char=""/>
             </a:pPr>
             <a:r>
               <a:rPr b="0" lang="en-US" sz="1800" spc="-1" strike="noStrike">
                 <a:solidFill>
-                  <a:schemeClr val="dk1"/>
-                </a:solidFill>
-                <a:latin typeface="Calibri"/>
-              </a:rPr>
-              <a:t>Fourth level</a:t>
+                  <a:srgbClr val="000000"/>
+                </a:solidFill>
+                <a:latin typeface="Arial"/>
+              </a:rPr>
+              <a:t>Fourth Outline Level</a:t>
             </a:r>
             <a:endParaRPr b="0" lang="en-US" sz="1800" spc="-1" strike="noStrike">
               <a:solidFill>
-                <a:schemeClr val="dk1"/>
-              </a:solidFill>
-              <a:latin typeface="Calibri"/>
-            </a:endParaRPr>
-          </a:p>
-          <a:p>
-            <a:pPr lvl="4" marL="2057400" indent="-228600" defTabSz="914400">
-              <a:lnSpc>
-                <a:spcPct val="90000"/>
-              </a:lnSpc>
-              <a:spcBef>
-                <a:spcPts val="499"/>
+                <a:srgbClr val="000000"/>
+              </a:solidFill>
+              <a:latin typeface="Arial"/>
+            </a:endParaRPr>
+          </a:p>
+          <a:p>
+            <a:pPr lvl="4" marL="2160000" indent="-216000">
+              <a:spcBef>
+                <a:spcPts val="283"/>
               </a:spcBef>
               <a:buClr>
                 <a:srgbClr val="000000"/>
               </a:buClr>
-              <a:buFont typeface="Arial"/>
-              <a:buChar char="•"/>
+              <a:buSzPct val="45000"/>
+              <a:buFont typeface="Wingdings" charset="2"/>
+              <a:buChar char=""/>
             </a:pPr>
             <a:r>
               <a:rPr b="0" lang="en-US" sz="1800" spc="-1" strike="noStrike">
                 <a:solidFill>
-                  <a:schemeClr val="dk1"/>
-                </a:solidFill>
-                <a:latin typeface="Calibri"/>
-              </a:rPr>
-              <a:t>Fifth level</a:t>
+                  <a:srgbClr val="000000"/>
+                </a:solidFill>
+                <a:latin typeface="Arial"/>
+              </a:rPr>
+              <a:t>Fifth Outline Level</a:t>
             </a:r>
             <a:endParaRPr b="0" lang="en-US" sz="1800" spc="-1" strike="noStrike">
               <a:solidFill>
-                <a:schemeClr val="dk1"/>
-              </a:solidFill>
-              <a:latin typeface="Calibri"/>
+                <a:srgbClr val="000000"/>
+              </a:solidFill>
+              <a:latin typeface="Arial"/>
+            </a:endParaRPr>
+          </a:p>
+          <a:p>
+            <a:pPr lvl="5" marL="2592000" indent="-216000">
+              <a:spcBef>
+                <a:spcPts val="283"/>
+              </a:spcBef>
+              <a:buClr>
+                <a:srgbClr val="000000"/>
+              </a:buClr>
+              <a:buSzPct val="45000"/>
+              <a:buFont typeface="Wingdings" charset="2"/>
+              <a:buChar char=""/>
+            </a:pPr>
+            <a:r>
+              <a:rPr b="0" lang="en-US" sz="1800" spc="-1" strike="noStrike">
+                <a:solidFill>
+                  <a:srgbClr val="000000"/>
+                </a:solidFill>
+                <a:latin typeface="Arial"/>
+              </a:rPr>
+              <a:t>Sixth Outline Level</a:t>
+            </a:r>
+            <a:endParaRPr b="0" lang="en-US" sz="1800" spc="-1" strike="noStrike">
+              <a:solidFill>
+                <a:srgbClr val="000000"/>
+              </a:solidFill>
+              <a:latin typeface="Arial"/>
+            </a:endParaRPr>
+          </a:p>
+          <a:p>
+            <a:pPr lvl="6" marL="3024000" indent="-216000">
+              <a:spcBef>
+                <a:spcPts val="283"/>
+              </a:spcBef>
+              <a:buClr>
+                <a:srgbClr val="000000"/>
+              </a:buClr>
+              <a:buSzPct val="45000"/>
+              <a:buFont typeface="Wingdings" charset="2"/>
+              <a:buChar char=""/>
+            </a:pPr>
+            <a:r>
+              <a:rPr b="0" lang="en-US" sz="1800" spc="-1" strike="noStrike">
+                <a:solidFill>
+                  <a:srgbClr val="000000"/>
+                </a:solidFill>
+                <a:latin typeface="Arial"/>
+              </a:rPr>
+              <a:t>Seventh Outline Level</a:t>
+            </a:r>
+            <a:endParaRPr b="0" lang="en-US" sz="1800" spc="-1" strike="noStrike">
+              <a:solidFill>
+                <a:srgbClr val="000000"/>
+              </a:solidFill>
+              <a:latin typeface="Arial"/>
             </a:endParaRPr>
           </a:p>
         </p:txBody>
       </p:sp>
       <p:sp>
         <p:nvSpPr>
-          <p:cNvPr id="31" name="PlaceHolder 3"/>
+          <p:cNvPr id="25" name="PlaceHolder 3"/>
           <p:cNvSpPr>
             <a:spLocks noGrp="1"/>
           </p:cNvSpPr>
@@ -4942,8 +3831,8 @@
         </p:nvSpPr>
         <p:spPr>
           <a:xfrm>
-            <a:off x="6172200" y="1825560"/>
-            <a:ext cx="5181120" cy="4350960"/>
+            <a:off x="6226200" y="1825560"/>
+            <a:ext cx="5130720" cy="4350240"/>
           </a:xfrm>
           <a:prstGeom prst="rect">
             <a:avLst/>
@@ -4954,245 +3843,221 @@
           </a:ln>
         </p:spPr>
         <p:txBody>
-          <a:bodyPr lIns="91440" rIns="91440" tIns="45720" bIns="45720" anchor="t">
-            <a:noAutofit/>
+          <a:bodyPr lIns="0" rIns="0" tIns="0" bIns="0" anchor="t">
+            <a:normAutofit/>
           </a:bodyPr>
           <a:p>
-            <a:pPr marL="228600" indent="-228600" defTabSz="914400">
-              <a:lnSpc>
-                <a:spcPct val="90000"/>
-              </a:lnSpc>
-              <a:spcBef>
-                <a:spcPts val="1001"/>
+            <a:pPr marL="432000" indent="-324000">
+              <a:spcBef>
+                <a:spcPts val="1417"/>
               </a:spcBef>
               <a:buClr>
                 <a:srgbClr val="000000"/>
               </a:buClr>
-              <a:buFont typeface="Arial"/>
-              <a:buChar char="•"/>
-            </a:pPr>
-            <a:r>
-              <a:rPr b="0" lang="en-US" sz="2800" spc="-1" strike="noStrike">
-                <a:solidFill>
-                  <a:schemeClr val="dk1"/>
-                </a:solidFill>
-                <a:latin typeface="Calibri"/>
-              </a:rPr>
-              <a:t>Click to edit Master text styles</a:t>
-            </a:r>
-            <a:endParaRPr b="0" lang="en-US" sz="2800" spc="-1" strike="noStrike">
-              <a:solidFill>
-                <a:schemeClr val="dk1"/>
-              </a:solidFill>
-              <a:latin typeface="Calibri"/>
-            </a:endParaRPr>
-          </a:p>
-          <a:p>
-            <a:pPr lvl="1" marL="685800" indent="-228600" defTabSz="914400">
-              <a:lnSpc>
-                <a:spcPct val="90000"/>
-              </a:lnSpc>
-              <a:spcBef>
-                <a:spcPts val="499"/>
+              <a:buSzPct val="45000"/>
+              <a:buFont typeface="Wingdings" charset="2"/>
+              <a:buChar char=""/>
+            </a:pPr>
+            <a:r>
+              <a:rPr b="0" lang="en-US" sz="1800" spc="-1" strike="noStrike">
+                <a:solidFill>
+                  <a:srgbClr val="000000"/>
+                </a:solidFill>
+                <a:latin typeface="Arial"/>
+              </a:rPr>
+              <a:t>Click to edit the outline text format</a:t>
+            </a:r>
+            <a:endParaRPr b="0" lang="en-US" sz="1800" spc="-1" strike="noStrike">
+              <a:solidFill>
+                <a:srgbClr val="000000"/>
+              </a:solidFill>
+              <a:latin typeface="Arial"/>
+            </a:endParaRPr>
+          </a:p>
+          <a:p>
+            <a:pPr lvl="1" marL="864000" indent="-324000">
+              <a:spcBef>
+                <a:spcPts val="1134"/>
               </a:spcBef>
               <a:buClr>
                 <a:srgbClr val="000000"/>
               </a:buClr>
-              <a:buFont typeface="Arial"/>
-              <a:buChar char="•"/>
-            </a:pPr>
-            <a:r>
-              <a:rPr b="0" lang="en-US" sz="2400" spc="-1" strike="noStrike">
-                <a:solidFill>
-                  <a:schemeClr val="dk1"/>
-                </a:solidFill>
-                <a:latin typeface="Calibri"/>
-              </a:rPr>
-              <a:t>Second level</a:t>
-            </a:r>
-            <a:endParaRPr b="0" lang="en-US" sz="2400" spc="-1" strike="noStrike">
-              <a:solidFill>
-                <a:schemeClr val="dk1"/>
-              </a:solidFill>
-              <a:latin typeface="Calibri"/>
-            </a:endParaRPr>
-          </a:p>
-          <a:p>
-            <a:pPr lvl="2" marL="1143000" indent="-228600" defTabSz="914400">
-              <a:lnSpc>
-                <a:spcPct val="90000"/>
-              </a:lnSpc>
-              <a:spcBef>
-                <a:spcPts val="499"/>
+              <a:buSzPct val="75000"/>
+              <a:buFont typeface="Symbol" charset="2"/>
+              <a:buChar char=""/>
+            </a:pPr>
+            <a:r>
+              <a:rPr b="0" lang="en-US" sz="1800" spc="-1" strike="noStrike">
+                <a:solidFill>
+                  <a:srgbClr val="000000"/>
+                </a:solidFill>
+                <a:latin typeface="Arial"/>
+              </a:rPr>
+              <a:t>Second Outline Level</a:t>
+            </a:r>
+            <a:endParaRPr b="0" lang="en-US" sz="1800" spc="-1" strike="noStrike">
+              <a:solidFill>
+                <a:srgbClr val="000000"/>
+              </a:solidFill>
+              <a:latin typeface="Arial"/>
+            </a:endParaRPr>
+          </a:p>
+          <a:p>
+            <a:pPr lvl="2" marL="1296000" indent="-288000">
+              <a:spcBef>
+                <a:spcPts val="850"/>
               </a:spcBef>
               <a:buClr>
                 <a:srgbClr val="000000"/>
               </a:buClr>
-              <a:buFont typeface="Arial"/>
-              <a:buChar char="•"/>
-            </a:pPr>
-            <a:r>
-              <a:rPr b="0" lang="en-US" sz="2000" spc="-1" strike="noStrike">
-                <a:solidFill>
-                  <a:schemeClr val="dk1"/>
-                </a:solidFill>
-                <a:latin typeface="Calibri"/>
-              </a:rPr>
-              <a:t>Third level</a:t>
-            </a:r>
-            <a:endParaRPr b="0" lang="en-US" sz="2000" spc="-1" strike="noStrike">
-              <a:solidFill>
-                <a:schemeClr val="dk1"/>
-              </a:solidFill>
-              <a:latin typeface="Calibri"/>
-            </a:endParaRPr>
-          </a:p>
-          <a:p>
-            <a:pPr lvl="3" marL="1600200" indent="-228600" defTabSz="914400">
-              <a:lnSpc>
-                <a:spcPct val="90000"/>
-              </a:lnSpc>
-              <a:spcBef>
-                <a:spcPts val="499"/>
+              <a:buSzPct val="45000"/>
+              <a:buFont typeface="Wingdings" charset="2"/>
+              <a:buChar char=""/>
+            </a:pPr>
+            <a:r>
+              <a:rPr b="0" lang="en-US" sz="1800" spc="-1" strike="noStrike">
+                <a:solidFill>
+                  <a:srgbClr val="000000"/>
+                </a:solidFill>
+                <a:latin typeface="Arial"/>
+              </a:rPr>
+              <a:t>Third Outline Level</a:t>
+            </a:r>
+            <a:endParaRPr b="0" lang="en-US" sz="1800" spc="-1" strike="noStrike">
+              <a:solidFill>
+                <a:srgbClr val="000000"/>
+              </a:solidFill>
+              <a:latin typeface="Arial"/>
+            </a:endParaRPr>
+          </a:p>
+          <a:p>
+            <a:pPr lvl="3" marL="1728000" indent="-216000">
+              <a:spcBef>
+                <a:spcPts val="567"/>
               </a:spcBef>
               <a:buClr>
                 <a:srgbClr val="000000"/>
               </a:buClr>
-              <a:buFont typeface="Arial"/>
-              <a:buChar char="•"/>
+              <a:buSzPct val="75000"/>
+              <a:buFont typeface="Symbol" charset="2"/>
+              <a:buChar char=""/>
             </a:pPr>
             <a:r>
               <a:rPr b="0" lang="en-US" sz="1800" spc="-1" strike="noStrike">
                 <a:solidFill>
-                  <a:schemeClr val="dk1"/>
-                </a:solidFill>
-                <a:latin typeface="Calibri"/>
-              </a:rPr>
-              <a:t>Fourth level</a:t>
+                  <a:srgbClr val="000000"/>
+                </a:solidFill>
+                <a:latin typeface="Arial"/>
+              </a:rPr>
+              <a:t>Fourth Outline Level</a:t>
             </a:r>
             <a:endParaRPr b="0" lang="en-US" sz="1800" spc="-1" strike="noStrike">
               <a:solidFill>
-                <a:schemeClr val="dk1"/>
-              </a:solidFill>
-              <a:latin typeface="Calibri"/>
-            </a:endParaRPr>
-          </a:p>
-          <a:p>
-            <a:pPr lvl="4" marL="2057400" indent="-228600" defTabSz="914400">
-              <a:lnSpc>
-                <a:spcPct val="90000"/>
-              </a:lnSpc>
-              <a:spcBef>
-                <a:spcPts val="499"/>
+                <a:srgbClr val="000000"/>
+              </a:solidFill>
+              <a:latin typeface="Arial"/>
+            </a:endParaRPr>
+          </a:p>
+          <a:p>
+            <a:pPr lvl="4" marL="2160000" indent="-216000">
+              <a:spcBef>
+                <a:spcPts val="283"/>
               </a:spcBef>
               <a:buClr>
                 <a:srgbClr val="000000"/>
               </a:buClr>
-              <a:buFont typeface="Arial"/>
-              <a:buChar char="•"/>
+              <a:buSzPct val="45000"/>
+              <a:buFont typeface="Wingdings" charset="2"/>
+              <a:buChar char=""/>
             </a:pPr>
             <a:r>
               <a:rPr b="0" lang="en-US" sz="1800" spc="-1" strike="noStrike">
                 <a:solidFill>
-                  <a:schemeClr val="dk1"/>
-                </a:solidFill>
-                <a:latin typeface="Calibri"/>
-              </a:rPr>
-              <a:t>Fifth level</a:t>
+                  <a:srgbClr val="000000"/>
+                </a:solidFill>
+                <a:latin typeface="Arial"/>
+              </a:rPr>
+              <a:t>Fifth Outline Level</a:t>
             </a:r>
             <a:endParaRPr b="0" lang="en-US" sz="1800" spc="-1" strike="noStrike">
               <a:solidFill>
-                <a:schemeClr val="dk1"/>
-              </a:solidFill>
-              <a:latin typeface="Calibri"/>
+                <a:srgbClr val="000000"/>
+              </a:solidFill>
+              <a:latin typeface="Arial"/>
+            </a:endParaRPr>
+          </a:p>
+          <a:p>
+            <a:pPr lvl="5" marL="2592000" indent="-216000">
+              <a:spcBef>
+                <a:spcPts val="283"/>
+              </a:spcBef>
+              <a:buClr>
+                <a:srgbClr val="000000"/>
+              </a:buClr>
+              <a:buSzPct val="45000"/>
+              <a:buFont typeface="Wingdings" charset="2"/>
+              <a:buChar char=""/>
+            </a:pPr>
+            <a:r>
+              <a:rPr b="0" lang="en-US" sz="1800" spc="-1" strike="noStrike">
+                <a:solidFill>
+                  <a:srgbClr val="000000"/>
+                </a:solidFill>
+                <a:latin typeface="Arial"/>
+              </a:rPr>
+              <a:t>Sixth Outline Level</a:t>
+            </a:r>
+            <a:endParaRPr b="0" lang="en-US" sz="1800" spc="-1" strike="noStrike">
+              <a:solidFill>
+                <a:srgbClr val="000000"/>
+              </a:solidFill>
+              <a:latin typeface="Arial"/>
+            </a:endParaRPr>
+          </a:p>
+          <a:p>
+            <a:pPr lvl="6" marL="3024000" indent="-216000">
+              <a:spcBef>
+                <a:spcPts val="283"/>
+              </a:spcBef>
+              <a:buClr>
+                <a:srgbClr val="000000"/>
+              </a:buClr>
+              <a:buSzPct val="45000"/>
+              <a:buFont typeface="Wingdings" charset="2"/>
+              <a:buChar char=""/>
+            </a:pPr>
+            <a:r>
+              <a:rPr b="0" lang="en-US" sz="1800" spc="-1" strike="noStrike">
+                <a:solidFill>
+                  <a:srgbClr val="000000"/>
+                </a:solidFill>
+                <a:latin typeface="Arial"/>
+              </a:rPr>
+              <a:t>Seventh Outline Level</a:t>
+            </a:r>
+            <a:endParaRPr b="0" lang="en-US" sz="1800" spc="-1" strike="noStrike">
+              <a:solidFill>
+                <a:srgbClr val="000000"/>
+              </a:solidFill>
+              <a:latin typeface="Arial"/>
             </a:endParaRPr>
           </a:p>
         </p:txBody>
       </p:sp>
       <p:sp>
         <p:nvSpPr>
-          <p:cNvPr id="32" name="PlaceHolder 4"/>
+          <p:cNvPr id="26" name="PlaceHolder 4"/>
           <p:cNvSpPr>
             <a:spLocks noGrp="1"/>
           </p:cNvSpPr>
           <p:nvPr>
-            <p:ph type="dt" idx="16"/>
-          </p:nvPr>
-        </p:nvSpPr>
-        <p:spPr>
-          <a:xfrm>
-            <a:off x="838080" y="6356520"/>
-            <a:ext cx="2742840" cy="364680"/>
-          </a:xfrm>
-          <a:prstGeom prst="rect">
-            <a:avLst/>
-          </a:prstGeom>
-          <a:noFill/>
-          <a:ln w="0">
-            <a:noFill/>
-          </a:ln>
-        </p:spPr>
-        <p:txBody>
-          <a:bodyPr lIns="91440" rIns="91440" tIns="45720" bIns="45720" anchor="ctr">
-            <a:noAutofit/>
-          </a:bodyPr>
-          <a:lstStyle>
-            <a:lvl1pPr indent="0" defTabSz="914400">
-              <a:lnSpc>
-                <a:spcPct val="100000"/>
-              </a:lnSpc>
-              <a:buNone/>
-              <a:defRPr b="0" lang="en-US" sz="1200" spc="-1" strike="noStrike">
-                <a:solidFill>
-                  <a:schemeClr val="dk1">
-                    <a:tint val="75000"/>
-                  </a:schemeClr>
-                </a:solidFill>
-                <a:latin typeface="Calibri"/>
-              </a:defRPr>
-            </a:lvl1pPr>
-          </a:lstStyle>
-          <a:p>
-            <a:pPr indent="0" defTabSz="914400">
-              <a:lnSpc>
-                <a:spcPct val="100000"/>
-              </a:lnSpc>
-              <a:buNone/>
-            </a:pPr>
-            <a:r>
-              <a:rPr b="0" lang="en-US" sz="1200" spc="-1" strike="noStrike">
-                <a:solidFill>
-                  <a:schemeClr val="dk1">
-                    <a:tint val="75000"/>
-                  </a:schemeClr>
-                </a:solidFill>
-                <a:latin typeface="Calibri"/>
-              </a:rPr>
-              <a:t>&lt;date/time&gt;</a:t>
-            </a:r>
-            <a:endParaRPr b="0" lang="en-US" sz="1200" spc="-1" strike="noStrike">
-              <a:solidFill>
-                <a:srgbClr val="000000"/>
-              </a:solidFill>
-              <a:latin typeface="Times New Roman"/>
-            </a:endParaRPr>
-          </a:p>
-        </p:txBody>
-      </p:sp>
-      <p:sp>
-        <p:nvSpPr>
-          <p:cNvPr id="33" name="PlaceHolder 5"/>
-          <p:cNvSpPr>
-            <a:spLocks noGrp="1"/>
-          </p:cNvSpPr>
-          <p:nvPr>
-            <p:ph type="ftr" idx="17"/>
+            <p:ph type="ftr" idx="16"/>
           </p:nvPr>
         </p:nvSpPr>
         <p:spPr>
           <a:xfrm>
             <a:off x="4038480" y="6356520"/>
-            <a:ext cx="4114440" cy="364680"/>
+            <a:ext cx="4113720" cy="363960"/>
           </a:xfrm>
           <a:prstGeom prst="rect">
             <a:avLst/>
@@ -5208,7 +4073,13 @@
           </a:bodyPr>
           <a:lstStyle>
             <a:lvl1pPr indent="0" algn="ctr">
+              <a:lnSpc>
+                <a:spcPct val="100000"/>
+              </a:lnSpc>
               <a:buNone/>
+              <a:tabLst>
+                <a:tab algn="l" pos="0"/>
+              </a:tabLst>
               <a:defRPr b="0" lang="en-US" sz="1400" spc="-1" strike="noStrike">
                 <a:solidFill>
                   <a:srgbClr val="000000"/>
@@ -5219,7 +4090,13 @@
           </a:lstStyle>
           <a:p>
             <a:pPr indent="0" algn="ctr">
+              <a:lnSpc>
+                <a:spcPct val="100000"/>
+              </a:lnSpc>
               <a:buNone/>
+              <a:tabLst>
+                <a:tab algn="l" pos="0"/>
+              </a:tabLst>
             </a:pPr>
             <a:r>
               <a:rPr b="0" lang="en-US" sz="1400" spc="-1" strike="noStrike">
@@ -5241,18 +4118,18 @@
       </p:sp>
       <p:sp>
         <p:nvSpPr>
-          <p:cNvPr id="34" name="PlaceHolder 6"/>
+          <p:cNvPr id="27" name="PlaceHolder 5"/>
           <p:cNvSpPr>
             <a:spLocks noGrp="1"/>
           </p:cNvSpPr>
           <p:nvPr>
-            <p:ph type="sldNum" idx="18"/>
+            <p:ph type="sldNum" idx="17"/>
           </p:nvPr>
         </p:nvSpPr>
         <p:spPr>
           <a:xfrm>
             <a:off x="8610480" y="6356520"/>
-            <a:ext cx="2742840" cy="364680"/>
+            <a:ext cx="2742120" cy="363960"/>
           </a:xfrm>
           <a:prstGeom prst="rect">
             <a:avLst/>
@@ -5272,6 +4149,9 @@
                 <a:spcPct val="100000"/>
               </a:lnSpc>
               <a:buNone/>
+              <a:tabLst>
+                <a:tab algn="l" pos="0"/>
+              </a:tabLst>
               <a:defRPr b="0" lang="en-US" sz="1200" spc="-1" strike="noStrike">
                 <a:solidFill>
                   <a:schemeClr val="dk1">
@@ -5288,8 +4168,11 @@
                 <a:spcPct val="100000"/>
               </a:lnSpc>
               <a:buNone/>
-            </a:pPr>
-            <a:fld id="{0ABBF77B-3847-4735-B798-2DA728A3D49C}" type="slidenum">
+              <a:tabLst>
+                <a:tab algn="l" pos="0"/>
+              </a:tabLst>
+            </a:pPr>
+            <a:fld id="{2F59C2C0-52D8-43A2-8FFF-C163A6E5129B}" type="slidenum">
               <a:rPr b="0" lang="en-US" sz="1200" spc="-1" strike="noStrike">
                 <a:solidFill>
                   <a:schemeClr val="dk1">
@@ -5301,6 +4184,66 @@
               <a:t>&lt;number&gt;</a:t>
             </a:fld>
             <a:endParaRPr b="0" lang="en-US" sz="1200" spc="-1" strike="noStrike">
+              <a:solidFill>
+                <a:srgbClr val="000000"/>
+              </a:solidFill>
+              <a:latin typeface="Times New Roman"/>
+            </a:endParaRPr>
+          </a:p>
+        </p:txBody>
+      </p:sp>
+      <p:sp>
+        <p:nvSpPr>
+          <p:cNvPr id="28" name="PlaceHolder 6"/>
+          <p:cNvSpPr>
+            <a:spLocks noGrp="1"/>
+          </p:cNvSpPr>
+          <p:nvPr>
+            <p:ph type="dt" idx="18"/>
+          </p:nvPr>
+        </p:nvSpPr>
+        <p:spPr>
+          <a:xfrm>
+            <a:off x="838080" y="6356520"/>
+            <a:ext cx="2742120" cy="363960"/>
+          </a:xfrm>
+          <a:prstGeom prst="rect">
+            <a:avLst/>
+          </a:prstGeom>
+          <a:noFill/>
+          <a:ln w="0">
+            <a:noFill/>
+          </a:ln>
+        </p:spPr>
+        <p:txBody>
+          <a:bodyPr lIns="91440" rIns="91440" tIns="45720" bIns="45720" anchor="ctr">
+            <a:noAutofit/>
+          </a:bodyPr>
+          <a:lstStyle>
+            <a:lvl1pPr indent="0">
+              <a:buNone/>
+              <a:defRPr b="0" lang="en-US" sz="1400" spc="-1" strike="noStrike">
+                <a:solidFill>
+                  <a:srgbClr val="000000"/>
+                </a:solidFill>
+                <a:latin typeface="Times New Roman"/>
+              </a:defRPr>
+            </a:lvl1pPr>
+          </a:lstStyle>
+          <a:p>
+            <a:pPr indent="0">
+              <a:buNone/>
+            </a:pPr>
+            <a:r>
+              <a:rPr b="0" lang="en-US" sz="1400" spc="-1" strike="noStrike">
+                <a:solidFill>
+                  <a:srgbClr val="000000"/>
+                </a:solidFill>
+                <a:latin typeface="Times New Roman"/>
+              </a:rPr>
+              <a:t>&lt;date/time&gt;</a:t>
+            </a:r>
+            <a:endParaRPr b="0" lang="en-US" sz="1400" spc="-1" strike="noStrike">
               <a:solidFill>
                 <a:srgbClr val="000000"/>
               </a:solidFill>
@@ -5344,614 +4287,18 @@
       </p:grpSpPr>
       <p:sp>
         <p:nvSpPr>
-          <p:cNvPr id="38" name="PlaceHolder 1"/>
+          <p:cNvPr id="32" name="PlaceHolder 1"/>
           <p:cNvSpPr>
             <a:spLocks noGrp="1"/>
           </p:cNvSpPr>
           <p:nvPr>
-            <p:ph type="title"/>
-          </p:nvPr>
-        </p:nvSpPr>
-        <p:spPr>
-          <a:xfrm>
-            <a:off x="839880" y="365040"/>
-            <a:ext cx="10515240" cy="1325160"/>
-          </a:xfrm>
-          <a:prstGeom prst="rect">
-            <a:avLst/>
-          </a:prstGeom>
-          <a:noFill/>
-          <a:ln w="0">
-            <a:noFill/>
-          </a:ln>
-        </p:spPr>
-        <p:txBody>
-          <a:bodyPr lIns="91440" rIns="91440" tIns="45720" bIns="45720" anchor="ctr">
-            <a:noAutofit/>
-          </a:bodyPr>
-          <a:p>
-            <a:pPr indent="0" defTabSz="914400">
-              <a:lnSpc>
-                <a:spcPct val="90000"/>
-              </a:lnSpc>
-              <a:buNone/>
-            </a:pPr>
-            <a:r>
-              <a:rPr b="0" lang="en-US" sz="4400" spc="-1" strike="noStrike">
-                <a:solidFill>
-                  <a:schemeClr val="dk1"/>
-                </a:solidFill>
-                <a:latin typeface="Calibri Light"/>
-              </a:rPr>
-              <a:t>Click to edit Master title style</a:t>
-            </a:r>
-            <a:endParaRPr b="0" lang="en-US" sz="4400" spc="-1" strike="noStrike">
-              <a:solidFill>
-                <a:schemeClr val="dk1"/>
-              </a:solidFill>
-              <a:latin typeface="Calibri"/>
-            </a:endParaRPr>
-          </a:p>
-        </p:txBody>
-      </p:sp>
-      <p:sp>
-        <p:nvSpPr>
-          <p:cNvPr id="39" name="PlaceHolder 2"/>
-          <p:cNvSpPr>
-            <a:spLocks noGrp="1"/>
-          </p:cNvSpPr>
-          <p:nvPr>
-            <p:ph type="body"/>
-          </p:nvPr>
-        </p:nvSpPr>
-        <p:spPr>
-          <a:xfrm>
-            <a:off x="839880" y="1681200"/>
-            <a:ext cx="5157360" cy="823680"/>
-          </a:xfrm>
-          <a:prstGeom prst="rect">
-            <a:avLst/>
-          </a:prstGeom>
-          <a:noFill/>
-          <a:ln w="0">
-            <a:noFill/>
-          </a:ln>
-        </p:spPr>
-        <p:txBody>
-          <a:bodyPr lIns="91440" rIns="91440" tIns="45720" bIns="45720" anchor="b">
-            <a:noAutofit/>
-          </a:bodyPr>
-          <a:p>
-            <a:pPr indent="0" defTabSz="914400">
-              <a:lnSpc>
-                <a:spcPct val="90000"/>
-              </a:lnSpc>
-              <a:spcBef>
-                <a:spcPts val="1001"/>
-              </a:spcBef>
-              <a:buNone/>
-              <a:tabLst>
-                <a:tab algn="l" pos="0"/>
-              </a:tabLst>
-            </a:pPr>
-            <a:r>
-              <a:rPr b="1" lang="en-US" sz="2400" spc="-1" strike="noStrike">
-                <a:solidFill>
-                  <a:schemeClr val="dk1"/>
-                </a:solidFill>
-                <a:latin typeface="Calibri"/>
-              </a:rPr>
-              <a:t>Click to edit Master text styles</a:t>
-            </a:r>
-            <a:endParaRPr b="0" lang="en-US" sz="2400" spc="-1" strike="noStrike">
-              <a:solidFill>
-                <a:schemeClr val="dk1"/>
-              </a:solidFill>
-              <a:latin typeface="Calibri"/>
-            </a:endParaRPr>
-          </a:p>
-        </p:txBody>
-      </p:sp>
-      <p:sp>
-        <p:nvSpPr>
-          <p:cNvPr id="40" name="PlaceHolder 3"/>
-          <p:cNvSpPr>
-            <a:spLocks noGrp="1"/>
-          </p:cNvSpPr>
-          <p:nvPr>
-            <p:ph type="body"/>
-          </p:nvPr>
-        </p:nvSpPr>
-        <p:spPr>
-          <a:xfrm>
-            <a:off x="839880" y="2505240"/>
-            <a:ext cx="5157360" cy="3684240"/>
-          </a:xfrm>
-          <a:prstGeom prst="rect">
-            <a:avLst/>
-          </a:prstGeom>
-          <a:noFill/>
-          <a:ln w="0">
-            <a:noFill/>
-          </a:ln>
-        </p:spPr>
-        <p:txBody>
-          <a:bodyPr lIns="91440" rIns="91440" tIns="45720" bIns="45720" anchor="t">
-            <a:noAutofit/>
-          </a:bodyPr>
-          <a:p>
-            <a:pPr marL="228600" indent="-228600" defTabSz="914400">
-              <a:lnSpc>
-                <a:spcPct val="90000"/>
-              </a:lnSpc>
-              <a:spcBef>
-                <a:spcPts val="1001"/>
-              </a:spcBef>
-              <a:buClr>
-                <a:srgbClr val="000000"/>
-              </a:buClr>
-              <a:buFont typeface="Arial"/>
-              <a:buChar char="•"/>
-            </a:pPr>
-            <a:r>
-              <a:rPr b="0" lang="en-US" sz="2800" spc="-1" strike="noStrike">
-                <a:solidFill>
-                  <a:schemeClr val="dk1"/>
-                </a:solidFill>
-                <a:latin typeface="Calibri"/>
-              </a:rPr>
-              <a:t>Click to edit Master text styles</a:t>
-            </a:r>
-            <a:endParaRPr b="0" lang="en-US" sz="2800" spc="-1" strike="noStrike">
-              <a:solidFill>
-                <a:schemeClr val="dk1"/>
-              </a:solidFill>
-              <a:latin typeface="Calibri"/>
-            </a:endParaRPr>
-          </a:p>
-          <a:p>
-            <a:pPr lvl="1" marL="685800" indent="-228600" defTabSz="914400">
-              <a:lnSpc>
-                <a:spcPct val="90000"/>
-              </a:lnSpc>
-              <a:spcBef>
-                <a:spcPts val="499"/>
-              </a:spcBef>
-              <a:buClr>
-                <a:srgbClr val="000000"/>
-              </a:buClr>
-              <a:buFont typeface="Arial"/>
-              <a:buChar char="•"/>
-            </a:pPr>
-            <a:r>
-              <a:rPr b="0" lang="en-US" sz="2400" spc="-1" strike="noStrike">
-                <a:solidFill>
-                  <a:schemeClr val="dk1"/>
-                </a:solidFill>
-                <a:latin typeface="Calibri"/>
-              </a:rPr>
-              <a:t>Second level</a:t>
-            </a:r>
-            <a:endParaRPr b="0" lang="en-US" sz="2400" spc="-1" strike="noStrike">
-              <a:solidFill>
-                <a:schemeClr val="dk1"/>
-              </a:solidFill>
-              <a:latin typeface="Calibri"/>
-            </a:endParaRPr>
-          </a:p>
-          <a:p>
-            <a:pPr lvl="2" marL="1143000" indent="-228600" defTabSz="914400">
-              <a:lnSpc>
-                <a:spcPct val="90000"/>
-              </a:lnSpc>
-              <a:spcBef>
-                <a:spcPts val="499"/>
-              </a:spcBef>
-              <a:buClr>
-                <a:srgbClr val="000000"/>
-              </a:buClr>
-              <a:buFont typeface="Arial"/>
-              <a:buChar char="•"/>
-            </a:pPr>
-            <a:r>
-              <a:rPr b="0" lang="en-US" sz="2000" spc="-1" strike="noStrike">
-                <a:solidFill>
-                  <a:schemeClr val="dk1"/>
-                </a:solidFill>
-                <a:latin typeface="Calibri"/>
-              </a:rPr>
-              <a:t>Third level</a:t>
-            </a:r>
-            <a:endParaRPr b="0" lang="en-US" sz="2000" spc="-1" strike="noStrike">
-              <a:solidFill>
-                <a:schemeClr val="dk1"/>
-              </a:solidFill>
-              <a:latin typeface="Calibri"/>
-            </a:endParaRPr>
-          </a:p>
-          <a:p>
-            <a:pPr lvl="3" marL="1600200" indent="-228600" defTabSz="914400">
-              <a:lnSpc>
-                <a:spcPct val="90000"/>
-              </a:lnSpc>
-              <a:spcBef>
-                <a:spcPts val="499"/>
-              </a:spcBef>
-              <a:buClr>
-                <a:srgbClr val="000000"/>
-              </a:buClr>
-              <a:buFont typeface="Arial"/>
-              <a:buChar char="•"/>
-            </a:pPr>
-            <a:r>
-              <a:rPr b="0" lang="en-US" sz="1800" spc="-1" strike="noStrike">
-                <a:solidFill>
-                  <a:schemeClr val="dk1"/>
-                </a:solidFill>
-                <a:latin typeface="Calibri"/>
-              </a:rPr>
-              <a:t>Fourth level</a:t>
-            </a:r>
-            <a:endParaRPr b="0" lang="en-US" sz="1800" spc="-1" strike="noStrike">
-              <a:solidFill>
-                <a:schemeClr val="dk1"/>
-              </a:solidFill>
-              <a:latin typeface="Calibri"/>
-            </a:endParaRPr>
-          </a:p>
-          <a:p>
-            <a:pPr lvl="4" marL="2057400" indent="-228600" defTabSz="914400">
-              <a:lnSpc>
-                <a:spcPct val="90000"/>
-              </a:lnSpc>
-              <a:spcBef>
-                <a:spcPts val="499"/>
-              </a:spcBef>
-              <a:buClr>
-                <a:srgbClr val="000000"/>
-              </a:buClr>
-              <a:buFont typeface="Arial"/>
-              <a:buChar char="•"/>
-            </a:pPr>
-            <a:r>
-              <a:rPr b="0" lang="en-US" sz="1800" spc="-1" strike="noStrike">
-                <a:solidFill>
-                  <a:schemeClr val="dk1"/>
-                </a:solidFill>
-                <a:latin typeface="Calibri"/>
-              </a:rPr>
-              <a:t>Fifth level</a:t>
-            </a:r>
-            <a:endParaRPr b="0" lang="en-US" sz="1800" spc="-1" strike="noStrike">
-              <a:solidFill>
-                <a:schemeClr val="dk1"/>
-              </a:solidFill>
-              <a:latin typeface="Calibri"/>
-            </a:endParaRPr>
-          </a:p>
-        </p:txBody>
-      </p:sp>
-      <p:sp>
-        <p:nvSpPr>
-          <p:cNvPr id="41" name="PlaceHolder 4"/>
-          <p:cNvSpPr>
-            <a:spLocks noGrp="1"/>
-          </p:cNvSpPr>
-          <p:nvPr>
-            <p:ph type="body"/>
-          </p:nvPr>
-        </p:nvSpPr>
-        <p:spPr>
-          <a:xfrm>
-            <a:off x="6172200" y="1681200"/>
-            <a:ext cx="5182920" cy="823680"/>
-          </a:xfrm>
-          <a:prstGeom prst="rect">
-            <a:avLst/>
-          </a:prstGeom>
-          <a:noFill/>
-          <a:ln w="0">
-            <a:noFill/>
-          </a:ln>
-        </p:spPr>
-        <p:txBody>
-          <a:bodyPr lIns="91440" rIns="91440" tIns="45720" bIns="45720" anchor="b">
-            <a:noAutofit/>
-          </a:bodyPr>
-          <a:p>
-            <a:pPr indent="0" defTabSz="914400">
-              <a:lnSpc>
-                <a:spcPct val="90000"/>
-              </a:lnSpc>
-              <a:spcBef>
-                <a:spcPts val="1001"/>
-              </a:spcBef>
-              <a:buNone/>
-              <a:tabLst>
-                <a:tab algn="l" pos="0"/>
-              </a:tabLst>
-            </a:pPr>
-            <a:r>
-              <a:rPr b="1" lang="en-US" sz="2400" spc="-1" strike="noStrike">
-                <a:solidFill>
-                  <a:schemeClr val="dk1"/>
-                </a:solidFill>
-                <a:latin typeface="Calibri"/>
-              </a:rPr>
-              <a:t>Click to edit Master text styles</a:t>
-            </a:r>
-            <a:endParaRPr b="0" lang="en-US" sz="2400" spc="-1" strike="noStrike">
-              <a:solidFill>
-                <a:schemeClr val="dk1"/>
-              </a:solidFill>
-              <a:latin typeface="Calibri"/>
-            </a:endParaRPr>
-          </a:p>
-        </p:txBody>
-      </p:sp>
-      <p:sp>
-        <p:nvSpPr>
-          <p:cNvPr id="42" name="PlaceHolder 5"/>
-          <p:cNvSpPr>
-            <a:spLocks noGrp="1"/>
-          </p:cNvSpPr>
-          <p:nvPr>
-            <p:ph type="body"/>
-          </p:nvPr>
-        </p:nvSpPr>
-        <p:spPr>
-          <a:xfrm>
-            <a:off x="6172200" y="2505240"/>
-            <a:ext cx="5182920" cy="3684240"/>
-          </a:xfrm>
-          <a:prstGeom prst="rect">
-            <a:avLst/>
-          </a:prstGeom>
-          <a:noFill/>
-          <a:ln w="0">
-            <a:noFill/>
-          </a:ln>
-        </p:spPr>
-        <p:txBody>
-          <a:bodyPr lIns="91440" rIns="91440" tIns="45720" bIns="45720" anchor="t">
-            <a:noAutofit/>
-          </a:bodyPr>
-          <a:p>
-            <a:pPr marL="228600" indent="-228600" defTabSz="914400">
-              <a:lnSpc>
-                <a:spcPct val="90000"/>
-              </a:lnSpc>
-              <a:spcBef>
-                <a:spcPts val="1001"/>
-              </a:spcBef>
-              <a:buClr>
-                <a:srgbClr val="000000"/>
-              </a:buClr>
-              <a:buFont typeface="Arial"/>
-              <a:buChar char="•"/>
-            </a:pPr>
-            <a:r>
-              <a:rPr b="0" lang="en-US" sz="2800" spc="-1" strike="noStrike">
-                <a:solidFill>
-                  <a:schemeClr val="dk1"/>
-                </a:solidFill>
-                <a:latin typeface="Calibri"/>
-              </a:rPr>
-              <a:t>Click to edit Master text styles</a:t>
-            </a:r>
-            <a:endParaRPr b="0" lang="en-US" sz="2800" spc="-1" strike="noStrike">
-              <a:solidFill>
-                <a:schemeClr val="dk1"/>
-              </a:solidFill>
-              <a:latin typeface="Calibri"/>
-            </a:endParaRPr>
-          </a:p>
-          <a:p>
-            <a:pPr lvl="1" marL="685800" indent="-228600" defTabSz="914400">
-              <a:lnSpc>
-                <a:spcPct val="90000"/>
-              </a:lnSpc>
-              <a:spcBef>
-                <a:spcPts val="499"/>
-              </a:spcBef>
-              <a:buClr>
-                <a:srgbClr val="000000"/>
-              </a:buClr>
-              <a:buFont typeface="Arial"/>
-              <a:buChar char="•"/>
-            </a:pPr>
-            <a:r>
-              <a:rPr b="0" lang="en-US" sz="2400" spc="-1" strike="noStrike">
-                <a:solidFill>
-                  <a:schemeClr val="dk1"/>
-                </a:solidFill>
-                <a:latin typeface="Calibri"/>
-              </a:rPr>
-              <a:t>Second level</a:t>
-            </a:r>
-            <a:endParaRPr b="0" lang="en-US" sz="2400" spc="-1" strike="noStrike">
-              <a:solidFill>
-                <a:schemeClr val="dk1"/>
-              </a:solidFill>
-              <a:latin typeface="Calibri"/>
-            </a:endParaRPr>
-          </a:p>
-          <a:p>
-            <a:pPr lvl="2" marL="1143000" indent="-228600" defTabSz="914400">
-              <a:lnSpc>
-                <a:spcPct val="90000"/>
-              </a:lnSpc>
-              <a:spcBef>
-                <a:spcPts val="499"/>
-              </a:spcBef>
-              <a:buClr>
-                <a:srgbClr val="000000"/>
-              </a:buClr>
-              <a:buFont typeface="Arial"/>
-              <a:buChar char="•"/>
-            </a:pPr>
-            <a:r>
-              <a:rPr b="0" lang="en-US" sz="2000" spc="-1" strike="noStrike">
-                <a:solidFill>
-                  <a:schemeClr val="dk1"/>
-                </a:solidFill>
-                <a:latin typeface="Calibri"/>
-              </a:rPr>
-              <a:t>Third level</a:t>
-            </a:r>
-            <a:endParaRPr b="0" lang="en-US" sz="2000" spc="-1" strike="noStrike">
-              <a:solidFill>
-                <a:schemeClr val="dk1"/>
-              </a:solidFill>
-              <a:latin typeface="Calibri"/>
-            </a:endParaRPr>
-          </a:p>
-          <a:p>
-            <a:pPr lvl="3" marL="1600200" indent="-228600" defTabSz="914400">
-              <a:lnSpc>
-                <a:spcPct val="90000"/>
-              </a:lnSpc>
-              <a:spcBef>
-                <a:spcPts val="499"/>
-              </a:spcBef>
-              <a:buClr>
-                <a:srgbClr val="000000"/>
-              </a:buClr>
-              <a:buFont typeface="Arial"/>
-              <a:buChar char="•"/>
-            </a:pPr>
-            <a:r>
-              <a:rPr b="0" lang="en-US" sz="1800" spc="-1" strike="noStrike">
-                <a:solidFill>
-                  <a:schemeClr val="dk1"/>
-                </a:solidFill>
-                <a:latin typeface="Calibri"/>
-              </a:rPr>
-              <a:t>Fourth level</a:t>
-            </a:r>
-            <a:endParaRPr b="0" lang="en-US" sz="1800" spc="-1" strike="noStrike">
-              <a:solidFill>
-                <a:schemeClr val="dk1"/>
-              </a:solidFill>
-              <a:latin typeface="Calibri"/>
-            </a:endParaRPr>
-          </a:p>
-          <a:p>
-            <a:pPr lvl="4" marL="2057400" indent="-228600" defTabSz="914400">
-              <a:lnSpc>
-                <a:spcPct val="90000"/>
-              </a:lnSpc>
-              <a:spcBef>
-                <a:spcPts val="499"/>
-              </a:spcBef>
-              <a:buClr>
-                <a:srgbClr val="000000"/>
-              </a:buClr>
-              <a:buFont typeface="Arial"/>
-              <a:buChar char="•"/>
-            </a:pPr>
-            <a:r>
-              <a:rPr b="0" lang="en-US" sz="1800" spc="-1" strike="noStrike">
-                <a:solidFill>
-                  <a:schemeClr val="dk1"/>
-                </a:solidFill>
-                <a:latin typeface="Calibri"/>
-              </a:rPr>
-              <a:t>Fifth level</a:t>
-            </a:r>
-            <a:endParaRPr b="0" lang="en-US" sz="1800" spc="-1" strike="noStrike">
-              <a:solidFill>
-                <a:schemeClr val="dk1"/>
-              </a:solidFill>
-              <a:latin typeface="Calibri"/>
-            </a:endParaRPr>
-          </a:p>
-        </p:txBody>
-      </p:sp>
-      <p:sp>
-        <p:nvSpPr>
-          <p:cNvPr id="43" name="PlaceHolder 6"/>
-          <p:cNvSpPr>
-            <a:spLocks noGrp="1"/>
-          </p:cNvSpPr>
-          <p:nvPr>
-            <p:ph type="dt" idx="19"/>
-          </p:nvPr>
-        </p:nvSpPr>
-        <p:spPr>
-          <a:xfrm>
-            <a:off x="838080" y="6356520"/>
-            <a:ext cx="2742840" cy="364680"/>
-          </a:xfrm>
-          <a:prstGeom prst="rect">
-            <a:avLst/>
-          </a:prstGeom>
-          <a:noFill/>
-          <a:ln w="0">
-            <a:noFill/>
-          </a:ln>
-        </p:spPr>
-        <p:txBody>
-          <a:bodyPr lIns="91440" rIns="91440" tIns="45720" bIns="45720" anchor="ctr">
-            <a:noAutofit/>
-          </a:bodyPr>
-          <a:lstStyle>
-            <a:lvl1pPr indent="0" defTabSz="914400">
-              <a:lnSpc>
-                <a:spcPct val="100000"/>
-              </a:lnSpc>
-              <a:buNone/>
-              <a:defRPr b="0" lang="en-US" sz="1200" spc="-1" strike="noStrike">
-                <a:solidFill>
-                  <a:schemeClr val="dk1">
-                    <a:tint val="75000"/>
-                  </a:schemeClr>
-                </a:solidFill>
-                <a:latin typeface="Calibri"/>
-              </a:defRPr>
-            </a:lvl1pPr>
-          </a:lstStyle>
-          <a:p>
-            <a:pPr indent="0" defTabSz="914400">
-              <a:lnSpc>
-                <a:spcPct val="100000"/>
-              </a:lnSpc>
-              <a:buNone/>
-            </a:pPr>
-            <a:r>
-              <a:rPr b="0" lang="en-US" sz="1200" spc="-1" strike="noStrike">
-                <a:solidFill>
-                  <a:schemeClr val="dk1">
-                    <a:tint val="75000"/>
-                  </a:schemeClr>
-                </a:solidFill>
-                <a:latin typeface="Calibri"/>
-              </a:rPr>
-              <a:t>&lt;date/time&gt;</a:t>
-            </a:r>
-            <a:endParaRPr b="0" lang="en-US" sz="1200" spc="-1" strike="noStrike">
-              <a:solidFill>
-                <a:srgbClr val="000000"/>
-              </a:solidFill>
-              <a:latin typeface="Times New Roman"/>
-            </a:endParaRPr>
-          </a:p>
-        </p:txBody>
-      </p:sp>
-      <p:sp>
-        <p:nvSpPr>
-          <p:cNvPr id="44" name="PlaceHolder 7"/>
-          <p:cNvSpPr>
-            <a:spLocks noGrp="1"/>
-          </p:cNvSpPr>
-          <p:nvPr>
-            <p:ph type="ftr" idx="20"/>
+            <p:ph type="ftr" idx="19"/>
           </p:nvPr>
         </p:nvSpPr>
         <p:spPr>
           <a:xfrm>
             <a:off x="4038480" y="6356520"/>
-            <a:ext cx="4114440" cy="364680"/>
+            <a:ext cx="4113720" cy="363960"/>
           </a:xfrm>
           <a:prstGeom prst="rect">
             <a:avLst/>
@@ -5967,7 +4314,13 @@
           </a:bodyPr>
           <a:lstStyle>
             <a:lvl1pPr indent="0" algn="ctr">
+              <a:lnSpc>
+                <a:spcPct val="100000"/>
+              </a:lnSpc>
               <a:buNone/>
+              <a:tabLst>
+                <a:tab algn="l" pos="0"/>
+              </a:tabLst>
               <a:defRPr b="0" lang="en-US" sz="1400" spc="-1" strike="noStrike">
                 <a:solidFill>
                   <a:srgbClr val="000000"/>
@@ -5978,7 +4331,13 @@
           </a:lstStyle>
           <a:p>
             <a:pPr indent="0" algn="ctr">
+              <a:lnSpc>
+                <a:spcPct val="100000"/>
+              </a:lnSpc>
               <a:buNone/>
+              <a:tabLst>
+                <a:tab algn="l" pos="0"/>
+              </a:tabLst>
             </a:pPr>
             <a:r>
               <a:rPr b="0" lang="en-US" sz="1400" spc="-1" strike="noStrike">
@@ -6000,18 +4359,18 @@
       </p:sp>
       <p:sp>
         <p:nvSpPr>
-          <p:cNvPr id="45" name="PlaceHolder 8"/>
+          <p:cNvPr id="33" name="PlaceHolder 2"/>
           <p:cNvSpPr>
             <a:spLocks noGrp="1"/>
           </p:cNvSpPr>
           <p:nvPr>
-            <p:ph type="sldNum" idx="21"/>
+            <p:ph type="sldNum" idx="20"/>
           </p:nvPr>
         </p:nvSpPr>
         <p:spPr>
           <a:xfrm>
             <a:off x="8610480" y="6356520"/>
-            <a:ext cx="2742840" cy="364680"/>
+            <a:ext cx="2742120" cy="363960"/>
           </a:xfrm>
           <a:prstGeom prst="rect">
             <a:avLst/>
@@ -6031,6 +4390,9 @@
                 <a:spcPct val="100000"/>
               </a:lnSpc>
               <a:buNone/>
+              <a:tabLst>
+                <a:tab algn="l" pos="0"/>
+              </a:tabLst>
               <a:defRPr b="0" lang="en-US" sz="1200" spc="-1" strike="noStrike">
                 <a:solidFill>
                   <a:schemeClr val="dk1">
@@ -6047,8 +4409,11 @@
                 <a:spcPct val="100000"/>
               </a:lnSpc>
               <a:buNone/>
-            </a:pPr>
-            <a:fld id="{15727A7F-F568-4C6F-A7CA-8DE5C2A34CB4}" type="slidenum">
+              <a:tabLst>
+                <a:tab algn="l" pos="0"/>
+              </a:tabLst>
+            </a:pPr>
+            <a:fld id="{B3183156-96BE-4D46-BA0F-6EF38B4A0618}" type="slidenum">
               <a:rPr b="0" lang="en-US" sz="1200" spc="-1" strike="noStrike">
                 <a:solidFill>
                   <a:schemeClr val="dk1">
@@ -6060,6 +4425,66 @@
               <a:t>&lt;number&gt;</a:t>
             </a:fld>
             <a:endParaRPr b="0" lang="en-US" sz="1200" spc="-1" strike="noStrike">
+              <a:solidFill>
+                <a:srgbClr val="000000"/>
+              </a:solidFill>
+              <a:latin typeface="Times New Roman"/>
+            </a:endParaRPr>
+          </a:p>
+        </p:txBody>
+      </p:sp>
+      <p:sp>
+        <p:nvSpPr>
+          <p:cNvPr id="34" name="PlaceHolder 3"/>
+          <p:cNvSpPr>
+            <a:spLocks noGrp="1"/>
+          </p:cNvSpPr>
+          <p:nvPr>
+            <p:ph type="dt" idx="21"/>
+          </p:nvPr>
+        </p:nvSpPr>
+        <p:spPr>
+          <a:xfrm>
+            <a:off x="838080" y="6356520"/>
+            <a:ext cx="2742120" cy="363960"/>
+          </a:xfrm>
+          <a:prstGeom prst="rect">
+            <a:avLst/>
+          </a:prstGeom>
+          <a:noFill/>
+          <a:ln w="0">
+            <a:noFill/>
+          </a:ln>
+        </p:spPr>
+        <p:txBody>
+          <a:bodyPr lIns="91440" rIns="91440" tIns="45720" bIns="45720" anchor="ctr">
+            <a:noAutofit/>
+          </a:bodyPr>
+          <a:lstStyle>
+            <a:lvl1pPr indent="0">
+              <a:buNone/>
+              <a:defRPr b="0" lang="en-US" sz="1400" spc="-1" strike="noStrike">
+                <a:solidFill>
+                  <a:srgbClr val="000000"/>
+                </a:solidFill>
+                <a:latin typeface="Times New Roman"/>
+              </a:defRPr>
+            </a:lvl1pPr>
+          </a:lstStyle>
+          <a:p>
+            <a:pPr indent="0">
+              <a:buNone/>
+            </a:pPr>
+            <a:r>
+              <a:rPr b="0" lang="en-US" sz="1400" spc="-1" strike="noStrike">
+                <a:solidFill>
+                  <a:srgbClr val="000000"/>
+                </a:solidFill>
+                <a:latin typeface="Times New Roman"/>
+              </a:rPr>
+              <a:t>&lt;date/time&gt;</a:t>
+            </a:r>
+            <a:endParaRPr b="0" lang="en-US" sz="1400" spc="-1" strike="noStrike">
               <a:solidFill>
                 <a:srgbClr val="000000"/>
               </a:solidFill>
@@ -6103,7 +4528,7 @@
       </p:grpSpPr>
       <p:sp>
         <p:nvSpPr>
-          <p:cNvPr id="46" name="PlaceHolder 1"/>
+          <p:cNvPr id="35" name="PlaceHolder 1"/>
           <p:cNvSpPr>
             <a:spLocks noGrp="1"/>
           </p:cNvSpPr>
@@ -6114,7 +4539,7 @@
         <p:spPr>
           <a:xfrm>
             <a:off x="838080" y="365040"/>
-            <a:ext cx="10515240" cy="1325160"/>
+            <a:ext cx="10514520" cy="1324440"/>
           </a:xfrm>
           <a:prstGeom prst="rect">
             <a:avLst/>
@@ -6125,118 +4550,45 @@
           </a:ln>
         </p:spPr>
         <p:txBody>
-          <a:bodyPr lIns="91440" rIns="91440" tIns="45720" bIns="45720" anchor="ctr">
+          <a:bodyPr lIns="0" rIns="0" tIns="0" bIns="0" anchor="ctr">
             <a:noAutofit/>
           </a:bodyPr>
           <a:p>
-            <a:pPr indent="0" defTabSz="914400">
-              <a:lnSpc>
-                <a:spcPct val="90000"/>
-              </a:lnSpc>
+            <a:pPr indent="0">
               <a:buNone/>
             </a:pPr>
             <a:r>
-              <a:rPr b="0" lang="en-US" sz="4400" spc="-1" strike="noStrike">
-                <a:solidFill>
-                  <a:schemeClr val="dk1"/>
-                </a:solidFill>
-                <a:latin typeface="Calibri Light"/>
-              </a:rPr>
-              <a:t>Click to edit Master title style</a:t>
-            </a:r>
-            <a:endParaRPr b="0" lang="en-US" sz="4400" spc="-1" strike="noStrike">
-              <a:solidFill>
-                <a:schemeClr val="dk1"/>
-              </a:solidFill>
-              <a:latin typeface="Calibri"/>
+              <a:rPr b="0" lang="en-US" sz="1800" spc="-1" strike="noStrike">
+                <a:solidFill>
+                  <a:srgbClr val="000000"/>
+                </a:solidFill>
+                <a:latin typeface="Arial"/>
+              </a:rPr>
+              <a:t>Click to edit the title text format</a:t>
+            </a:r>
+            <a:endParaRPr b="0" lang="en-US" sz="1800" spc="-1" strike="noStrike">
+              <a:solidFill>
+                <a:srgbClr val="000000"/>
+              </a:solidFill>
+              <a:latin typeface="Arial"/>
             </a:endParaRPr>
           </a:p>
         </p:txBody>
       </p:sp>
       <p:sp>
         <p:nvSpPr>
-          <p:cNvPr id="47" name="PlaceHolder 2"/>
+          <p:cNvPr id="36" name="PlaceHolder 2"/>
           <p:cNvSpPr>
             <a:spLocks noGrp="1"/>
           </p:cNvSpPr>
           <p:nvPr>
-            <p:ph type="dt" idx="22"/>
-          </p:nvPr>
-        </p:nvSpPr>
-        <p:spPr>
-          <a:xfrm>
-            <a:off x="838080" y="6356520"/>
-            <a:ext cx="2742840" cy="364680"/>
-          </a:xfrm>
-          <a:prstGeom prst="rect">
-            <a:avLst/>
-          </a:prstGeom>
-          <a:noFill/>
-          <a:ln w="0">
-            <a:noFill/>
-          </a:ln>
-        </p:spPr>
-        <p:txBody>
-          <a:bodyPr lIns="91440" rIns="91440" tIns="45720" bIns="45720" anchor="ctr">
-            <a:noAutofit/>
-          </a:bodyPr>
-          <a:lstStyle>
-            <a:lvl1pPr indent="0" defTabSz="914400">
-              <a:lnSpc>
-                <a:spcPct val="100000"/>
-              </a:lnSpc>
-              <a:buNone/>
-              <a:defRPr b="0" lang="en-US" sz="1200" spc="-1" strike="noStrike">
-                <a:solidFill>
-                  <a:schemeClr val="dk1">
-                    <a:tint val="75000"/>
-                  </a:schemeClr>
-                </a:solidFill>
-                <a:latin typeface="Calibri"/>
-              </a:defRPr>
-            </a:lvl1pPr>
-          </a:lstStyle>
-          <a:p>
-            <a:pPr indent="0" defTabSz="914400">
-              <a:lnSpc>
-                <a:spcPct val="100000"/>
-              </a:lnSpc>
-              <a:buNone/>
-            </a:pPr>
-            <a:r>
-              <a:rPr b="0" lang="en-US" sz="1200" spc="-1" strike="noStrike">
-                <a:solidFill>
-                  <a:schemeClr val="dk1">
-                    <a:tint val="75000"/>
-                  </a:schemeClr>
-                </a:solidFill>
-                <a:latin typeface="Calibri"/>
-              </a:rPr>
-              <a:t>&lt;date/time&gt;</a:t>
-            </a:r>
-            <a:endParaRPr b="0" lang="en-US" sz="1200" spc="-1" strike="noStrike">
-              <a:solidFill>
-                <a:srgbClr val="000000"/>
-              </a:solidFill>
-              <a:latin typeface="Times New Roman"/>
-            </a:endParaRPr>
-          </a:p>
-        </p:txBody>
-      </p:sp>
-      <p:sp>
-        <p:nvSpPr>
-          <p:cNvPr id="48" name="PlaceHolder 3"/>
-          <p:cNvSpPr>
-            <a:spLocks noGrp="1"/>
-          </p:cNvSpPr>
-          <p:nvPr>
-            <p:ph type="ftr" idx="23"/>
+            <p:ph type="ftr" idx="22"/>
           </p:nvPr>
         </p:nvSpPr>
         <p:spPr>
           <a:xfrm>
             <a:off x="4038480" y="6356520"/>
-            <a:ext cx="4114440" cy="364680"/>
+            <a:ext cx="4113720" cy="363960"/>
           </a:xfrm>
           <a:prstGeom prst="rect">
             <a:avLst/>
@@ -6252,7 +4604,13 @@
           </a:bodyPr>
           <a:lstStyle>
             <a:lvl1pPr indent="0" algn="ctr">
+              <a:lnSpc>
+                <a:spcPct val="100000"/>
+              </a:lnSpc>
               <a:buNone/>
+              <a:tabLst>
+                <a:tab algn="l" pos="0"/>
+              </a:tabLst>
               <a:defRPr b="0" lang="en-US" sz="1400" spc="-1" strike="noStrike">
                 <a:solidFill>
                   <a:srgbClr val="000000"/>
@@ -6263,7 +4621,13 @@
           </a:lstStyle>
           <a:p>
             <a:pPr indent="0" algn="ctr">
+              <a:lnSpc>
+                <a:spcPct val="100000"/>
+              </a:lnSpc>
               <a:buNone/>
+              <a:tabLst>
+                <a:tab algn="l" pos="0"/>
+              </a:tabLst>
             </a:pPr>
             <a:r>
               <a:rPr b="0" lang="en-US" sz="1400" spc="-1" strike="noStrike">
@@ -6285,18 +4649,18 @@
       </p:sp>
       <p:sp>
         <p:nvSpPr>
-          <p:cNvPr id="49" name="PlaceHolder 4"/>
+          <p:cNvPr id="37" name="PlaceHolder 3"/>
           <p:cNvSpPr>
             <a:spLocks noGrp="1"/>
           </p:cNvSpPr>
           <p:nvPr>
-            <p:ph type="sldNum" idx="24"/>
+            <p:ph type="sldNum" idx="23"/>
           </p:nvPr>
         </p:nvSpPr>
         <p:spPr>
           <a:xfrm>
             <a:off x="8610480" y="6356520"/>
-            <a:ext cx="2742840" cy="364680"/>
+            <a:ext cx="2742120" cy="363960"/>
           </a:xfrm>
           <a:prstGeom prst="rect">
             <a:avLst/>
@@ -6316,6 +4680,9 @@
                 <a:spcPct val="100000"/>
               </a:lnSpc>
               <a:buNone/>
+              <a:tabLst>
+                <a:tab algn="l" pos="0"/>
+              </a:tabLst>
               <a:defRPr b="0" lang="en-US" sz="1200" spc="-1" strike="noStrike">
                 <a:solidFill>
                   <a:schemeClr val="dk1">
@@ -6332,8 +4699,11 @@
                 <a:spcPct val="100000"/>
               </a:lnSpc>
               <a:buNone/>
-            </a:pPr>
-            <a:fld id="{7DA437B8-314F-4563-AF0B-9A187A7C0F90}" type="slidenum">
+              <a:tabLst>
+                <a:tab algn="l" pos="0"/>
+              </a:tabLst>
+            </a:pPr>
+            <a:fld id="{CD5089B6-318B-4ED0-8486-224CAEBCD54A}" type="slidenum">
               <a:rPr b="0" lang="en-US" sz="1200" spc="-1" strike="noStrike">
                 <a:solidFill>
                   <a:schemeClr val="dk1">
@@ -6345,6 +4715,66 @@
               <a:t>&lt;number&gt;</a:t>
             </a:fld>
             <a:endParaRPr b="0" lang="en-US" sz="1200" spc="-1" strike="noStrike">
+              <a:solidFill>
+                <a:srgbClr val="000000"/>
+              </a:solidFill>
+              <a:latin typeface="Times New Roman"/>
+            </a:endParaRPr>
+          </a:p>
+        </p:txBody>
+      </p:sp>
+      <p:sp>
+        <p:nvSpPr>
+          <p:cNvPr id="38" name="PlaceHolder 4"/>
+          <p:cNvSpPr>
+            <a:spLocks noGrp="1"/>
+          </p:cNvSpPr>
+          <p:nvPr>
+            <p:ph type="dt" idx="24"/>
+          </p:nvPr>
+        </p:nvSpPr>
+        <p:spPr>
+          <a:xfrm>
+            <a:off x="838080" y="6356520"/>
+            <a:ext cx="2742120" cy="363960"/>
+          </a:xfrm>
+          <a:prstGeom prst="rect">
+            <a:avLst/>
+          </a:prstGeom>
+          <a:noFill/>
+          <a:ln w="0">
+            <a:noFill/>
+          </a:ln>
+        </p:spPr>
+        <p:txBody>
+          <a:bodyPr lIns="91440" rIns="91440" tIns="45720" bIns="45720" anchor="ctr">
+            <a:noAutofit/>
+          </a:bodyPr>
+          <a:lstStyle>
+            <a:lvl1pPr indent="0">
+              <a:buNone/>
+              <a:defRPr b="0" lang="en-US" sz="1400" spc="-1" strike="noStrike">
+                <a:solidFill>
+                  <a:srgbClr val="000000"/>
+                </a:solidFill>
+                <a:latin typeface="Times New Roman"/>
+              </a:defRPr>
+            </a:lvl1pPr>
+          </a:lstStyle>
+          <a:p>
+            <a:pPr indent="0">
+              <a:buNone/>
+            </a:pPr>
+            <a:r>
+              <a:rPr b="0" lang="en-US" sz="1400" spc="-1" strike="noStrike">
+                <a:solidFill>
+                  <a:srgbClr val="000000"/>
+                </a:solidFill>
+                <a:latin typeface="Times New Roman"/>
+              </a:rPr>
+              <a:t>&lt;date/time&gt;</a:t>
+            </a:r>
+            <a:endParaRPr b="0" lang="en-US" sz="1400" spc="-1" strike="noStrike">
               <a:solidFill>
                 <a:srgbClr val="000000"/>
               </a:solidFill>
@@ -6388,88 +4818,18 @@
       </p:grpSpPr>
       <p:sp>
         <p:nvSpPr>
-          <p:cNvPr id="51" name="PlaceHolder 1"/>
+          <p:cNvPr id="40" name="PlaceHolder 1"/>
           <p:cNvSpPr>
             <a:spLocks noGrp="1"/>
           </p:cNvSpPr>
           <p:nvPr>
-            <p:ph type="dt" idx="25"/>
-          </p:nvPr>
-        </p:nvSpPr>
-        <p:spPr>
-          <a:xfrm>
-            <a:off x="838080" y="6356520"/>
-            <a:ext cx="2742840" cy="364680"/>
-          </a:xfrm>
-          <a:prstGeom prst="rect">
-            <a:avLst/>
-          </a:prstGeom>
-          <a:noFill/>
-          <a:ln w="0">
-            <a:noFill/>
-          </a:ln>
-        </p:spPr>
-        <p:txBody>
-          <a:bodyPr lIns="91440" rIns="91440" tIns="45720" bIns="45720" anchor="ctr">
-            <a:noAutofit/>
-          </a:bodyPr>
-          <a:lstStyle>
-            <a:lvl1pPr indent="0" defTabSz="914400">
-              <a:lnSpc>
-                <a:spcPct val="100000"/>
-              </a:lnSpc>
-              <a:buNone/>
-              <a:defRPr b="0" lang="en-US" sz="1200" spc="-1" strike="noStrike">
-                <a:solidFill>
-                  <a:schemeClr val="dk1">
-                    <a:tint val="75000"/>
-                  </a:schemeClr>
-                </a:solidFill>
-                <a:latin typeface="Calibri"/>
-              </a:defRPr>
-            </a:lvl1pPr>
-          </a:lstStyle>
-          <a:p>
-            <a:pPr indent="0" defTabSz="914400">
-              <a:lnSpc>
-                <a:spcPct val="100000"/>
-              </a:lnSpc>
-              <a:buNone/>
-            </a:pPr>
-            <a:r>
-              <a:rPr b="0" lang="en-US" sz="1200" spc="-1" strike="noStrike">
-                <a:solidFill>
-                  <a:schemeClr val="dk1">
-                    <a:tint val="75000"/>
-                  </a:schemeClr>
-                </a:solidFill>
-                <a:latin typeface="Calibri"/>
-              </a:rPr>
-              <a:t>&lt;date/time&gt;</a:t>
-            </a:r>
-            <a:endParaRPr b="0" lang="en-US" sz="1200" spc="-1" strike="noStrike">
-              <a:solidFill>
-                <a:srgbClr val="000000"/>
-              </a:solidFill>
-              <a:latin typeface="Times New Roman"/>
-            </a:endParaRPr>
-          </a:p>
-        </p:txBody>
-      </p:sp>
-      <p:sp>
-        <p:nvSpPr>
-          <p:cNvPr id="52" name="PlaceHolder 2"/>
-          <p:cNvSpPr>
-            <a:spLocks noGrp="1"/>
-          </p:cNvSpPr>
-          <p:nvPr>
-            <p:ph type="ftr" idx="26"/>
+            <p:ph type="ftr" idx="25"/>
           </p:nvPr>
         </p:nvSpPr>
         <p:spPr>
           <a:xfrm>
             <a:off x="4038480" y="6356520"/>
-            <a:ext cx="4114440" cy="364680"/>
+            <a:ext cx="4113720" cy="363960"/>
           </a:xfrm>
           <a:prstGeom prst="rect">
             <a:avLst/>
@@ -6485,7 +4845,13 @@
           </a:bodyPr>
           <a:lstStyle>
             <a:lvl1pPr indent="0" algn="ctr">
+              <a:lnSpc>
+                <a:spcPct val="100000"/>
+              </a:lnSpc>
               <a:buNone/>
+              <a:tabLst>
+                <a:tab algn="l" pos="0"/>
+              </a:tabLst>
               <a:defRPr b="0" lang="en-US" sz="1400" spc="-1" strike="noStrike">
                 <a:solidFill>
                   <a:srgbClr val="000000"/>
@@ -6496,7 +4862,13 @@
           </a:lstStyle>
           <a:p>
             <a:pPr indent="0" algn="ctr">
+              <a:lnSpc>
+                <a:spcPct val="100000"/>
+              </a:lnSpc>
               <a:buNone/>
+              <a:tabLst>
+                <a:tab algn="l" pos="0"/>
+              </a:tabLst>
             </a:pPr>
             <a:r>
               <a:rPr b="0" lang="en-US" sz="1400" spc="-1" strike="noStrike">
@@ -6518,18 +4890,18 @@
       </p:sp>
       <p:sp>
         <p:nvSpPr>
-          <p:cNvPr id="53" name="PlaceHolder 3"/>
+          <p:cNvPr id="41" name="PlaceHolder 2"/>
           <p:cNvSpPr>
             <a:spLocks noGrp="1"/>
           </p:cNvSpPr>
           <p:nvPr>
-            <p:ph type="sldNum" idx="27"/>
+            <p:ph type="sldNum" idx="26"/>
           </p:nvPr>
         </p:nvSpPr>
         <p:spPr>
           <a:xfrm>
             <a:off x="8610480" y="6356520"/>
-            <a:ext cx="2742840" cy="364680"/>
+            <a:ext cx="2742120" cy="363960"/>
           </a:xfrm>
           <a:prstGeom prst="rect">
             <a:avLst/>
@@ -6549,6 +4921,9 @@
                 <a:spcPct val="100000"/>
               </a:lnSpc>
               <a:buNone/>
+              <a:tabLst>
+                <a:tab algn="l" pos="0"/>
+              </a:tabLst>
               <a:defRPr b="0" lang="en-US" sz="1200" spc="-1" strike="noStrike">
                 <a:solidFill>
                   <a:schemeClr val="dk1">
@@ -6565,8 +4940,11 @@
                 <a:spcPct val="100000"/>
               </a:lnSpc>
               <a:buNone/>
-            </a:pPr>
-            <a:fld id="{28DC55A1-E15C-434A-A977-329449E8091C}" type="slidenum">
+              <a:tabLst>
+                <a:tab algn="l" pos="0"/>
+              </a:tabLst>
+            </a:pPr>
+            <a:fld id="{C779DFE6-79BF-47FA-9795-5A47C9520A99}" type="slidenum">
               <a:rPr b="0" lang="en-US" sz="1200" spc="-1" strike="noStrike">
                 <a:solidFill>
                   <a:schemeClr val="dk1">
@@ -6578,6 +4956,66 @@
               <a:t>&lt;number&gt;</a:t>
             </a:fld>
             <a:endParaRPr b="0" lang="en-US" sz="1200" spc="-1" strike="noStrike">
+              <a:solidFill>
+                <a:srgbClr val="000000"/>
+              </a:solidFill>
+              <a:latin typeface="Times New Roman"/>
+            </a:endParaRPr>
+          </a:p>
+        </p:txBody>
+      </p:sp>
+      <p:sp>
+        <p:nvSpPr>
+          <p:cNvPr id="42" name="PlaceHolder 3"/>
+          <p:cNvSpPr>
+            <a:spLocks noGrp="1"/>
+          </p:cNvSpPr>
+          <p:nvPr>
+            <p:ph type="dt" idx="27"/>
+          </p:nvPr>
+        </p:nvSpPr>
+        <p:spPr>
+          <a:xfrm>
+            <a:off x="838080" y="6356520"/>
+            <a:ext cx="2742120" cy="363960"/>
+          </a:xfrm>
+          <a:prstGeom prst="rect">
+            <a:avLst/>
+          </a:prstGeom>
+          <a:noFill/>
+          <a:ln w="0">
+            <a:noFill/>
+          </a:ln>
+        </p:spPr>
+        <p:txBody>
+          <a:bodyPr lIns="91440" rIns="91440" tIns="45720" bIns="45720" anchor="ctr">
+            <a:noAutofit/>
+          </a:bodyPr>
+          <a:lstStyle>
+            <a:lvl1pPr indent="0">
+              <a:buNone/>
+              <a:defRPr b="0" lang="en-US" sz="1400" spc="-1" strike="noStrike">
+                <a:solidFill>
+                  <a:srgbClr val="000000"/>
+                </a:solidFill>
+                <a:latin typeface="Times New Roman"/>
+              </a:defRPr>
+            </a:lvl1pPr>
+          </a:lstStyle>
+          <a:p>
+            <a:pPr indent="0">
+              <a:buNone/>
+            </a:pPr>
+            <a:r>
+              <a:rPr b="0" lang="en-US" sz="1400" spc="-1" strike="noStrike">
+                <a:solidFill>
+                  <a:srgbClr val="000000"/>
+                </a:solidFill>
+                <a:latin typeface="Times New Roman"/>
+              </a:rPr>
+              <a:t>&lt;date/time&gt;</a:t>
+            </a:r>
+            <a:endParaRPr b="0" lang="en-US" sz="1400" spc="-1" strike="noStrike">
               <a:solidFill>
                 <a:srgbClr val="000000"/>
               </a:solidFill>
@@ -6614,7 +5052,7 @@
       </p:grpSpPr>
       <p:sp>
         <p:nvSpPr>
-          <p:cNvPr id="66" name="PlaceHolder 1"/>
+          <p:cNvPr id="49" name="PlaceHolder 1"/>
           <p:cNvSpPr>
             <a:spLocks noGrp="1"/>
           </p:cNvSpPr>
@@ -6625,7 +5063,7 @@
         <p:spPr>
           <a:xfrm>
             <a:off x="1523880" y="1122480"/>
-            <a:ext cx="9143640" cy="2387160"/>
+            <a:ext cx="9142920" cy="2386440"/>
           </a:xfrm>
           <a:prstGeom prst="rect">
             <a:avLst/>
@@ -6645,6 +5083,9 @@
                 <a:spcPct val="90000"/>
               </a:lnSpc>
               <a:buNone/>
+              <a:tabLst>
+                <a:tab algn="l" pos="0"/>
+              </a:tabLst>
             </a:pPr>
             <a:r>
               <a:rPr b="0" lang="en-US" sz="6000" spc="-1" strike="noStrike">
@@ -6657,16 +5098,16 @@
             </a:r>
             <a:endParaRPr b="0" lang="en-US" sz="6000" spc="-1" strike="noStrike">
               <a:solidFill>
-                <a:schemeClr val="dk1"/>
-              </a:solidFill>
-              <a:latin typeface="Calibri"/>
+                <a:srgbClr val="000000"/>
+              </a:solidFill>
+              <a:latin typeface="Arial"/>
             </a:endParaRPr>
           </a:p>
         </p:txBody>
       </p:sp>
       <p:sp>
         <p:nvSpPr>
-          <p:cNvPr id="67" name="PlaceHolder 2"/>
+          <p:cNvPr id="50" name="PlaceHolder 2"/>
           <p:cNvSpPr>
             <a:spLocks noGrp="1"/>
           </p:cNvSpPr>
@@ -6677,7 +5118,7 @@
         <p:spPr>
           <a:xfrm>
             <a:off x="1523880" y="3602160"/>
-            <a:ext cx="9143640" cy="1655280"/>
+            <a:ext cx="9142920" cy="1654560"/>
           </a:xfrm>
           <a:prstGeom prst="rect">
             <a:avLst/>
@@ -6754,7 +5195,7 @@
       </p:grpSpPr>
       <p:pic>
         <p:nvPicPr>
-          <p:cNvPr id="78" name="Content Placeholder 9" descr=""/>
+          <p:cNvPr id="61" name="Content Placeholder 9" descr=""/>
           <p:cNvPicPr/>
           <p:nvPr/>
         </p:nvPicPr>
@@ -6765,7 +5206,7 @@
         <p:spPr>
           <a:xfrm>
             <a:off x="384480" y="1252440"/>
-            <a:ext cx="5711400" cy="5088600"/>
+            <a:ext cx="5710680" cy="5087880"/>
           </a:xfrm>
           <a:prstGeom prst="rect">
             <a:avLst/>
@@ -6777,7 +5218,7 @@
       </p:pic>
       <p:pic>
         <p:nvPicPr>
-          <p:cNvPr id="79" name="Content Placeholder 15" descr=""/>
+          <p:cNvPr id="62" name="Content Placeholder 15" descr=""/>
           <p:cNvPicPr/>
           <p:nvPr/>
         </p:nvPicPr>
@@ -6788,7 +5229,7 @@
         <p:spPr>
           <a:xfrm>
             <a:off x="6314760" y="1669680"/>
-            <a:ext cx="5711400" cy="4253760"/>
+            <a:ext cx="5710680" cy="4253040"/>
           </a:xfrm>
           <a:prstGeom prst="rect">
             <a:avLst/>
@@ -6830,7 +5271,7 @@
       </p:grpSpPr>
       <p:sp>
         <p:nvSpPr>
-          <p:cNvPr id="80" name="PlaceHolder 1"/>
+          <p:cNvPr id="63" name="PlaceHolder 1"/>
           <p:cNvSpPr>
             <a:spLocks noGrp="1"/>
           </p:cNvSpPr>
@@ -6841,7 +5282,7 @@
         <p:spPr>
           <a:xfrm>
             <a:off x="0" y="0"/>
-            <a:ext cx="12191760" cy="6857640"/>
+            <a:ext cx="12191040" cy="6856920"/>
           </a:xfrm>
           <a:prstGeom prst="rect">
             <a:avLst/>
@@ -6880,9 +5321,9 @@
             </a:r>
             <a:endParaRPr b="0" lang="en-US" sz="2800" spc="-1" strike="noStrike">
               <a:solidFill>
-                <a:schemeClr val="dk1"/>
-              </a:solidFill>
-              <a:latin typeface="Calibri"/>
+                <a:srgbClr val="000000"/>
+              </a:solidFill>
+              <a:latin typeface="Arial"/>
             </a:endParaRPr>
           </a:p>
           <a:p>
@@ -6957,9 +5398,9 @@
             </a:r>
             <a:endParaRPr b="0" lang="en-US" sz="2800" spc="-1" strike="noStrike">
               <a:solidFill>
-                <a:schemeClr val="dk1"/>
-              </a:solidFill>
-              <a:latin typeface="Calibri"/>
+                <a:srgbClr val="000000"/>
+              </a:solidFill>
+              <a:latin typeface="Arial"/>
             </a:endParaRPr>
           </a:p>
           <a:p>
@@ -7007,9 +5448,9 @@
             </a:r>
             <a:endParaRPr b="0" lang="en-US" sz="2800" spc="-1" strike="noStrike">
               <a:solidFill>
-                <a:schemeClr val="dk1"/>
-              </a:solidFill>
-              <a:latin typeface="Calibri"/>
+                <a:srgbClr val="000000"/>
+              </a:solidFill>
+              <a:latin typeface="Arial"/>
             </a:endParaRPr>
           </a:p>
           <a:p>
@@ -7046,9 +5487,9 @@
             </a:r>
             <a:endParaRPr b="0" lang="en-US" sz="2800" spc="-1" strike="noStrike">
               <a:solidFill>
-                <a:schemeClr val="dk1"/>
-              </a:solidFill>
-              <a:latin typeface="Calibri"/>
+                <a:srgbClr val="000000"/>
+              </a:solidFill>
+              <a:latin typeface="Arial"/>
             </a:endParaRPr>
           </a:p>
           <a:p>
@@ -7076,9 +5517,9 @@
             </a:r>
             <a:endParaRPr b="0" lang="en-US" sz="2800" spc="-1" strike="noStrike">
               <a:solidFill>
-                <a:schemeClr val="dk1"/>
-              </a:solidFill>
-              <a:latin typeface="Calibri"/>
+                <a:srgbClr val="000000"/>
+              </a:solidFill>
+              <a:latin typeface="Arial"/>
             </a:endParaRPr>
           </a:p>
           <a:p>
@@ -7106,9 +5547,9 @@
             </a:r>
             <a:endParaRPr b="0" lang="en-US" sz="2800" spc="-1" strike="noStrike">
               <a:solidFill>
-                <a:schemeClr val="dk1"/>
-              </a:solidFill>
-              <a:latin typeface="Calibri"/>
+                <a:srgbClr val="000000"/>
+              </a:solidFill>
+              <a:latin typeface="Arial"/>
             </a:endParaRPr>
           </a:p>
           <a:p>
@@ -7165,9 +5606,9 @@
             </a:r>
             <a:endParaRPr b="0" lang="en-US" sz="2800" spc="-1" strike="noStrike">
               <a:solidFill>
-                <a:schemeClr val="dk1"/>
-              </a:solidFill>
-              <a:latin typeface="Calibri"/>
+                <a:srgbClr val="000000"/>
+              </a:solidFill>
+              <a:latin typeface="Arial"/>
             </a:endParaRPr>
           </a:p>
           <a:p>
@@ -7204,9 +5645,9 @@
             </a:r>
             <a:endParaRPr b="0" lang="en-US" sz="2800" spc="-1" strike="noStrike">
               <a:solidFill>
-                <a:schemeClr val="dk1"/>
-              </a:solidFill>
-              <a:latin typeface="Calibri"/>
+                <a:srgbClr val="000000"/>
+              </a:solidFill>
+              <a:latin typeface="Arial"/>
             </a:endParaRPr>
           </a:p>
           <a:p>
@@ -7252,9 +5693,9 @@
             </a:r>
             <a:endParaRPr b="0" lang="en-US" sz="2800" spc="-1" strike="noStrike">
               <a:solidFill>
-                <a:schemeClr val="dk1"/>
-              </a:solidFill>
-              <a:latin typeface="Calibri"/>
+                <a:srgbClr val="000000"/>
+              </a:solidFill>
+              <a:latin typeface="Arial"/>
             </a:endParaRPr>
           </a:p>
           <a:p>
@@ -7282,9 +5723,9 @@
             </a:r>
             <a:endParaRPr b="0" lang="en-US" sz="2800" spc="-1" strike="noStrike">
               <a:solidFill>
-                <a:schemeClr val="dk1"/>
-              </a:solidFill>
-              <a:latin typeface="Calibri"/>
+                <a:srgbClr val="000000"/>
+              </a:solidFill>
+              <a:latin typeface="Arial"/>
             </a:endParaRPr>
           </a:p>
         </p:txBody>
@@ -7321,7 +5762,7 @@
       </p:grpSpPr>
       <p:sp>
         <p:nvSpPr>
-          <p:cNvPr id="81" name="PlaceHolder 1"/>
+          <p:cNvPr id="64" name="PlaceHolder 1"/>
           <p:cNvSpPr>
             <a:spLocks noGrp="1"/>
           </p:cNvSpPr>
@@ -7331,8 +5772,8 @@
         </p:nvSpPr>
         <p:spPr>
           <a:xfrm>
-            <a:off x="0" y="0"/>
-            <a:ext cx="6019560" cy="6738480"/>
+            <a:off x="228600" y="119880"/>
+            <a:ext cx="6018840" cy="6737760"/>
           </a:xfrm>
           <a:prstGeom prst="rect">
             <a:avLst/>
@@ -7344,7 +5785,7 @@
         </p:spPr>
         <p:txBody>
           <a:bodyPr lIns="91440" rIns="91440" tIns="45720" bIns="45720" anchor="t">
-            <a:normAutofit fontScale="93550" lnSpcReduction="10000"/>
+            <a:normAutofit fontScale="93333" lnSpcReduction="10000"/>
           </a:bodyPr>
           <a:p>
             <a:pPr marL="228600" indent="-228600" defTabSz="914400">
@@ -7371,9 +5812,9 @@
             </a:r>
             <a:endParaRPr b="0" lang="en-US" sz="2800" spc="-1" strike="noStrike">
               <a:solidFill>
-                <a:schemeClr val="dk1"/>
-              </a:solidFill>
-              <a:latin typeface="Calibri"/>
+                <a:srgbClr val="000000"/>
+              </a:solidFill>
+              <a:latin typeface="Arial"/>
             </a:endParaRPr>
           </a:p>
           <a:p>
@@ -7401,9 +5842,9 @@
             </a:r>
             <a:endParaRPr b="0" lang="en-US" sz="2800" spc="-1" strike="noStrike">
               <a:solidFill>
-                <a:schemeClr val="dk1"/>
-              </a:solidFill>
-              <a:latin typeface="Calibri"/>
+                <a:srgbClr val="000000"/>
+              </a:solidFill>
+              <a:latin typeface="Arial"/>
             </a:endParaRPr>
           </a:p>
           <a:p>
@@ -7431,9 +5872,9 @@
             </a:r>
             <a:endParaRPr b="0" lang="en-US" sz="2800" spc="-1" strike="noStrike">
               <a:solidFill>
-                <a:schemeClr val="dk1"/>
-              </a:solidFill>
-              <a:latin typeface="Calibri"/>
+                <a:srgbClr val="000000"/>
+              </a:solidFill>
+              <a:latin typeface="Arial"/>
             </a:endParaRPr>
           </a:p>
           <a:p>
@@ -7445,12 +5886,15 @@
                 <a:spcPts val="1001"/>
               </a:spcBef>
               <a:buNone/>
-            </a:pPr>
-            <a:endParaRPr b="0" lang="en-US" sz="2800" spc="-1" strike="noStrike">
-              <a:solidFill>
-                <a:schemeClr val="dk1"/>
-              </a:solidFill>
-              <a:latin typeface="Calibri"/>
+              <a:tabLst>
+                <a:tab algn="l" pos="0"/>
+              </a:tabLst>
+            </a:pPr>
+            <a:endParaRPr b="0" lang="en-US" sz="2800" spc="-1" strike="noStrike">
+              <a:solidFill>
+                <a:srgbClr val="000000"/>
+              </a:solidFill>
+              <a:latin typeface="Arial"/>
             </a:endParaRPr>
           </a:p>
           <a:p>
@@ -7466,6 +5910,9 @@
               </a:buClr>
               <a:buFont typeface="Arial"/>
               <a:buChar char="•"/>
+              <a:tabLst>
+                <a:tab algn="l" pos="0"/>
+              </a:tabLst>
             </a:pPr>
             <a:r>
               <a:rPr b="0" lang="en-US" sz="2800" spc="-1" strike="noStrike">
@@ -7496,9 +5943,9 @@
             </a:r>
             <a:endParaRPr b="0" lang="en-US" sz="2800" spc="-1" strike="noStrike">
               <a:solidFill>
-                <a:schemeClr val="dk1"/>
-              </a:solidFill>
-              <a:latin typeface="Calibri"/>
+                <a:srgbClr val="000000"/>
+              </a:solidFill>
+              <a:latin typeface="Arial"/>
             </a:endParaRPr>
           </a:p>
           <a:p>
@@ -7510,12 +5957,15 @@
                 <a:spcPts val="1001"/>
               </a:spcBef>
               <a:buNone/>
-            </a:pPr>
-            <a:endParaRPr b="0" lang="en-US" sz="2800" spc="-1" strike="noStrike">
-              <a:solidFill>
-                <a:schemeClr val="dk1"/>
-              </a:solidFill>
-              <a:latin typeface="Calibri"/>
+              <a:tabLst>
+                <a:tab algn="l" pos="0"/>
+              </a:tabLst>
+            </a:pPr>
+            <a:endParaRPr b="0" lang="en-US" sz="2800" spc="-1" strike="noStrike">
+              <a:solidFill>
+                <a:srgbClr val="000000"/>
+              </a:solidFill>
+              <a:latin typeface="Arial"/>
             </a:endParaRPr>
           </a:p>
           <a:p>
@@ -7531,6 +5981,9 @@
               </a:buClr>
               <a:buFont typeface="Arial"/>
               <a:buChar char="•"/>
+              <a:tabLst>
+                <a:tab algn="l" pos="0"/>
+              </a:tabLst>
             </a:pPr>
             <a:r>
               <a:rPr b="0" lang="en-US" sz="2800" spc="-1" strike="noStrike">
@@ -7552,9 +6005,9 @@
             </a:r>
             <a:endParaRPr b="0" lang="en-US" sz="2800" spc="-1" strike="noStrike">
               <a:solidFill>
-                <a:schemeClr val="dk1"/>
-              </a:solidFill>
-              <a:latin typeface="Calibri"/>
+                <a:srgbClr val="000000"/>
+              </a:solidFill>
+              <a:latin typeface="Arial"/>
             </a:endParaRPr>
           </a:p>
           <a:p>
@@ -7566,19 +6019,22 @@
                 <a:spcPts val="1001"/>
               </a:spcBef>
               <a:buNone/>
-            </a:pPr>
-            <a:endParaRPr b="0" lang="en-US" sz="2800" spc="-1" strike="noStrike">
-              <a:solidFill>
-                <a:schemeClr val="dk1"/>
-              </a:solidFill>
-              <a:latin typeface="Calibri"/>
+              <a:tabLst>
+                <a:tab algn="l" pos="0"/>
+              </a:tabLst>
+            </a:pPr>
+            <a:endParaRPr b="0" lang="en-US" sz="2800" spc="-1" strike="noStrike">
+              <a:solidFill>
+                <a:srgbClr val="000000"/>
+              </a:solidFill>
+              <a:latin typeface="Arial"/>
             </a:endParaRPr>
           </a:p>
         </p:txBody>
       </p:sp>
       <p:pic>
         <p:nvPicPr>
-          <p:cNvPr id="82" name="Picture 2" descr="MAC Address Lookup ..."/>
+          <p:cNvPr id="65" name="Picture 2" descr="MAC Address Lookup ..."/>
           <p:cNvPicPr/>
           <p:nvPr/>
         </p:nvPicPr>
@@ -7589,7 +6045,7 @@
         <p:spPr>
           <a:xfrm>
             <a:off x="6549840" y="2425320"/>
-            <a:ext cx="4780440" cy="3219840"/>
+            <a:ext cx="4779720" cy="3219120"/>
           </a:xfrm>
           <a:prstGeom prst="rect">
             <a:avLst/>
@@ -7631,7 +6087,7 @@
       </p:grpSpPr>
       <p:sp>
         <p:nvSpPr>
-          <p:cNvPr id="83" name="PlaceHolder 1"/>
+          <p:cNvPr id="66" name="PlaceHolder 1"/>
           <p:cNvSpPr>
             <a:spLocks noGrp="1"/>
           </p:cNvSpPr>
@@ -7642,7 +6098,7 @@
         <p:spPr>
           <a:xfrm>
             <a:off x="0" y="0"/>
-            <a:ext cx="12191760" cy="6778080"/>
+            <a:ext cx="12191040" cy="6777360"/>
           </a:xfrm>
           <a:prstGeom prst="rect">
             <a:avLst/>
@@ -7690,9 +6146,9 @@
             </a:r>
             <a:endParaRPr b="0" lang="en-US" sz="2800" spc="-1" strike="noStrike">
               <a:solidFill>
-                <a:schemeClr val="dk1"/>
-              </a:solidFill>
-              <a:latin typeface="Calibri"/>
+                <a:srgbClr val="000000"/>
+              </a:solidFill>
+              <a:latin typeface="Arial"/>
             </a:endParaRPr>
           </a:p>
           <a:p>
@@ -7722,9 +6178,9 @@
             </a:r>
             <a:endParaRPr b="0" lang="en-US" sz="2800" spc="-1" strike="noStrike">
               <a:solidFill>
-                <a:schemeClr val="dk1"/>
-              </a:solidFill>
-              <a:latin typeface="Calibri"/>
+                <a:srgbClr val="000000"/>
+              </a:solidFill>
+              <a:latin typeface="Arial"/>
             </a:endParaRPr>
           </a:p>
           <a:p>
@@ -7742,9 +6198,9 @@
             </a:pPr>
             <a:endParaRPr b="0" lang="en-US" sz="2800" spc="-1" strike="noStrike">
               <a:solidFill>
-                <a:schemeClr val="dk1"/>
-              </a:solidFill>
-              <a:latin typeface="Calibri"/>
+                <a:srgbClr val="000000"/>
+              </a:solidFill>
+              <a:latin typeface="Arial"/>
             </a:endParaRPr>
           </a:p>
           <a:p>
@@ -7784,9 +6240,9 @@
             </a:r>
             <a:endParaRPr b="0" lang="en-US" sz="2800" spc="-1" strike="noStrike">
               <a:solidFill>
-                <a:schemeClr val="dk1"/>
-              </a:solidFill>
-              <a:latin typeface="Calibri"/>
+                <a:srgbClr val="000000"/>
+              </a:solidFill>
+              <a:latin typeface="Arial"/>
             </a:endParaRPr>
           </a:p>
           <a:p>
@@ -7804,9 +6260,9 @@
             </a:pPr>
             <a:endParaRPr b="0" lang="en-US" sz="2800" spc="-1" strike="noStrike">
               <a:solidFill>
-                <a:schemeClr val="dk1"/>
-              </a:solidFill>
-              <a:latin typeface="Calibri"/>
+                <a:srgbClr val="000000"/>
+              </a:solidFill>
+              <a:latin typeface="Arial"/>
             </a:endParaRPr>
           </a:p>
           <a:p>
@@ -7837,9 +6293,9 @@
             </a:r>
             <a:endParaRPr b="0" lang="en-US" sz="2800" spc="-1" strike="noStrike">
               <a:solidFill>
-                <a:schemeClr val="dk1"/>
-              </a:solidFill>
-              <a:latin typeface="Calibri"/>
+                <a:srgbClr val="000000"/>
+              </a:solidFill>
+              <a:latin typeface="Arial"/>
             </a:endParaRPr>
           </a:p>
           <a:p>
@@ -7857,9 +6313,9 @@
             </a:pPr>
             <a:endParaRPr b="0" lang="en-US" sz="2800" spc="-1" strike="noStrike">
               <a:solidFill>
-                <a:schemeClr val="dk1"/>
-              </a:solidFill>
-              <a:latin typeface="Calibri"/>
+                <a:srgbClr val="000000"/>
+              </a:solidFill>
+              <a:latin typeface="Arial"/>
             </a:endParaRPr>
           </a:p>
           <a:p>
@@ -7899,9 +6355,9 @@
             </a:r>
             <a:endParaRPr b="0" lang="en-US" sz="2800" spc="-1" strike="noStrike">
               <a:solidFill>
-                <a:schemeClr val="dk1"/>
-              </a:solidFill>
-              <a:latin typeface="Calibri"/>
+                <a:srgbClr val="000000"/>
+              </a:solidFill>
+              <a:latin typeface="Arial"/>
             </a:endParaRPr>
           </a:p>
         </p:txBody>
@@ -7938,7 +6394,7 @@
       </p:grpSpPr>
       <p:sp>
         <p:nvSpPr>
-          <p:cNvPr id="84" name="PlaceHolder 1"/>
+          <p:cNvPr id="67" name="PlaceHolder 1"/>
           <p:cNvSpPr>
             <a:spLocks noGrp="1"/>
           </p:cNvSpPr>
@@ -7949,7 +6405,7 @@
         <p:spPr>
           <a:xfrm>
             <a:off x="0" y="0"/>
-            <a:ext cx="6019560" cy="6857640"/>
+            <a:ext cx="6018840" cy="6856920"/>
           </a:xfrm>
           <a:prstGeom prst="rect">
             <a:avLst/>
@@ -7961,7 +6417,7 @@
         </p:spPr>
         <p:txBody>
           <a:bodyPr lIns="91440" rIns="91440" tIns="45720" bIns="45720" anchor="t">
-            <a:normAutofit fontScale="93550" lnSpcReduction="10000"/>
+            <a:normAutofit fontScale="93333" lnSpcReduction="10000"/>
           </a:bodyPr>
           <a:p>
             <a:pPr marL="228600" indent="-228600" defTabSz="914400">
@@ -7997,9 +6453,9 @@
             </a:r>
             <a:endParaRPr b="0" lang="en-US" sz="2800" spc="-1" strike="noStrike">
               <a:solidFill>
-                <a:schemeClr val="dk1"/>
-              </a:solidFill>
-              <a:latin typeface="Calibri"/>
+                <a:srgbClr val="000000"/>
+              </a:solidFill>
+              <a:latin typeface="Arial"/>
             </a:endParaRPr>
           </a:p>
           <a:p>
@@ -8027,9 +6483,9 @@
             </a:r>
             <a:endParaRPr b="0" lang="en-US" sz="2800" spc="-1" strike="noStrike">
               <a:solidFill>
-                <a:schemeClr val="dk1"/>
-              </a:solidFill>
-              <a:latin typeface="Calibri"/>
+                <a:srgbClr val="000000"/>
+              </a:solidFill>
+              <a:latin typeface="Arial"/>
             </a:endParaRPr>
           </a:p>
           <a:p>
@@ -8041,12 +6497,15 @@
                 <a:spcPts val="1001"/>
               </a:spcBef>
               <a:buNone/>
-            </a:pPr>
-            <a:endParaRPr b="0" lang="en-US" sz="2800" spc="-1" strike="noStrike">
-              <a:solidFill>
-                <a:schemeClr val="dk1"/>
-              </a:solidFill>
-              <a:latin typeface="Calibri"/>
+              <a:tabLst>
+                <a:tab algn="l" pos="0"/>
+              </a:tabLst>
+            </a:pPr>
+            <a:endParaRPr b="0" lang="en-US" sz="2800" spc="-1" strike="noStrike">
+              <a:solidFill>
+                <a:srgbClr val="000000"/>
+              </a:solidFill>
+              <a:latin typeface="Arial"/>
             </a:endParaRPr>
           </a:p>
           <a:p>
@@ -8062,6 +6521,9 @@
               </a:buClr>
               <a:buFont typeface="Arial"/>
               <a:buChar char="•"/>
+              <a:tabLst>
+                <a:tab algn="l" pos="0"/>
+              </a:tabLst>
             </a:pPr>
             <a:r>
               <a:rPr b="0" lang="en-US" sz="2800" spc="-1" strike="noStrike">
@@ -8092,9 +6554,9 @@
             </a:r>
             <a:endParaRPr b="0" lang="en-US" sz="2800" spc="-1" strike="noStrike">
               <a:solidFill>
-                <a:schemeClr val="dk1"/>
-              </a:solidFill>
-              <a:latin typeface="Calibri"/>
+                <a:srgbClr val="000000"/>
+              </a:solidFill>
+              <a:latin typeface="Arial"/>
             </a:endParaRPr>
           </a:p>
           <a:p>
@@ -8106,12 +6568,15 @@
                 <a:spcPts val="1001"/>
               </a:spcBef>
               <a:buNone/>
-            </a:pPr>
-            <a:endParaRPr b="0" lang="en-US" sz="2800" spc="-1" strike="noStrike">
-              <a:solidFill>
-                <a:schemeClr val="dk1"/>
-              </a:solidFill>
-              <a:latin typeface="Calibri"/>
+              <a:tabLst>
+                <a:tab algn="l" pos="0"/>
+              </a:tabLst>
+            </a:pPr>
+            <a:endParaRPr b="0" lang="en-US" sz="2800" spc="-1" strike="noStrike">
+              <a:solidFill>
+                <a:srgbClr val="000000"/>
+              </a:solidFill>
+              <a:latin typeface="Arial"/>
             </a:endParaRPr>
           </a:p>
           <a:p>
@@ -8127,6 +6592,9 @@
               </a:buClr>
               <a:buFont typeface="Arial"/>
               <a:buChar char="•"/>
+              <a:tabLst>
+                <a:tab algn="l" pos="0"/>
+              </a:tabLst>
             </a:pPr>
             <a:r>
               <a:rPr b="0" i="1" lang="en-US" sz="2800" spc="-1" strike="noStrike">
@@ -8148,9 +6616,9 @@
             </a:r>
             <a:endParaRPr b="0" lang="en-US" sz="2800" spc="-1" strike="noStrike">
               <a:solidFill>
-                <a:schemeClr val="dk1"/>
-              </a:solidFill>
-              <a:latin typeface="Calibri"/>
+                <a:srgbClr val="000000"/>
+              </a:solidFill>
+              <a:latin typeface="Arial"/>
             </a:endParaRPr>
           </a:p>
           <a:p>
@@ -8162,12 +6630,15 @@
                 <a:spcPts val="1001"/>
               </a:spcBef>
               <a:buNone/>
-            </a:pPr>
-            <a:endParaRPr b="0" lang="en-US" sz="2800" spc="-1" strike="noStrike">
-              <a:solidFill>
-                <a:schemeClr val="dk1"/>
-              </a:solidFill>
-              <a:latin typeface="Calibri"/>
+              <a:tabLst>
+                <a:tab algn="l" pos="0"/>
+              </a:tabLst>
+            </a:pPr>
+            <a:endParaRPr b="0" lang="en-US" sz="2800" spc="-1" strike="noStrike">
+              <a:solidFill>
+                <a:srgbClr val="000000"/>
+              </a:solidFill>
+              <a:latin typeface="Arial"/>
             </a:endParaRPr>
           </a:p>
           <a:p>
@@ -8183,6 +6654,9 @@
               </a:buClr>
               <a:buFont typeface="Arial"/>
               <a:buChar char="•"/>
+              <a:tabLst>
+                <a:tab algn="l" pos="0"/>
+              </a:tabLst>
             </a:pPr>
             <a:r>
               <a:rPr b="0" lang="en-US" sz="2800" spc="-1" strike="noStrike">
@@ -8195,9 +6669,9 @@
             </a:r>
             <a:endParaRPr b="0" lang="en-US" sz="2800" spc="-1" strike="noStrike">
               <a:solidFill>
-                <a:schemeClr val="dk1"/>
-              </a:solidFill>
-              <a:latin typeface="Calibri"/>
+                <a:srgbClr val="000000"/>
+              </a:solidFill>
+              <a:latin typeface="Arial"/>
             </a:endParaRPr>
           </a:p>
           <a:p>
@@ -8209,22 +6683,25 @@
                 <a:spcPts val="1001"/>
               </a:spcBef>
               <a:buNone/>
+              <a:tabLst>
+                <a:tab algn="l" pos="0"/>
+              </a:tabLst>
             </a:pPr>
             <a:br>
               <a:rPr sz="2800"/>
             </a:br>
             <a:endParaRPr b="0" lang="en-US" sz="2800" spc="-1" strike="noStrike">
               <a:solidFill>
-                <a:schemeClr val="dk1"/>
-              </a:solidFill>
-              <a:latin typeface="Calibri"/>
+                <a:srgbClr val="000000"/>
+              </a:solidFill>
+              <a:latin typeface="Arial"/>
             </a:endParaRPr>
           </a:p>
         </p:txBody>
       </p:sp>
       <p:pic>
         <p:nvPicPr>
-          <p:cNvPr id="85" name="Content Placeholder 6" descr=""/>
+          <p:cNvPr id="68" name="Content Placeholder 6" descr=""/>
           <p:cNvPicPr/>
           <p:nvPr/>
         </p:nvPicPr>
@@ -8235,7 +6712,7 @@
         <p:spPr>
           <a:xfrm>
             <a:off x="6172200" y="2514600"/>
-            <a:ext cx="5654880" cy="2407320"/>
+            <a:ext cx="5654160" cy="2406600"/>
           </a:xfrm>
           <a:prstGeom prst="rect">
             <a:avLst/>
@@ -8277,7 +6754,7 @@
       </p:grpSpPr>
       <p:sp>
         <p:nvSpPr>
-          <p:cNvPr id="86" name="PlaceHolder 1"/>
+          <p:cNvPr id="69" name="PlaceHolder 1"/>
           <p:cNvSpPr>
             <a:spLocks noGrp="1"/>
           </p:cNvSpPr>
@@ -8288,7 +6765,7 @@
         <p:spPr>
           <a:xfrm>
             <a:off x="0" y="0"/>
-            <a:ext cx="12191760" cy="6857640"/>
+            <a:ext cx="12191040" cy="6856920"/>
           </a:xfrm>
           <a:prstGeom prst="rect">
             <a:avLst/>
@@ -8300,7 +6777,7 @@
         </p:spPr>
         <p:txBody>
           <a:bodyPr lIns="91440" rIns="91440" tIns="45720" bIns="45720" anchor="t">
-            <a:normAutofit fontScale="93550"/>
+            <a:normAutofit fontScale="93333"/>
           </a:bodyPr>
           <a:p>
             <a:pPr marL="228600" indent="-228600" defTabSz="914400">
@@ -8348,9 +6825,9 @@
             </a:r>
             <a:endParaRPr b="0" lang="en-US" sz="2800" spc="-1" strike="noStrike">
               <a:solidFill>
-                <a:schemeClr val="dk1"/>
-              </a:solidFill>
-              <a:latin typeface="Calibri"/>
+                <a:srgbClr val="000000"/>
+              </a:solidFill>
+              <a:latin typeface="Arial"/>
             </a:endParaRPr>
           </a:p>
           <a:p>
@@ -8387,9 +6864,9 @@
             </a:r>
             <a:endParaRPr b="0" lang="en-US" sz="2800" spc="-1" strike="noStrike">
               <a:solidFill>
-                <a:schemeClr val="dk1"/>
-              </a:solidFill>
-              <a:latin typeface="Calibri"/>
+                <a:srgbClr val="000000"/>
+              </a:solidFill>
+              <a:latin typeface="Arial"/>
             </a:endParaRPr>
           </a:p>
           <a:p>
@@ -8450,9 +6927,9 @@
             </a:r>
             <a:endParaRPr b="0" lang="en-US" sz="2800" spc="-1" strike="noStrike">
               <a:solidFill>
-                <a:schemeClr val="dk1"/>
-              </a:solidFill>
-              <a:latin typeface="Calibri"/>
+                <a:srgbClr val="000000"/>
+              </a:solidFill>
+              <a:latin typeface="Arial"/>
             </a:endParaRPr>
           </a:p>
           <a:p>
@@ -8464,12 +6941,15 @@
                 <a:spcPts val="1001"/>
               </a:spcBef>
               <a:buNone/>
-            </a:pPr>
-            <a:endParaRPr b="0" lang="en-US" sz="2800" spc="-1" strike="noStrike">
-              <a:solidFill>
-                <a:schemeClr val="dk1"/>
-              </a:solidFill>
-              <a:latin typeface="Calibri"/>
+              <a:tabLst>
+                <a:tab algn="l" pos="0"/>
+              </a:tabLst>
+            </a:pPr>
+            <a:endParaRPr b="0" lang="en-US" sz="2800" spc="-1" strike="noStrike">
+              <a:solidFill>
+                <a:srgbClr val="000000"/>
+              </a:solidFill>
+              <a:latin typeface="Arial"/>
             </a:endParaRPr>
           </a:p>
           <a:p>
@@ -8485,6 +6965,9 @@
               </a:buClr>
               <a:buFont typeface="Arial"/>
               <a:buChar char="•"/>
+              <a:tabLst>
+                <a:tab algn="l" pos="0"/>
+              </a:tabLst>
             </a:pPr>
             <a:r>
               <a:rPr b="0" lang="en-US" sz="2800" spc="-1" strike="noStrike">
@@ -8506,9 +6989,9 @@
             </a:r>
             <a:endParaRPr b="0" lang="en-US" sz="2800" spc="-1" strike="noStrike">
               <a:solidFill>
-                <a:schemeClr val="dk1"/>
-              </a:solidFill>
-              <a:latin typeface="Calibri"/>
+                <a:srgbClr val="000000"/>
+              </a:solidFill>
+              <a:latin typeface="Arial"/>
             </a:endParaRPr>
           </a:p>
         </p:txBody>
@@ -8545,7 +7028,7 @@
       </p:grpSpPr>
       <p:sp>
         <p:nvSpPr>
-          <p:cNvPr id="87" name="PlaceHolder 1"/>
+          <p:cNvPr id="70" name="PlaceHolder 1"/>
           <p:cNvSpPr>
             <a:spLocks noGrp="1"/>
           </p:cNvSpPr>
@@ -8556,7 +7039,7 @@
         <p:spPr>
           <a:xfrm>
             <a:off x="0" y="0"/>
-            <a:ext cx="6748200" cy="6788160"/>
+            <a:ext cx="6747480" cy="6787440"/>
           </a:xfrm>
           <a:prstGeom prst="rect">
             <a:avLst/>
@@ -8616,9 +7099,9 @@
             </a:r>
             <a:endParaRPr b="0" lang="en-US" sz="2800" spc="-1" strike="noStrike">
               <a:solidFill>
-                <a:schemeClr val="dk1"/>
-              </a:solidFill>
-              <a:latin typeface="Calibri"/>
+                <a:srgbClr val="000000"/>
+              </a:solidFill>
+              <a:latin typeface="Arial"/>
             </a:endParaRPr>
           </a:p>
           <a:p>
@@ -8658,16 +7141,16 @@
             </a:r>
             <a:endParaRPr b="0" lang="en-US" sz="2800" spc="-1" strike="noStrike">
               <a:solidFill>
-                <a:schemeClr val="dk1"/>
-              </a:solidFill>
-              <a:latin typeface="Calibri"/>
+                <a:srgbClr val="000000"/>
+              </a:solidFill>
+              <a:latin typeface="Arial"/>
             </a:endParaRPr>
           </a:p>
         </p:txBody>
       </p:sp>
       <p:pic>
         <p:nvPicPr>
-          <p:cNvPr id="88" name="Picture 2" descr=""/>
+          <p:cNvPr id="71" name="Picture 2" descr=""/>
           <p:cNvPicPr/>
           <p:nvPr/>
         </p:nvPicPr>
@@ -8678,7 +7161,7 @@
         <p:spPr>
           <a:xfrm>
             <a:off x="6907680" y="2599560"/>
-            <a:ext cx="5284080" cy="2787120"/>
+            <a:ext cx="5283360" cy="2786400"/>
           </a:xfrm>
           <a:prstGeom prst="rect">
             <a:avLst/>
@@ -8720,7 +7203,7 @@
       </p:grpSpPr>
       <p:sp>
         <p:nvSpPr>
-          <p:cNvPr id="89" name="PlaceHolder 1"/>
+          <p:cNvPr id="72" name="PlaceHolder 1"/>
           <p:cNvSpPr>
             <a:spLocks noGrp="1"/>
           </p:cNvSpPr>
@@ -8731,7 +7214,7 @@
         <p:spPr>
           <a:xfrm>
             <a:off x="0" y="0"/>
-            <a:ext cx="6019560" cy="6857640"/>
+            <a:ext cx="6018840" cy="6856920"/>
           </a:xfrm>
           <a:prstGeom prst="rect">
             <a:avLst/>
@@ -8743,10 +7226,10 @@
         </p:spPr>
         <p:txBody>
           <a:bodyPr lIns="91440" rIns="91440" tIns="45720" bIns="45720" anchor="t">
-            <a:normAutofit fontScale="98906" lnSpcReduction="10000"/>
+            <a:normAutofit fontScale="96666"/>
           </a:bodyPr>
           <a:p>
-            <a:pPr defTabSz="914400">
+            <a:pPr marL="432000" indent="-324000" defTabSz="914400">
               <a:lnSpc>
                 <a:spcPct val="100000"/>
               </a:lnSpc>
@@ -8788,13 +7271,13 @@
             </a:r>
             <a:endParaRPr b="0" lang="en-US" sz="2800" spc="-1" strike="noStrike">
               <a:solidFill>
-                <a:schemeClr val="dk1"/>
-              </a:solidFill>
-              <a:latin typeface="Calibri"/>
-            </a:endParaRPr>
-          </a:p>
-          <a:p>
-            <a:pPr defTabSz="914400">
+                <a:srgbClr val="000000"/>
+              </a:solidFill>
+              <a:latin typeface="Arial"/>
+            </a:endParaRPr>
+          </a:p>
+          <a:p>
+            <a:pPr marL="432000" indent="-324000" defTabSz="914400">
               <a:lnSpc>
                 <a:spcPct val="100000"/>
               </a:lnSpc>
@@ -8836,13 +7319,13 @@
             </a:r>
             <a:endParaRPr b="0" lang="en-US" sz="2800" spc="-1" strike="noStrike">
               <a:solidFill>
-                <a:schemeClr val="dk1"/>
-              </a:solidFill>
-              <a:latin typeface="Calibri"/>
-            </a:endParaRPr>
-          </a:p>
-          <a:p>
-            <a:pPr defTabSz="914400">
+                <a:srgbClr val="000000"/>
+              </a:solidFill>
+              <a:latin typeface="Arial"/>
+            </a:endParaRPr>
+          </a:p>
+          <a:p>
+            <a:pPr marL="432000" indent="-324000" defTabSz="914400">
               <a:lnSpc>
                 <a:spcPct val="100000"/>
               </a:lnSpc>
@@ -8863,13 +7346,13 @@
             </a:r>
             <a:endParaRPr b="0" lang="en-US" sz="2800" spc="-1" strike="noStrike">
               <a:solidFill>
-                <a:schemeClr val="dk1"/>
-              </a:solidFill>
-              <a:latin typeface="Calibri"/>
-            </a:endParaRPr>
-          </a:p>
-          <a:p>
-            <a:pPr defTabSz="914400">
+                <a:srgbClr val="000000"/>
+              </a:solidFill>
+              <a:latin typeface="Arial"/>
+            </a:endParaRPr>
+          </a:p>
+          <a:p>
+            <a:pPr marL="432000" indent="-324000" defTabSz="914400">
               <a:lnSpc>
                 <a:spcPct val="100000"/>
               </a:lnSpc>
@@ -8890,13 +7373,13 @@
             </a:r>
             <a:endParaRPr b="0" lang="en-US" sz="2800" spc="-1" strike="noStrike">
               <a:solidFill>
-                <a:schemeClr val="dk1"/>
-              </a:solidFill>
-              <a:latin typeface="Calibri"/>
-            </a:endParaRPr>
-          </a:p>
-          <a:p>
-            <a:pPr defTabSz="914400">
+                <a:srgbClr val="000000"/>
+              </a:solidFill>
+              <a:latin typeface="Arial"/>
+            </a:endParaRPr>
+          </a:p>
+          <a:p>
+            <a:pPr marL="432000" indent="-324000" defTabSz="914400">
               <a:lnSpc>
                 <a:spcPct val="100000"/>
               </a:lnSpc>
@@ -8917,13 +7400,13 @@
             </a:r>
             <a:endParaRPr b="0" lang="en-US" sz="2800" spc="-1" strike="noStrike">
               <a:solidFill>
-                <a:schemeClr val="dk1"/>
-              </a:solidFill>
-              <a:latin typeface="Calibri"/>
-            </a:endParaRPr>
-          </a:p>
-          <a:p>
-            <a:pPr defTabSz="914400">
+                <a:srgbClr val="000000"/>
+              </a:solidFill>
+              <a:latin typeface="Arial"/>
+            </a:endParaRPr>
+          </a:p>
+          <a:p>
+            <a:pPr marL="432000" indent="-324000" defTabSz="914400">
               <a:lnSpc>
                 <a:spcPct val="100000"/>
               </a:lnSpc>
@@ -8944,9 +7427,9 @@
             </a:r>
             <a:endParaRPr b="0" lang="en-US" sz="2800" spc="-1" strike="noStrike">
               <a:solidFill>
-                <a:schemeClr val="dk1"/>
-              </a:solidFill>
-              <a:latin typeface="Calibri"/>
+                <a:srgbClr val="000000"/>
+              </a:solidFill>
+              <a:latin typeface="Arial"/>
             </a:endParaRPr>
           </a:p>
           <a:p>
@@ -8958,19 +7441,22 @@
                 <a:spcPts val="1001"/>
               </a:spcBef>
               <a:buNone/>
-            </a:pPr>
-            <a:endParaRPr b="0" lang="en-US" sz="2800" spc="-1" strike="noStrike">
-              <a:solidFill>
-                <a:schemeClr val="dk1"/>
-              </a:solidFill>
-              <a:latin typeface="Calibri"/>
+              <a:tabLst>
+                <a:tab algn="l" pos="0"/>
+              </a:tabLst>
+            </a:pPr>
+            <a:endParaRPr b="0" lang="en-US" sz="2800" spc="-1" strike="noStrike">
+              <a:solidFill>
+                <a:srgbClr val="000000"/>
+              </a:solidFill>
+              <a:latin typeface="Arial"/>
             </a:endParaRPr>
           </a:p>
         </p:txBody>
       </p:sp>
       <p:sp>
         <p:nvSpPr>
-          <p:cNvPr id="90" name="PlaceHolder 2"/>
+          <p:cNvPr id="73" name="PlaceHolder 2"/>
           <p:cNvSpPr>
             <a:spLocks noGrp="1"/>
           </p:cNvSpPr>
@@ -8981,7 +7467,7 @@
         <p:spPr>
           <a:xfrm>
             <a:off x="6172200" y="0"/>
-            <a:ext cx="6019560" cy="6758280"/>
+            <a:ext cx="6018840" cy="6757560"/>
           </a:xfrm>
           <a:prstGeom prst="rect">
             <a:avLst/>
@@ -9029,9 +7515,9 @@
             </a:r>
             <a:endParaRPr b="0" lang="en-US" sz="2800" spc="-1" strike="noStrike">
               <a:solidFill>
-                <a:schemeClr val="dk1"/>
-              </a:solidFill>
-              <a:latin typeface="Calibri"/>
+                <a:srgbClr val="000000"/>
+              </a:solidFill>
+              <a:latin typeface="Arial"/>
             </a:endParaRPr>
           </a:p>
           <a:p>
@@ -9062,9 +7548,9 @@
             </a:r>
             <a:endParaRPr b="0" lang="en-US" sz="2800" spc="-1" strike="noStrike">
               <a:solidFill>
-                <a:schemeClr val="dk1"/>
-              </a:solidFill>
-              <a:latin typeface="Calibri"/>
+                <a:srgbClr val="000000"/>
+              </a:solidFill>
+              <a:latin typeface="Arial"/>
             </a:endParaRPr>
           </a:p>
         </p:txBody>
@@ -9101,7 +7587,7 @@
       </p:grpSpPr>
       <p:sp>
         <p:nvSpPr>
-          <p:cNvPr id="91" name="PlaceHolder 1"/>
+          <p:cNvPr id="74" name="PlaceHolder 1"/>
           <p:cNvSpPr>
             <a:spLocks noGrp="1"/>
           </p:cNvSpPr>
@@ -9112,7 +7598,7 @@
         <p:spPr>
           <a:xfrm>
             <a:off x="0" y="0"/>
-            <a:ext cx="12191760" cy="6788160"/>
+            <a:ext cx="12191040" cy="6787440"/>
           </a:xfrm>
           <a:prstGeom prst="rect">
             <a:avLst/>
@@ -9172,9 +7658,9 @@
             </a:r>
             <a:endParaRPr b="0" lang="en-US" sz="2800" spc="-1" strike="noStrike">
               <a:solidFill>
-                <a:schemeClr val="dk1"/>
-              </a:solidFill>
-              <a:latin typeface="Calibri"/>
+                <a:srgbClr val="000000"/>
+              </a:solidFill>
+              <a:latin typeface="Arial"/>
             </a:endParaRPr>
           </a:p>
           <a:p>
@@ -9235,9 +7721,9 @@
             </a:r>
             <a:endParaRPr b="0" lang="en-US" sz="2800" spc="-1" strike="noStrike">
               <a:solidFill>
-                <a:schemeClr val="dk1"/>
-              </a:solidFill>
-              <a:latin typeface="Calibri"/>
+                <a:srgbClr val="000000"/>
+              </a:solidFill>
+              <a:latin typeface="Arial"/>
             </a:endParaRPr>
           </a:p>
           <a:p>
@@ -9298,9 +7784,9 @@
             </a:r>
             <a:endParaRPr b="0" lang="en-US" sz="2800" spc="-1" strike="noStrike">
               <a:solidFill>
-                <a:schemeClr val="dk1"/>
-              </a:solidFill>
-              <a:latin typeface="Calibri"/>
+                <a:srgbClr val="000000"/>
+              </a:solidFill>
+              <a:latin typeface="Arial"/>
             </a:endParaRPr>
           </a:p>
           <a:p>
@@ -9361,9 +7847,9 @@
             </a:r>
             <a:endParaRPr b="0" lang="en-US" sz="2800" spc="-1" strike="noStrike">
               <a:solidFill>
-                <a:schemeClr val="dk1"/>
-              </a:solidFill>
-              <a:latin typeface="Calibri"/>
+                <a:srgbClr val="000000"/>
+              </a:solidFill>
+              <a:latin typeface="Arial"/>
             </a:endParaRPr>
           </a:p>
           <a:p>
@@ -9375,12 +7861,15 @@
                 <a:spcPts val="1001"/>
               </a:spcBef>
               <a:buNone/>
-            </a:pPr>
-            <a:endParaRPr b="0" lang="en-US" sz="2800" spc="-1" strike="noStrike">
-              <a:solidFill>
-                <a:schemeClr val="dk1"/>
-              </a:solidFill>
-              <a:latin typeface="Calibri"/>
+              <a:tabLst>
+                <a:tab algn="l" pos="0"/>
+              </a:tabLst>
+            </a:pPr>
+            <a:endParaRPr b="0" lang="en-US" sz="2800" spc="-1" strike="noStrike">
+              <a:solidFill>
+                <a:srgbClr val="000000"/>
+              </a:solidFill>
+              <a:latin typeface="Arial"/>
             </a:endParaRPr>
           </a:p>
         </p:txBody>
@@ -9417,7 +7906,7 @@
       </p:grpSpPr>
       <p:sp>
         <p:nvSpPr>
-          <p:cNvPr id="92" name="PlaceHolder 1"/>
+          <p:cNvPr id="75" name="PlaceHolder 1"/>
           <p:cNvSpPr>
             <a:spLocks noGrp="1"/>
           </p:cNvSpPr>
@@ -9428,7 +7917,7 @@
         <p:spPr>
           <a:xfrm>
             <a:off x="838080" y="365040"/>
-            <a:ext cx="10515240" cy="1325160"/>
+            <a:ext cx="10514520" cy="1324440"/>
           </a:xfrm>
           <a:prstGeom prst="rect">
             <a:avLst/>
@@ -9440,7 +7929,7 @@
         </p:spPr>
         <p:txBody>
           <a:bodyPr lIns="91440" rIns="91440" tIns="45720" bIns="45720" anchor="ctr">
-            <a:normAutofit fontScale="74783" lnSpcReduction="20000"/>
+            <a:normAutofit fontScale="75000" lnSpcReduction="20000"/>
           </a:bodyPr>
           <a:p>
             <a:pPr indent="0" defTabSz="914400">
@@ -9448,6 +7937,9 @@
                 <a:spcPct val="90000"/>
               </a:lnSpc>
               <a:buNone/>
+              <a:tabLst>
+                <a:tab algn="l" pos="0"/>
+              </a:tabLst>
             </a:pPr>
             <a:r>
               <a:rPr b="1" lang="en-US" sz="4400" spc="-1" strike="noStrike">
@@ -9463,16 +7955,16 @@
             </a:br>
             <a:endParaRPr b="0" lang="en-US" sz="4400" spc="-1" strike="noStrike">
               <a:solidFill>
-                <a:schemeClr val="dk1"/>
-              </a:solidFill>
-              <a:latin typeface="Calibri"/>
+                <a:srgbClr val="000000"/>
+              </a:solidFill>
+              <a:latin typeface="Arial"/>
             </a:endParaRPr>
           </a:p>
         </p:txBody>
       </p:sp>
       <p:sp>
         <p:nvSpPr>
-          <p:cNvPr id="93" name="PlaceHolder 2"/>
+          <p:cNvPr id="76" name="PlaceHolder 2"/>
           <p:cNvSpPr>
             <a:spLocks noGrp="1"/>
           </p:cNvSpPr>
@@ -9483,7 +7975,7 @@
         <p:spPr>
           <a:xfrm>
             <a:off x="0" y="1332000"/>
-            <a:ext cx="12191760" cy="5525640"/>
+            <a:ext cx="12191040" cy="5524920"/>
           </a:xfrm>
           <a:prstGeom prst="rect">
             <a:avLst/>
@@ -9522,9 +8014,9 @@
             </a:r>
             <a:endParaRPr b="0" lang="en-US" sz="2800" spc="-1" strike="noStrike">
               <a:solidFill>
-                <a:schemeClr val="dk1"/>
-              </a:solidFill>
-              <a:latin typeface="Calibri"/>
+                <a:srgbClr val="000000"/>
+              </a:solidFill>
+              <a:latin typeface="Arial"/>
             </a:endParaRPr>
           </a:p>
           <a:p>
@@ -9561,9 +8053,9 @@
             </a:r>
             <a:endParaRPr b="0" lang="en-US" sz="2800" spc="-1" strike="noStrike">
               <a:solidFill>
-                <a:schemeClr val="dk1"/>
-              </a:solidFill>
-              <a:latin typeface="Calibri"/>
+                <a:srgbClr val="000000"/>
+              </a:solidFill>
+              <a:latin typeface="Arial"/>
             </a:endParaRPr>
           </a:p>
           <a:p>
@@ -9575,12 +8067,15 @@
                 <a:spcPts val="1001"/>
               </a:spcBef>
               <a:buNone/>
-            </a:pPr>
-            <a:endParaRPr b="0" lang="en-US" sz="2800" spc="-1" strike="noStrike">
-              <a:solidFill>
-                <a:schemeClr val="dk1"/>
-              </a:solidFill>
-              <a:latin typeface="Calibri"/>
+              <a:tabLst>
+                <a:tab algn="l" pos="0"/>
+              </a:tabLst>
+            </a:pPr>
+            <a:endParaRPr b="0" lang="en-US" sz="2800" spc="-1" strike="noStrike">
+              <a:solidFill>
+                <a:srgbClr val="000000"/>
+              </a:solidFill>
+              <a:latin typeface="Arial"/>
             </a:endParaRPr>
           </a:p>
           <a:p>
@@ -9596,6 +8091,9 @@
               </a:buClr>
               <a:buFont typeface="Arial"/>
               <a:buChar char="•"/>
+              <a:tabLst>
+                <a:tab algn="l" pos="0"/>
+              </a:tabLst>
             </a:pPr>
             <a:r>
               <a:rPr b="0" lang="en-US" sz="2800" spc="-1" strike="noStrike">
@@ -9608,9 +8106,9 @@
             </a:r>
             <a:endParaRPr b="0" lang="en-US" sz="2800" spc="-1" strike="noStrike">
               <a:solidFill>
-                <a:schemeClr val="dk1"/>
-              </a:solidFill>
-              <a:latin typeface="Calibri"/>
+                <a:srgbClr val="000000"/>
+              </a:solidFill>
+              <a:latin typeface="Arial"/>
             </a:endParaRPr>
           </a:p>
           <a:p>
@@ -9626,6 +8124,9 @@
               </a:buClr>
               <a:buFont typeface="Arial"/>
               <a:buChar char="•"/>
+              <a:tabLst>
+                <a:tab algn="l" pos="0"/>
+              </a:tabLst>
             </a:pPr>
             <a:r>
               <a:rPr b="0" lang="en-US" sz="2800" spc="-1" strike="noStrike">
@@ -9638,9 +8139,9 @@
             </a:r>
             <a:endParaRPr b="0" lang="en-US" sz="2800" spc="-1" strike="noStrike">
               <a:solidFill>
-                <a:schemeClr val="dk1"/>
-              </a:solidFill>
-              <a:latin typeface="Calibri"/>
+                <a:srgbClr val="000000"/>
+              </a:solidFill>
+              <a:latin typeface="Arial"/>
             </a:endParaRPr>
           </a:p>
           <a:p>
@@ -9656,6 +8157,9 @@
               </a:buClr>
               <a:buFont typeface="Arial"/>
               <a:buChar char="•"/>
+              <a:tabLst>
+                <a:tab algn="l" pos="0"/>
+              </a:tabLst>
             </a:pPr>
             <a:r>
               <a:rPr b="0" lang="en-US" sz="2800" spc="-1" strike="noStrike">
@@ -9668,9 +8172,9 @@
             </a:r>
             <a:endParaRPr b="0" lang="en-US" sz="2800" spc="-1" strike="noStrike">
               <a:solidFill>
-                <a:schemeClr val="dk1"/>
-              </a:solidFill>
-              <a:latin typeface="Calibri"/>
+                <a:srgbClr val="000000"/>
+              </a:solidFill>
+              <a:latin typeface="Arial"/>
             </a:endParaRPr>
           </a:p>
           <a:p>
@@ -9686,6 +8190,9 @@
               </a:buClr>
               <a:buFont typeface="Arial"/>
               <a:buChar char="•"/>
+              <a:tabLst>
+                <a:tab algn="l" pos="0"/>
+              </a:tabLst>
             </a:pPr>
             <a:r>
               <a:rPr b="0" lang="en-US" sz="2800" spc="-1" strike="noStrike">
@@ -9698,9 +8205,9 @@
             </a:r>
             <a:endParaRPr b="0" lang="en-US" sz="2800" spc="-1" strike="noStrike">
               <a:solidFill>
-                <a:schemeClr val="dk1"/>
-              </a:solidFill>
-              <a:latin typeface="Calibri"/>
+                <a:srgbClr val="000000"/>
+              </a:solidFill>
+              <a:latin typeface="Arial"/>
             </a:endParaRPr>
           </a:p>
           <a:p>
@@ -9712,12 +8219,15 @@
                 <a:spcPts val="1001"/>
               </a:spcBef>
               <a:buNone/>
-            </a:pPr>
-            <a:endParaRPr b="0" lang="en-US" sz="2800" spc="-1" strike="noStrike">
-              <a:solidFill>
-                <a:schemeClr val="dk1"/>
-              </a:solidFill>
-              <a:latin typeface="Calibri"/>
+              <a:tabLst>
+                <a:tab algn="l" pos="0"/>
+              </a:tabLst>
+            </a:pPr>
+            <a:endParaRPr b="0" lang="en-US" sz="2800" spc="-1" strike="noStrike">
+              <a:solidFill>
+                <a:srgbClr val="000000"/>
+              </a:solidFill>
+              <a:latin typeface="Arial"/>
             </a:endParaRPr>
           </a:p>
         </p:txBody>
@@ -9754,7 +8264,7 @@
       </p:grpSpPr>
       <p:sp>
         <p:nvSpPr>
-          <p:cNvPr id="68" name="PlaceHolder 1"/>
+          <p:cNvPr id="51" name="PlaceHolder 1"/>
           <p:cNvSpPr>
             <a:spLocks noGrp="1"/>
           </p:cNvSpPr>
@@ -9765,7 +8275,7 @@
         <p:spPr>
           <a:xfrm>
             <a:off x="0" y="0"/>
-            <a:ext cx="12191760" cy="6857640"/>
+            <a:ext cx="12191040" cy="6856920"/>
           </a:xfrm>
           <a:prstGeom prst="rect">
             <a:avLst/>
@@ -9806,9 +8316,9 @@
             </a:br>
             <a:endParaRPr b="0" lang="en-US" sz="2800" spc="-1" strike="noStrike">
               <a:solidFill>
-                <a:schemeClr val="dk1"/>
-              </a:solidFill>
-              <a:latin typeface="Calibri"/>
+                <a:srgbClr val="000000"/>
+              </a:solidFill>
+              <a:latin typeface="Arial"/>
             </a:endParaRPr>
           </a:p>
           <a:p>
@@ -9826,16 +8336,16 @@
             </a:pPr>
             <a:endParaRPr b="0" lang="en-US" sz="2800" spc="-1" strike="noStrike">
               <a:solidFill>
-                <a:schemeClr val="dk1"/>
-              </a:solidFill>
-              <a:latin typeface="Calibri"/>
+                <a:srgbClr val="000000"/>
+              </a:solidFill>
+              <a:latin typeface="Arial"/>
             </a:endParaRPr>
           </a:p>
         </p:txBody>
       </p:sp>
       <p:pic>
         <p:nvPicPr>
-          <p:cNvPr id="69" name="Picture 3" descr=""/>
+          <p:cNvPr id="52" name="Picture 3" descr=""/>
           <p:cNvPicPr/>
           <p:nvPr/>
         </p:nvPicPr>
@@ -9846,7 +8356,7 @@
         <p:spPr>
           <a:xfrm>
             <a:off x="198720" y="815040"/>
-            <a:ext cx="11280600" cy="4790160"/>
+            <a:ext cx="11279880" cy="4789440"/>
           </a:xfrm>
           <a:prstGeom prst="rect">
             <a:avLst/>
@@ -9888,7 +8398,7 @@
       </p:grpSpPr>
       <p:sp>
         <p:nvSpPr>
-          <p:cNvPr id="94" name="PlaceHolder 1"/>
+          <p:cNvPr id="77" name="PlaceHolder 1"/>
           <p:cNvSpPr>
             <a:spLocks noGrp="1"/>
           </p:cNvSpPr>
@@ -9899,7 +8409,7 @@
         <p:spPr>
           <a:xfrm>
             <a:off x="0" y="0"/>
-            <a:ext cx="12191760" cy="1202400"/>
+            <a:ext cx="12191040" cy="1201680"/>
           </a:xfrm>
           <a:prstGeom prst="rect">
             <a:avLst/>
@@ -9911,7 +8421,7 @@
         </p:spPr>
         <p:txBody>
           <a:bodyPr lIns="91440" rIns="91440" tIns="45720" bIns="45720" anchor="ctr">
-            <a:normAutofit fontScale="80466"/>
+            <a:normAutofit fontScale="75000" lnSpcReduction="10000"/>
           </a:bodyPr>
           <a:p>
             <a:pPr indent="0" defTabSz="914400">
@@ -9919,6 +8429,9 @@
                 <a:spcPct val="90000"/>
               </a:lnSpc>
               <a:buNone/>
+              <a:tabLst>
+                <a:tab algn="l" pos="0"/>
+              </a:tabLst>
             </a:pPr>
             <a:r>
               <a:rPr b="1" lang="en-US" sz="5300" spc="-1" strike="noStrike">
@@ -9930,20 +8443,20 @@
               <a:t>HDLC Encapsulation Protocol</a:t>
             </a:r>
             <a:br>
-              <a:rPr sz="4400"/>
+              <a:rPr sz="5300"/>
             </a:br>
             <a:endParaRPr b="0" lang="en-US" sz="5300" spc="-1" strike="noStrike">
               <a:solidFill>
-                <a:schemeClr val="dk1"/>
-              </a:solidFill>
-              <a:latin typeface="Calibri"/>
+                <a:srgbClr val="000000"/>
+              </a:solidFill>
+              <a:latin typeface="Arial"/>
             </a:endParaRPr>
           </a:p>
         </p:txBody>
       </p:sp>
       <p:sp>
         <p:nvSpPr>
-          <p:cNvPr id="95" name="PlaceHolder 2"/>
+          <p:cNvPr id="78" name="PlaceHolder 2"/>
           <p:cNvSpPr>
             <a:spLocks noGrp="1"/>
           </p:cNvSpPr>
@@ -9954,7 +8467,7 @@
         <p:spPr>
           <a:xfrm>
             <a:off x="0" y="1202760"/>
-            <a:ext cx="12191760" cy="5654880"/>
+            <a:ext cx="12191040" cy="5654160"/>
           </a:xfrm>
           <a:prstGeom prst="rect">
             <a:avLst/>
@@ -9992,9 +8505,9 @@
             </a:r>
             <a:endParaRPr b="0" lang="en-US" sz="2800" spc="-1" strike="noStrike">
               <a:solidFill>
-                <a:schemeClr val="dk1"/>
-              </a:solidFill>
-              <a:latin typeface="Calibri"/>
+                <a:srgbClr val="000000"/>
+              </a:solidFill>
+              <a:latin typeface="Arial"/>
             </a:endParaRPr>
           </a:p>
           <a:p>
@@ -10025,9 +8538,9 @@
             </a:r>
             <a:endParaRPr b="0" lang="en-US" sz="2800" spc="-1" strike="noStrike">
               <a:solidFill>
-                <a:schemeClr val="dk1"/>
-              </a:solidFill>
-              <a:latin typeface="Calibri"/>
+                <a:srgbClr val="000000"/>
+              </a:solidFill>
+              <a:latin typeface="Arial"/>
             </a:endParaRPr>
           </a:p>
           <a:p>
@@ -10067,9 +8580,9 @@
             </a:r>
             <a:endParaRPr b="0" lang="en-US" sz="2800" spc="-1" strike="noStrike">
               <a:solidFill>
-                <a:schemeClr val="dk1"/>
-              </a:solidFill>
-              <a:latin typeface="Calibri"/>
+                <a:srgbClr val="000000"/>
+              </a:solidFill>
+              <a:latin typeface="Arial"/>
             </a:endParaRPr>
           </a:p>
           <a:p>
@@ -10109,9 +8622,9 @@
             </a:r>
             <a:endParaRPr b="0" lang="en-US" sz="2800" spc="-1" strike="noStrike">
               <a:solidFill>
-                <a:schemeClr val="dk1"/>
-              </a:solidFill>
-              <a:latin typeface="Calibri"/>
+                <a:srgbClr val="000000"/>
+              </a:solidFill>
+              <a:latin typeface="Arial"/>
             </a:endParaRPr>
           </a:p>
           <a:p>
@@ -10151,9 +8664,9 @@
             </a:r>
             <a:endParaRPr b="0" lang="en-US" sz="2800" spc="-1" strike="noStrike">
               <a:solidFill>
-                <a:schemeClr val="dk1"/>
-              </a:solidFill>
-              <a:latin typeface="Calibri"/>
+                <a:srgbClr val="000000"/>
+              </a:solidFill>
+              <a:latin typeface="Arial"/>
             </a:endParaRPr>
           </a:p>
           <a:p>
@@ -10193,9 +8706,9 @@
             </a:r>
             <a:endParaRPr b="0" lang="en-US" sz="2800" spc="-1" strike="noStrike">
               <a:solidFill>
-                <a:schemeClr val="dk1"/>
-              </a:solidFill>
-              <a:latin typeface="Calibri"/>
+                <a:srgbClr val="000000"/>
+              </a:solidFill>
+              <a:latin typeface="Arial"/>
             </a:endParaRPr>
           </a:p>
           <a:p>
@@ -10235,9 +8748,9 @@
             </a:r>
             <a:endParaRPr b="0" lang="en-US" sz="2800" spc="-1" strike="noStrike">
               <a:solidFill>
-                <a:schemeClr val="dk1"/>
-              </a:solidFill>
-              <a:latin typeface="Calibri"/>
+                <a:srgbClr val="000000"/>
+              </a:solidFill>
+              <a:latin typeface="Arial"/>
             </a:endParaRPr>
           </a:p>
           <a:p>
@@ -10277,9 +8790,9 @@
             </a:r>
             <a:endParaRPr b="0" lang="en-US" sz="2800" spc="-1" strike="noStrike">
               <a:solidFill>
-                <a:schemeClr val="dk1"/>
-              </a:solidFill>
-              <a:latin typeface="Calibri"/>
+                <a:srgbClr val="000000"/>
+              </a:solidFill>
+              <a:latin typeface="Arial"/>
             </a:endParaRPr>
           </a:p>
           <a:p>
@@ -10297,9 +8810,9 @@
             </a:pPr>
             <a:endParaRPr b="0" lang="en-US" sz="2800" spc="-1" strike="noStrike">
               <a:solidFill>
-                <a:schemeClr val="dk1"/>
-              </a:solidFill>
-              <a:latin typeface="Calibri"/>
+                <a:srgbClr val="000000"/>
+              </a:solidFill>
+              <a:latin typeface="Arial"/>
             </a:endParaRPr>
           </a:p>
         </p:txBody>
@@ -10336,7 +8849,7 @@
       </p:grpSpPr>
       <p:sp>
         <p:nvSpPr>
-          <p:cNvPr id="96" name="PlaceHolder 1"/>
+          <p:cNvPr id="79" name="PlaceHolder 1"/>
           <p:cNvSpPr>
             <a:spLocks noGrp="1"/>
           </p:cNvSpPr>
@@ -10347,7 +8860,7 @@
         <p:spPr>
           <a:xfrm>
             <a:off x="0" y="0"/>
-            <a:ext cx="12191760" cy="1103040"/>
+            <a:ext cx="12191040" cy="1102320"/>
           </a:xfrm>
           <a:prstGeom prst="rect">
             <a:avLst/>
@@ -10359,7 +8872,7 @@
         </p:spPr>
         <p:txBody>
           <a:bodyPr lIns="91440" rIns="91440" tIns="45720" bIns="45720" anchor="ctr">
-            <a:normAutofit fontScale="76147"/>
+            <a:normAutofit fontScale="75000" lnSpcReduction="10000"/>
           </a:bodyPr>
           <a:p>
             <a:pPr indent="0" defTabSz="914400">
@@ -10367,6 +8880,9 @@
                 <a:spcPct val="90000"/>
               </a:lnSpc>
               <a:buNone/>
+              <a:tabLst>
+                <a:tab algn="l" pos="0"/>
+              </a:tabLst>
             </a:pPr>
             <a:r>
               <a:rPr b="1" lang="en-US" sz="4900" spc="-1" strike="noStrike">
@@ -10378,20 +8894,20 @@
               <a:t>Point-to-Point Protocol (PPP)</a:t>
             </a:r>
             <a:br>
-              <a:rPr sz="4400"/>
+              <a:rPr sz="4900"/>
             </a:br>
             <a:endParaRPr b="0" lang="en-US" sz="4900" spc="-1" strike="noStrike">
               <a:solidFill>
-                <a:schemeClr val="dk1"/>
-              </a:solidFill>
-              <a:latin typeface="Calibri"/>
+                <a:srgbClr val="000000"/>
+              </a:solidFill>
+              <a:latin typeface="Arial"/>
             </a:endParaRPr>
           </a:p>
         </p:txBody>
       </p:sp>
       <p:sp>
         <p:nvSpPr>
-          <p:cNvPr id="97" name="PlaceHolder 2"/>
+          <p:cNvPr id="80" name="PlaceHolder 2"/>
           <p:cNvSpPr>
             <a:spLocks noGrp="1"/>
           </p:cNvSpPr>
@@ -10402,7 +8918,7 @@
         <p:spPr>
           <a:xfrm>
             <a:off x="0" y="1481040"/>
-            <a:ext cx="12191760" cy="5376600"/>
+            <a:ext cx="12191040" cy="5375880"/>
           </a:xfrm>
           <a:prstGeom prst="rect">
             <a:avLst/>
@@ -10441,9 +8957,9 @@
             </a:r>
             <a:endParaRPr b="0" lang="en-US" sz="2800" spc="-1" strike="noStrike">
               <a:solidFill>
-                <a:schemeClr val="dk1"/>
-              </a:solidFill>
-              <a:latin typeface="Calibri"/>
+                <a:srgbClr val="000000"/>
+              </a:solidFill>
+              <a:latin typeface="Arial"/>
             </a:endParaRPr>
           </a:p>
           <a:p>
@@ -10471,9 +8987,9 @@
             </a:r>
             <a:endParaRPr b="0" lang="en-US" sz="2800" spc="-1" strike="noStrike">
               <a:solidFill>
-                <a:schemeClr val="dk1"/>
-              </a:solidFill>
-              <a:latin typeface="Calibri"/>
+                <a:srgbClr val="000000"/>
+              </a:solidFill>
+              <a:latin typeface="Arial"/>
             </a:endParaRPr>
           </a:p>
           <a:p>
@@ -10501,9 +9017,9 @@
             </a:r>
             <a:endParaRPr b="0" lang="en-US" sz="2800" spc="-1" strike="noStrike">
               <a:solidFill>
-                <a:schemeClr val="dk1"/>
-              </a:solidFill>
-              <a:latin typeface="Calibri"/>
+                <a:srgbClr val="000000"/>
+              </a:solidFill>
+              <a:latin typeface="Arial"/>
             </a:endParaRPr>
           </a:p>
           <a:p>
@@ -10531,9 +9047,9 @@
             </a:r>
             <a:endParaRPr b="0" lang="en-US" sz="2800" spc="-1" strike="noStrike">
               <a:solidFill>
-                <a:schemeClr val="dk1"/>
-              </a:solidFill>
-              <a:latin typeface="Calibri"/>
+                <a:srgbClr val="000000"/>
+              </a:solidFill>
+              <a:latin typeface="Arial"/>
             </a:endParaRPr>
           </a:p>
           <a:p>
@@ -10561,9 +9077,9 @@
             </a:r>
             <a:endParaRPr b="0" lang="en-US" sz="2800" spc="-1" strike="noStrike">
               <a:solidFill>
-                <a:schemeClr val="dk1"/>
-              </a:solidFill>
-              <a:latin typeface="Calibri"/>
+                <a:srgbClr val="000000"/>
+              </a:solidFill>
+              <a:latin typeface="Arial"/>
             </a:endParaRPr>
           </a:p>
           <a:p>
@@ -10591,9 +9107,9 @@
             </a:r>
             <a:endParaRPr b="0" lang="en-US" sz="2800" spc="-1" strike="noStrike">
               <a:solidFill>
-                <a:schemeClr val="dk1"/>
-              </a:solidFill>
-              <a:latin typeface="Calibri"/>
+                <a:srgbClr val="000000"/>
+              </a:solidFill>
+              <a:latin typeface="Arial"/>
             </a:endParaRPr>
           </a:p>
           <a:p>
@@ -10621,9 +9137,9 @@
             </a:r>
             <a:endParaRPr b="0" lang="en-US" sz="2800" spc="-1" strike="noStrike">
               <a:solidFill>
-                <a:schemeClr val="dk1"/>
-              </a:solidFill>
-              <a:latin typeface="Calibri"/>
+                <a:srgbClr val="000000"/>
+              </a:solidFill>
+              <a:latin typeface="Arial"/>
             </a:endParaRPr>
           </a:p>
           <a:p>
@@ -10651,9 +9167,9 @@
             </a:r>
             <a:endParaRPr b="0" lang="en-US" sz="2800" spc="-1" strike="noStrike">
               <a:solidFill>
-                <a:schemeClr val="dk1"/>
-              </a:solidFill>
-              <a:latin typeface="Calibri"/>
+                <a:srgbClr val="000000"/>
+              </a:solidFill>
+              <a:latin typeface="Arial"/>
             </a:endParaRPr>
           </a:p>
           <a:p>
@@ -10665,12 +9181,15 @@
                 <a:spcPts val="1001"/>
               </a:spcBef>
               <a:buNone/>
-            </a:pPr>
-            <a:endParaRPr b="0" lang="en-US" sz="2800" spc="-1" strike="noStrike">
-              <a:solidFill>
-                <a:schemeClr val="dk1"/>
-              </a:solidFill>
-              <a:latin typeface="Calibri"/>
+              <a:tabLst>
+                <a:tab algn="l" pos="0"/>
+              </a:tabLst>
+            </a:pPr>
+            <a:endParaRPr b="0" lang="en-US" sz="2800" spc="-1" strike="noStrike">
+              <a:solidFill>
+                <a:srgbClr val="000000"/>
+              </a:solidFill>
+              <a:latin typeface="Arial"/>
             </a:endParaRPr>
           </a:p>
         </p:txBody>
@@ -10707,7 +9226,7 @@
       </p:grpSpPr>
       <p:sp>
         <p:nvSpPr>
-          <p:cNvPr id="98" name="PlaceHolder 1"/>
+          <p:cNvPr id="81" name="PlaceHolder 1"/>
           <p:cNvSpPr>
             <a:spLocks noGrp="1"/>
           </p:cNvSpPr>
@@ -10718,7 +9237,7 @@
         <p:spPr>
           <a:xfrm>
             <a:off x="0" y="99360"/>
-            <a:ext cx="12016080" cy="924120"/>
+            <a:ext cx="12015360" cy="923400"/>
           </a:xfrm>
           <a:prstGeom prst="rect">
             <a:avLst/>
@@ -10738,6 +9257,9 @@
                 <a:spcPct val="90000"/>
               </a:lnSpc>
               <a:buNone/>
+              <a:tabLst>
+                <a:tab algn="l" pos="0"/>
+              </a:tabLst>
             </a:pPr>
             <a:r>
               <a:rPr b="0" lang="en-US" sz="4400" spc="-1" strike="noStrike">
@@ -10779,16 +9301,16 @@
             </a:r>
             <a:endParaRPr b="0" lang="en-US" sz="4400" spc="-1" strike="noStrike">
               <a:solidFill>
-                <a:schemeClr val="dk1"/>
-              </a:solidFill>
-              <a:latin typeface="Calibri"/>
+                <a:srgbClr val="000000"/>
+              </a:solidFill>
+              <a:latin typeface="Arial"/>
             </a:endParaRPr>
           </a:p>
         </p:txBody>
       </p:sp>
       <p:sp>
         <p:nvSpPr>
-          <p:cNvPr id="99" name="PlaceHolder 2"/>
+          <p:cNvPr id="82" name="PlaceHolder 2"/>
           <p:cNvSpPr>
             <a:spLocks noGrp="1"/>
           </p:cNvSpPr>
@@ -10799,7 +9321,7 @@
         <p:spPr>
           <a:xfrm>
             <a:off x="0" y="1252440"/>
-            <a:ext cx="12105360" cy="5605200"/>
+            <a:ext cx="12104640" cy="5604480"/>
           </a:xfrm>
           <a:prstGeom prst="rect">
             <a:avLst/>
@@ -10858,9 +9380,9 @@
             </a:r>
             <a:endParaRPr b="0" lang="en-US" sz="2800" spc="-1" strike="noStrike">
               <a:solidFill>
-                <a:schemeClr val="dk1"/>
-              </a:solidFill>
-              <a:latin typeface="Calibri"/>
+                <a:srgbClr val="000000"/>
+              </a:solidFill>
+              <a:latin typeface="Arial"/>
             </a:endParaRPr>
           </a:p>
           <a:p>
@@ -10872,12 +9394,15 @@
                 <a:spcPts val="1001"/>
               </a:spcBef>
               <a:buNone/>
-            </a:pPr>
-            <a:endParaRPr b="0" lang="en-US" sz="2800" spc="-1" strike="noStrike">
-              <a:solidFill>
-                <a:schemeClr val="dk1"/>
-              </a:solidFill>
-              <a:latin typeface="Calibri"/>
+              <a:tabLst>
+                <a:tab algn="l" pos="0"/>
+              </a:tabLst>
+            </a:pPr>
+            <a:endParaRPr b="0" lang="en-US" sz="2800" spc="-1" strike="noStrike">
+              <a:solidFill>
+                <a:srgbClr val="000000"/>
+              </a:solidFill>
+              <a:latin typeface="Arial"/>
             </a:endParaRPr>
           </a:p>
           <a:p>
@@ -10893,6 +9418,9 @@
               </a:buClr>
               <a:buFont typeface="Arial"/>
               <a:buChar char="•"/>
+              <a:tabLst>
+                <a:tab algn="l" pos="0"/>
+              </a:tabLst>
             </a:pPr>
             <a:r>
               <a:rPr b="0" lang="en-US" sz="2800" spc="-1" strike="noStrike">
@@ -10905,9 +9433,9 @@
             </a:r>
             <a:endParaRPr b="0" lang="en-US" sz="2800" spc="-1" strike="noStrike">
               <a:solidFill>
-                <a:schemeClr val="dk1"/>
-              </a:solidFill>
-              <a:latin typeface="Calibri"/>
+                <a:srgbClr val="000000"/>
+              </a:solidFill>
+              <a:latin typeface="Arial"/>
             </a:endParaRPr>
           </a:p>
         </p:txBody>
@@ -10944,7 +9472,7 @@
       </p:grpSpPr>
       <p:sp>
         <p:nvSpPr>
-          <p:cNvPr id="100" name="PlaceHolder 1"/>
+          <p:cNvPr id="83" name="PlaceHolder 1"/>
           <p:cNvSpPr>
             <a:spLocks noGrp="1"/>
           </p:cNvSpPr>
@@ -10955,7 +9483,7 @@
         <p:spPr>
           <a:xfrm>
             <a:off x="0" y="0"/>
-            <a:ext cx="12191760" cy="735120"/>
+            <a:ext cx="12191040" cy="734400"/>
           </a:xfrm>
           <a:prstGeom prst="rect">
             <a:avLst/>
@@ -10967,7 +9495,7 @@
         </p:spPr>
         <p:txBody>
           <a:bodyPr lIns="91440" rIns="91440" tIns="45720" bIns="45720" anchor="ctr">
-            <a:normAutofit fontScale="34095"/>
+            <a:normAutofit fontScale="33888"/>
           </a:bodyPr>
           <a:p>
             <a:pPr indent="0" defTabSz="914400">
@@ -10975,6 +9503,9 @@
                 <a:spcPct val="90000"/>
               </a:lnSpc>
               <a:buNone/>
+              <a:tabLst>
+                <a:tab algn="l" pos="0"/>
+              </a:tabLst>
             </a:pPr>
             <a:br>
               <a:rPr sz="4400"/>
@@ -10993,16 +9524,16 @@
             </a:br>
             <a:endParaRPr b="0" lang="en-US" sz="4400" spc="-1" strike="noStrike">
               <a:solidFill>
-                <a:schemeClr val="dk1"/>
-              </a:solidFill>
-              <a:latin typeface="Calibri"/>
+                <a:srgbClr val="000000"/>
+              </a:solidFill>
+              <a:latin typeface="Arial"/>
             </a:endParaRPr>
           </a:p>
         </p:txBody>
       </p:sp>
       <p:sp>
         <p:nvSpPr>
-          <p:cNvPr id="101" name="PlaceHolder 2"/>
+          <p:cNvPr id="84" name="PlaceHolder 2"/>
           <p:cNvSpPr>
             <a:spLocks noGrp="1"/>
           </p:cNvSpPr>
@@ -11013,7 +9544,7 @@
         <p:spPr>
           <a:xfrm>
             <a:off x="0" y="1103400"/>
-            <a:ext cx="12105360" cy="5664960"/>
+            <a:ext cx="12104640" cy="5664240"/>
           </a:xfrm>
           <a:prstGeom prst="rect">
             <a:avLst/>
@@ -11028,7 +9559,7 @@
             <a:normAutofit/>
           </a:bodyPr>
           <a:p>
-            <a:pPr defTabSz="914400">
+            <a:pPr marL="432000" indent="-324000" defTabSz="914400">
               <a:lnSpc>
                 <a:spcPct val="100000"/>
               </a:lnSpc>
@@ -11058,9 +9589,9 @@
             </a:r>
             <a:endParaRPr b="0" lang="en-US" sz="2800" spc="-1" strike="noStrike">
               <a:solidFill>
-                <a:schemeClr val="dk1"/>
-              </a:solidFill>
-              <a:latin typeface="Calibri"/>
+                <a:srgbClr val="000000"/>
+              </a:solidFill>
+              <a:latin typeface="Arial"/>
             </a:endParaRPr>
           </a:p>
           <a:p>
@@ -11069,16 +9600,19 @@
                 <a:spcPct val="100000"/>
               </a:lnSpc>
               <a:buNone/>
-            </a:pPr>
-            <a:endParaRPr b="0" lang="en-US" sz="2800" spc="-1" strike="noStrike">
-              <a:solidFill>
-                <a:schemeClr val="dk1"/>
-              </a:solidFill>
-              <a:latin typeface="Calibri"/>
-            </a:endParaRPr>
-          </a:p>
-          <a:p>
-            <a:pPr defTabSz="914400">
+              <a:tabLst>
+                <a:tab algn="l" pos="0"/>
+              </a:tabLst>
+            </a:pPr>
+            <a:endParaRPr b="0" lang="en-US" sz="2800" spc="-1" strike="noStrike">
+              <a:solidFill>
+                <a:srgbClr val="000000"/>
+              </a:solidFill>
+              <a:latin typeface="Arial"/>
+            </a:endParaRPr>
+          </a:p>
+          <a:p>
+            <a:pPr marL="432000" indent="-324000" defTabSz="914400">
               <a:lnSpc>
                 <a:spcPct val="100000"/>
               </a:lnSpc>
@@ -11087,6 +9621,9 @@
               </a:buClr>
               <a:buFont typeface="Symbol" charset="2"/>
               <a:buChar char=""/>
+              <a:tabLst>
+                <a:tab algn="l" pos="0"/>
+              </a:tabLst>
             </a:pPr>
             <a:r>
               <a:rPr b="1" lang="en-US" sz="2800" spc="-1" strike="noStrike">
@@ -11108,9 +9645,9 @@
             </a:r>
             <a:endParaRPr b="0" lang="en-US" sz="2800" spc="-1" strike="noStrike">
               <a:solidFill>
-                <a:schemeClr val="dk1"/>
-              </a:solidFill>
-              <a:latin typeface="Calibri"/>
+                <a:srgbClr val="000000"/>
+              </a:solidFill>
+              <a:latin typeface="Arial"/>
             </a:endParaRPr>
           </a:p>
           <a:p>
@@ -11119,16 +9656,19 @@
                 <a:spcPct val="100000"/>
               </a:lnSpc>
               <a:buNone/>
-            </a:pPr>
-            <a:endParaRPr b="0" lang="en-US" sz="2800" spc="-1" strike="noStrike">
-              <a:solidFill>
-                <a:schemeClr val="dk1"/>
-              </a:solidFill>
-              <a:latin typeface="Calibri"/>
-            </a:endParaRPr>
-          </a:p>
-          <a:p>
-            <a:pPr defTabSz="914400">
+              <a:tabLst>
+                <a:tab algn="l" pos="0"/>
+              </a:tabLst>
+            </a:pPr>
+            <a:endParaRPr b="0" lang="en-US" sz="2800" spc="-1" strike="noStrike">
+              <a:solidFill>
+                <a:srgbClr val="000000"/>
+              </a:solidFill>
+              <a:latin typeface="Arial"/>
+            </a:endParaRPr>
+          </a:p>
+          <a:p>
+            <a:pPr marL="432000" indent="-324000" defTabSz="914400">
               <a:lnSpc>
                 <a:spcPct val="100000"/>
               </a:lnSpc>
@@ -11137,6 +9677,9 @@
               </a:buClr>
               <a:buFont typeface="Symbol" charset="2"/>
               <a:buChar char=""/>
+              <a:tabLst>
+                <a:tab algn="l" pos="0"/>
+              </a:tabLst>
             </a:pPr>
             <a:r>
               <a:rPr b="1" lang="en-US" sz="2800" spc="-1" strike="noStrike">
@@ -11158,9 +9701,9 @@
             </a:r>
             <a:endParaRPr b="0" lang="en-US" sz="2800" spc="-1" strike="noStrike">
               <a:solidFill>
-                <a:schemeClr val="dk1"/>
-              </a:solidFill>
-              <a:latin typeface="Calibri"/>
+                <a:srgbClr val="000000"/>
+              </a:solidFill>
+              <a:latin typeface="Arial"/>
             </a:endParaRPr>
           </a:p>
           <a:p>
@@ -11169,16 +9712,19 @@
                 <a:spcPct val="100000"/>
               </a:lnSpc>
               <a:buNone/>
-            </a:pPr>
-            <a:endParaRPr b="0" lang="en-US" sz="2800" spc="-1" strike="noStrike">
-              <a:solidFill>
-                <a:schemeClr val="dk1"/>
-              </a:solidFill>
-              <a:latin typeface="Calibri"/>
-            </a:endParaRPr>
-          </a:p>
-          <a:p>
-            <a:pPr defTabSz="914400">
+              <a:tabLst>
+                <a:tab algn="l" pos="0"/>
+              </a:tabLst>
+            </a:pPr>
+            <a:endParaRPr b="0" lang="en-US" sz="2800" spc="-1" strike="noStrike">
+              <a:solidFill>
+                <a:srgbClr val="000000"/>
+              </a:solidFill>
+              <a:latin typeface="Arial"/>
+            </a:endParaRPr>
+          </a:p>
+          <a:p>
+            <a:pPr marL="432000" indent="-324000" defTabSz="914400">
               <a:lnSpc>
                 <a:spcPct val="100000"/>
               </a:lnSpc>
@@ -11187,6 +9733,9 @@
               </a:buClr>
               <a:buFont typeface="Symbol" charset="2"/>
               <a:buChar char=""/>
+              <a:tabLst>
+                <a:tab algn="l" pos="0"/>
+              </a:tabLst>
             </a:pPr>
             <a:r>
               <a:rPr b="1" lang="en-US" sz="2800" spc="-1" strike="noStrike">
@@ -11208,9 +9757,9 @@
             </a:r>
             <a:endParaRPr b="0" lang="en-US" sz="2800" spc="-1" strike="noStrike">
               <a:solidFill>
-                <a:schemeClr val="dk1"/>
-              </a:solidFill>
-              <a:latin typeface="Calibri"/>
+                <a:srgbClr val="000000"/>
+              </a:solidFill>
+              <a:latin typeface="Arial"/>
             </a:endParaRPr>
           </a:p>
           <a:p>
@@ -11222,128 +9771,15 @@
                 <a:spcPts val="1001"/>
               </a:spcBef>
               <a:buNone/>
-            </a:pPr>
-            <a:endParaRPr b="0" lang="en-US" sz="2800" spc="-1" strike="noStrike">
-              <a:solidFill>
-                <a:schemeClr val="dk1"/>
-              </a:solidFill>
-              <a:latin typeface="Calibri"/>
-            </a:endParaRPr>
-          </a:p>
-        </p:txBody>
-      </p:sp>
-    </p:spTree>
-  </p:cSld>
-  <mc:AlternateContent>
-    <mc:Choice Requires="p14">
-      <p:transition spd="slow" p14:dur="2000"/>
-    </mc:Choice>
-    <mc:Fallback>
-      <p:transition spd="slow"/>
-    </mc:Fallback>
-  </mc:AlternateContent>
-</p:sld>
-</file>
-
-<file path=ppt/slides/slide24.xml><?xml version="1.0" encoding="utf-8"?>
-<p:sld xmlns:a="http://schemas.openxmlformats.org/drawingml/2006/main" xmlns:p="http://schemas.openxmlformats.org/presentationml/2006/main" xmlns:r="http://schemas.openxmlformats.org/officeDocument/2006/relationships" xmlns:p14="http://schemas.microsoft.com/office/powerpoint/2010/main" xmlns:p15="http://schemas.microsoft.com/office/powerpoint/2012/main" xmlns:mc="http://schemas.openxmlformats.org/markup-compatibility/2006">
-  <p:cSld>
-    <p:spTree>
-      <p:nvGrpSpPr>
-        <p:cNvPr id="1" name=""/>
-        <p:cNvGrpSpPr/>
-        <p:nvPr/>
-      </p:nvGrpSpPr>
-      <p:grpSpPr>
-        <a:xfrm>
-          <a:off x="0" y="0"/>
-          <a:ext cx="0" cy="0"/>
-          <a:chOff x="0" y="0"/>
-          <a:chExt cx="0" cy="0"/>
-        </a:xfrm>
-      </p:grpSpPr>
-      <p:sp>
-        <p:nvSpPr>
-          <p:cNvPr id="102" name="PlaceHolder 1"/>
-          <p:cNvSpPr>
-            <a:spLocks noGrp="1"/>
-          </p:cNvSpPr>
-          <p:nvPr>
-            <p:ph type="title"/>
-          </p:nvPr>
-        </p:nvSpPr>
-        <p:spPr>
-          <a:xfrm>
-            <a:off x="838080" y="365040"/>
-            <a:ext cx="10515240" cy="1325160"/>
-          </a:xfrm>
-          <a:prstGeom prst="rect">
-            <a:avLst/>
-          </a:prstGeom>
-          <a:noFill/>
-          <a:ln w="0">
-            <a:noFill/>
-          </a:ln>
-        </p:spPr>
-        <p:txBody>
-          <a:bodyPr lIns="91440" rIns="91440" tIns="45720" bIns="45720" anchor="ctr">
-            <a:noAutofit/>
-          </a:bodyPr>
-          <a:p>
-            <a:pPr indent="0">
-              <a:buNone/>
-            </a:pPr>
-            <a:endParaRPr b="0" lang="en-US" sz="4400" spc="-1" strike="noStrike">
-              <a:solidFill>
-                <a:schemeClr val="dk1"/>
-              </a:solidFill>
-              <a:latin typeface="Calibri Light"/>
-            </a:endParaRPr>
-          </a:p>
-        </p:txBody>
-      </p:sp>
-      <p:sp>
-        <p:nvSpPr>
-          <p:cNvPr id="103" name="PlaceHolder 2"/>
-          <p:cNvSpPr>
-            <a:spLocks noGrp="1"/>
-          </p:cNvSpPr>
-          <p:nvPr>
-            <p:ph/>
-          </p:nvPr>
-        </p:nvSpPr>
-        <p:spPr>
-          <a:xfrm>
-            <a:off x="838080" y="1825560"/>
-            <a:ext cx="10515240" cy="4350960"/>
-          </a:xfrm>
-          <a:prstGeom prst="rect">
-            <a:avLst/>
-          </a:prstGeom>
-          <a:noFill/>
-          <a:ln w="0">
-            <a:noFill/>
-          </a:ln>
-        </p:spPr>
-        <p:txBody>
-          <a:bodyPr lIns="91440" rIns="91440" tIns="45720" bIns="45720" anchor="t">
-            <a:noAutofit/>
-          </a:bodyPr>
-          <a:p>
-            <a:pPr indent="0">
-              <a:lnSpc>
-                <a:spcPct val="90000"/>
-              </a:lnSpc>
-              <a:spcBef>
-                <a:spcPts val="1417"/>
-              </a:spcBef>
-              <a:buNone/>
-            </a:pPr>
-            <a:endParaRPr b="0" lang="en-US" sz="2800" spc="-1" strike="noStrike">
-              <a:solidFill>
-                <a:schemeClr val="dk1"/>
-              </a:solidFill>
-              <a:latin typeface="Calibri"/>
+              <a:tabLst>
+                <a:tab algn="l" pos="0"/>
+              </a:tabLst>
+            </a:pPr>
+            <a:endParaRPr b="0" lang="en-US" sz="2800" spc="-1" strike="noStrike">
+              <a:solidFill>
+                <a:srgbClr val="000000"/>
+              </a:solidFill>
+              <a:latin typeface="Arial"/>
             </a:endParaRPr>
           </a:p>
         </p:txBody>
@@ -11380,7 +9816,7 @@
       </p:grpSpPr>
       <p:sp>
         <p:nvSpPr>
-          <p:cNvPr id="70" name="PlaceHolder 1"/>
+          <p:cNvPr id="53" name="PlaceHolder 1"/>
           <p:cNvSpPr>
             <a:spLocks noGrp="1"/>
           </p:cNvSpPr>
@@ -11391,7 +9827,7 @@
         <p:spPr>
           <a:xfrm>
             <a:off x="0" y="0"/>
-            <a:ext cx="12191760" cy="6857640"/>
+            <a:ext cx="12191040" cy="6856920"/>
           </a:xfrm>
           <a:prstGeom prst="rect">
             <a:avLst/>
@@ -11438,9 +9874,9 @@
             </a:r>
             <a:endParaRPr b="0" lang="en-US" sz="2800" spc="-1" strike="noStrike">
               <a:solidFill>
-                <a:schemeClr val="dk1"/>
-              </a:solidFill>
-              <a:latin typeface="Calibri"/>
+                <a:srgbClr val="000000"/>
+              </a:solidFill>
+              <a:latin typeface="Arial"/>
             </a:endParaRPr>
           </a:p>
           <a:p>
@@ -11471,9 +9907,9 @@
             </a:r>
             <a:endParaRPr b="0" lang="en-US" sz="2800" spc="-1" strike="noStrike">
               <a:solidFill>
-                <a:schemeClr val="dk1"/>
-              </a:solidFill>
-              <a:latin typeface="Calibri"/>
+                <a:srgbClr val="000000"/>
+              </a:solidFill>
+              <a:latin typeface="Arial"/>
             </a:endParaRPr>
           </a:p>
           <a:p>
@@ -11491,9 +9927,9 @@
             </a:pPr>
             <a:endParaRPr b="0" lang="en-US" sz="2800" spc="-1" strike="noStrike">
               <a:solidFill>
-                <a:schemeClr val="dk1"/>
-              </a:solidFill>
-              <a:latin typeface="Calibri"/>
+                <a:srgbClr val="000000"/>
+              </a:solidFill>
+              <a:latin typeface="Arial"/>
             </a:endParaRPr>
           </a:p>
           <a:p>
@@ -11524,9 +9960,9 @@
             </a:r>
             <a:endParaRPr b="0" lang="en-US" sz="2800" spc="-1" strike="noStrike">
               <a:solidFill>
-                <a:schemeClr val="dk1"/>
-              </a:solidFill>
-              <a:latin typeface="Calibri"/>
+                <a:srgbClr val="000000"/>
+              </a:solidFill>
+              <a:latin typeface="Arial"/>
             </a:endParaRPr>
           </a:p>
           <a:p>
@@ -11544,9 +9980,9 @@
             </a:pPr>
             <a:endParaRPr b="0" lang="en-US" sz="2800" spc="-1" strike="noStrike">
               <a:solidFill>
-                <a:schemeClr val="dk1"/>
-              </a:solidFill>
-              <a:latin typeface="Calibri"/>
+                <a:srgbClr val="000000"/>
+              </a:solidFill>
+              <a:latin typeface="Arial"/>
             </a:endParaRPr>
           </a:p>
           <a:p>
@@ -11597,9 +10033,9 @@
             </a:r>
             <a:endParaRPr b="0" lang="en-US" sz="2800" spc="-1" strike="noStrike">
               <a:solidFill>
-                <a:schemeClr val="dk1"/>
-              </a:solidFill>
-              <a:latin typeface="Calibri"/>
+                <a:srgbClr val="000000"/>
+              </a:solidFill>
+              <a:latin typeface="Arial"/>
             </a:endParaRPr>
           </a:p>
           <a:p>
@@ -11617,9 +10053,9 @@
             </a:pPr>
             <a:endParaRPr b="0" lang="en-US" sz="2800" spc="-1" strike="noStrike">
               <a:solidFill>
-                <a:schemeClr val="dk1"/>
-              </a:solidFill>
-              <a:latin typeface="Calibri"/>
+                <a:srgbClr val="000000"/>
+              </a:solidFill>
+              <a:latin typeface="Arial"/>
             </a:endParaRPr>
           </a:p>
           <a:p>
@@ -11650,9 +10086,9 @@
             </a:r>
             <a:endParaRPr b="0" lang="en-US" sz="2800" spc="-1" strike="noStrike">
               <a:solidFill>
-                <a:schemeClr val="dk1"/>
-              </a:solidFill>
-              <a:latin typeface="Calibri"/>
+                <a:srgbClr val="000000"/>
+              </a:solidFill>
+              <a:latin typeface="Arial"/>
             </a:endParaRPr>
           </a:p>
           <a:p>
@@ -11670,9 +10106,9 @@
             </a:pPr>
             <a:endParaRPr b="0" lang="en-US" sz="2800" spc="-1" strike="noStrike">
               <a:solidFill>
-                <a:schemeClr val="dk1"/>
-              </a:solidFill>
-              <a:latin typeface="Calibri"/>
+                <a:srgbClr val="000000"/>
+              </a:solidFill>
+              <a:latin typeface="Arial"/>
             </a:endParaRPr>
           </a:p>
         </p:txBody>
@@ -11709,7 +10145,7 @@
       </p:grpSpPr>
       <p:sp>
         <p:nvSpPr>
-          <p:cNvPr id="71" name="PlaceHolder 1"/>
+          <p:cNvPr id="54" name="PlaceHolder 1"/>
           <p:cNvSpPr>
             <a:spLocks noGrp="1"/>
           </p:cNvSpPr>
@@ -11720,7 +10156,7 @@
         <p:spPr>
           <a:xfrm>
             <a:off x="0" y="0"/>
-            <a:ext cx="12191760" cy="6857640"/>
+            <a:ext cx="12191040" cy="6856920"/>
           </a:xfrm>
           <a:prstGeom prst="rect">
             <a:avLst/>
@@ -11758,9 +10194,9 @@
             </a:r>
             <a:endParaRPr b="0" lang="en-US" sz="2800" spc="-1" strike="noStrike">
               <a:solidFill>
-                <a:schemeClr val="dk1"/>
-              </a:solidFill>
-              <a:latin typeface="Calibri"/>
+                <a:srgbClr val="000000"/>
+              </a:solidFill>
+              <a:latin typeface="Arial"/>
             </a:endParaRPr>
           </a:p>
           <a:p>
@@ -11811,9 +10247,9 @@
             </a:r>
             <a:endParaRPr b="0" lang="en-US" sz="2800" spc="-1" strike="noStrike">
               <a:solidFill>
-                <a:schemeClr val="dk1"/>
-              </a:solidFill>
-              <a:latin typeface="Calibri"/>
+                <a:srgbClr val="000000"/>
+              </a:solidFill>
+              <a:latin typeface="Arial"/>
             </a:endParaRPr>
           </a:p>
           <a:p>
@@ -11844,9 +10280,9 @@
             </a:r>
             <a:endParaRPr b="0" lang="en-US" sz="2800" spc="-1" strike="noStrike">
               <a:solidFill>
-                <a:schemeClr val="dk1"/>
-              </a:solidFill>
-              <a:latin typeface="Calibri"/>
+                <a:srgbClr val="000000"/>
+              </a:solidFill>
+              <a:latin typeface="Arial"/>
             </a:endParaRPr>
           </a:p>
           <a:p>
@@ -11877,9 +10313,9 @@
             </a:r>
             <a:endParaRPr b="0" lang="en-US" sz="2800" spc="-1" strike="noStrike">
               <a:solidFill>
-                <a:schemeClr val="dk1"/>
-              </a:solidFill>
-              <a:latin typeface="Calibri"/>
+                <a:srgbClr val="000000"/>
+              </a:solidFill>
+              <a:latin typeface="Arial"/>
             </a:endParaRPr>
           </a:p>
           <a:p>
@@ -11897,9 +10333,9 @@
             </a:pPr>
             <a:endParaRPr b="0" lang="en-US" sz="2800" spc="-1" strike="noStrike">
               <a:solidFill>
-                <a:schemeClr val="dk1"/>
-              </a:solidFill>
-              <a:latin typeface="Calibri"/>
+                <a:srgbClr val="000000"/>
+              </a:solidFill>
+              <a:latin typeface="Arial"/>
             </a:endParaRPr>
           </a:p>
           <a:p>
@@ -11930,9 +10366,9 @@
             </a:r>
             <a:endParaRPr b="0" lang="en-US" sz="2800" spc="-1" strike="noStrike">
               <a:solidFill>
-                <a:schemeClr val="dk1"/>
-              </a:solidFill>
-              <a:latin typeface="Calibri"/>
+                <a:srgbClr val="000000"/>
+              </a:solidFill>
+              <a:latin typeface="Arial"/>
             </a:endParaRPr>
           </a:p>
           <a:p>
@@ -11950,9 +10386,9 @@
             </a:pPr>
             <a:endParaRPr b="0" lang="en-US" sz="2800" spc="-1" strike="noStrike">
               <a:solidFill>
-                <a:schemeClr val="dk1"/>
-              </a:solidFill>
-              <a:latin typeface="Calibri"/>
+                <a:srgbClr val="000000"/>
+              </a:solidFill>
+              <a:latin typeface="Arial"/>
             </a:endParaRPr>
           </a:p>
           <a:p>
@@ -11983,9 +10419,9 @@
             </a:r>
             <a:endParaRPr b="0" lang="en-US" sz="2800" spc="-1" strike="noStrike">
               <a:solidFill>
-                <a:schemeClr val="dk1"/>
-              </a:solidFill>
-              <a:latin typeface="Calibri"/>
+                <a:srgbClr val="000000"/>
+              </a:solidFill>
+              <a:latin typeface="Arial"/>
             </a:endParaRPr>
           </a:p>
           <a:p>
@@ -12003,9 +10439,9 @@
             </a:pPr>
             <a:endParaRPr b="0" lang="en-US" sz="2800" spc="-1" strike="noStrike">
               <a:solidFill>
-                <a:schemeClr val="dk1"/>
-              </a:solidFill>
-              <a:latin typeface="Calibri"/>
+                <a:srgbClr val="000000"/>
+              </a:solidFill>
+              <a:latin typeface="Arial"/>
             </a:endParaRPr>
           </a:p>
         </p:txBody>
@@ -12042,7 +10478,7 @@
       </p:grpSpPr>
       <p:sp>
         <p:nvSpPr>
-          <p:cNvPr id="72" name="PlaceHolder 1"/>
+          <p:cNvPr id="55" name="PlaceHolder 1"/>
           <p:cNvSpPr>
             <a:spLocks noGrp="1"/>
           </p:cNvSpPr>
@@ -12053,7 +10489,7 @@
         <p:spPr>
           <a:xfrm>
             <a:off x="0" y="0"/>
-            <a:ext cx="12191760" cy="6857640"/>
+            <a:ext cx="12191040" cy="6856920"/>
           </a:xfrm>
           <a:prstGeom prst="rect">
             <a:avLst/>
@@ -12092,9 +10528,9 @@
             </a:r>
             <a:endParaRPr b="0" lang="en-US" sz="2800" spc="-1" strike="noStrike">
               <a:solidFill>
-                <a:schemeClr val="dk1"/>
-              </a:solidFill>
-              <a:latin typeface="Calibri"/>
+                <a:srgbClr val="000000"/>
+              </a:solidFill>
+              <a:latin typeface="Arial"/>
             </a:endParaRPr>
           </a:p>
           <a:p>
@@ -12122,9 +10558,9 @@
             </a:r>
             <a:endParaRPr b="0" lang="en-US" sz="2800" spc="-1" strike="noStrike">
               <a:solidFill>
-                <a:schemeClr val="dk1"/>
-              </a:solidFill>
-              <a:latin typeface="Calibri"/>
+                <a:srgbClr val="000000"/>
+              </a:solidFill>
+              <a:latin typeface="Arial"/>
             </a:endParaRPr>
           </a:p>
           <a:p>
@@ -12151,9 +10587,9 @@
             </a:r>
             <a:endParaRPr b="0" lang="en-US" sz="2800" spc="-1" strike="noStrike">
               <a:solidFill>
-                <a:schemeClr val="dk1"/>
-              </a:solidFill>
-              <a:latin typeface="Calibri"/>
+                <a:srgbClr val="000000"/>
+              </a:solidFill>
+              <a:latin typeface="Arial"/>
             </a:endParaRPr>
           </a:p>
           <a:p>
@@ -12184,9 +10620,9 @@
             </a:r>
             <a:endParaRPr b="0" lang="en-US" sz="2800" spc="-1" strike="noStrike">
               <a:solidFill>
-                <a:schemeClr val="dk1"/>
-              </a:solidFill>
-              <a:latin typeface="Calibri"/>
+                <a:srgbClr val="000000"/>
+              </a:solidFill>
+              <a:latin typeface="Arial"/>
             </a:endParaRPr>
           </a:p>
           <a:p>
@@ -12217,9 +10653,9 @@
             </a:r>
             <a:endParaRPr b="0" lang="en-US" sz="2800" spc="-1" strike="noStrike">
               <a:solidFill>
-                <a:schemeClr val="dk1"/>
-              </a:solidFill>
-              <a:latin typeface="Calibri"/>
+                <a:srgbClr val="000000"/>
+              </a:solidFill>
+              <a:latin typeface="Arial"/>
             </a:endParaRPr>
           </a:p>
           <a:p>
@@ -12246,9 +10682,9 @@
             </a:r>
             <a:endParaRPr b="0" lang="en-US" sz="2800" spc="-1" strike="noStrike">
               <a:solidFill>
-                <a:schemeClr val="dk1"/>
-              </a:solidFill>
-              <a:latin typeface="Calibri"/>
+                <a:srgbClr val="000000"/>
+              </a:solidFill>
+              <a:latin typeface="Arial"/>
             </a:endParaRPr>
           </a:p>
           <a:p>
@@ -12279,9 +10715,9 @@
             </a:r>
             <a:endParaRPr b="0" lang="en-US" sz="2800" spc="-1" strike="noStrike">
               <a:solidFill>
-                <a:schemeClr val="dk1"/>
-              </a:solidFill>
-              <a:latin typeface="Calibri"/>
+                <a:srgbClr val="000000"/>
+              </a:solidFill>
+              <a:latin typeface="Arial"/>
             </a:endParaRPr>
           </a:p>
           <a:p>
@@ -12312,9 +10748,9 @@
             </a:r>
             <a:endParaRPr b="0" lang="en-US" sz="2800" spc="-1" strike="noStrike">
               <a:solidFill>
-                <a:schemeClr val="dk1"/>
-              </a:solidFill>
-              <a:latin typeface="Calibri"/>
+                <a:srgbClr val="000000"/>
+              </a:solidFill>
+              <a:latin typeface="Arial"/>
             </a:endParaRPr>
           </a:p>
           <a:p>
@@ -12332,9 +10768,9 @@
             </a:pPr>
             <a:endParaRPr b="0" lang="en-US" sz="2800" spc="-1" strike="noStrike">
               <a:solidFill>
-                <a:schemeClr val="dk1"/>
-              </a:solidFill>
-              <a:latin typeface="Calibri"/>
+                <a:srgbClr val="000000"/>
+              </a:solidFill>
+              <a:latin typeface="Arial"/>
             </a:endParaRPr>
           </a:p>
         </p:txBody>
@@ -12371,7 +10807,7 @@
       </p:grpSpPr>
       <p:sp>
         <p:nvSpPr>
-          <p:cNvPr id="73" name="PlaceHolder 1"/>
+          <p:cNvPr id="56" name="PlaceHolder 1"/>
           <p:cNvSpPr>
             <a:spLocks noGrp="1"/>
           </p:cNvSpPr>
@@ -12382,7 +10818,7 @@
         <p:spPr>
           <a:xfrm>
             <a:off x="0" y="0"/>
-            <a:ext cx="12191760" cy="6857640"/>
+            <a:ext cx="12191040" cy="6856920"/>
           </a:xfrm>
           <a:prstGeom prst="rect">
             <a:avLst/>
@@ -12420,9 +10856,9 @@
             </a:r>
             <a:endParaRPr b="0" lang="en-US" sz="2800" spc="-1" strike="noStrike">
               <a:solidFill>
-                <a:schemeClr val="dk1"/>
-              </a:solidFill>
-              <a:latin typeface="Calibri"/>
+                <a:srgbClr val="000000"/>
+              </a:solidFill>
+              <a:latin typeface="Arial"/>
             </a:endParaRPr>
           </a:p>
           <a:p>
@@ -12453,9 +10889,9 @@
             </a:r>
             <a:endParaRPr b="0" lang="en-US" sz="2800" spc="-1" strike="noStrike">
               <a:solidFill>
-                <a:schemeClr val="dk1"/>
-              </a:solidFill>
-              <a:latin typeface="Calibri"/>
+                <a:srgbClr val="000000"/>
+              </a:solidFill>
+              <a:latin typeface="Arial"/>
             </a:endParaRPr>
           </a:p>
           <a:p>
@@ -12486,9 +10922,9 @@
             </a:r>
             <a:endParaRPr b="0" lang="en-US" sz="2800" spc="-1" strike="noStrike">
               <a:solidFill>
-                <a:schemeClr val="dk1"/>
-              </a:solidFill>
-              <a:latin typeface="Calibri"/>
+                <a:srgbClr val="000000"/>
+              </a:solidFill>
+              <a:latin typeface="Arial"/>
             </a:endParaRPr>
           </a:p>
           <a:p>
@@ -12515,9 +10951,9 @@
             </a:r>
             <a:endParaRPr b="0" lang="en-US" sz="2800" spc="-1" strike="noStrike">
               <a:solidFill>
-                <a:schemeClr val="dk1"/>
-              </a:solidFill>
-              <a:latin typeface="Calibri"/>
+                <a:srgbClr val="000000"/>
+              </a:solidFill>
+              <a:latin typeface="Arial"/>
             </a:endParaRPr>
           </a:p>
           <a:p>
@@ -12548,9 +10984,9 @@
             </a:r>
             <a:endParaRPr b="0" lang="en-US" sz="2800" spc="-1" strike="noStrike">
               <a:solidFill>
-                <a:schemeClr val="dk1"/>
-              </a:solidFill>
-              <a:latin typeface="Calibri"/>
+                <a:srgbClr val="000000"/>
+              </a:solidFill>
+              <a:latin typeface="Arial"/>
             </a:endParaRPr>
           </a:p>
           <a:p>
@@ -12581,9 +11017,9 @@
             </a:r>
             <a:endParaRPr b="0" lang="en-US" sz="2800" spc="-1" strike="noStrike">
               <a:solidFill>
-                <a:schemeClr val="dk1"/>
-              </a:solidFill>
-              <a:latin typeface="Calibri"/>
+                <a:srgbClr val="000000"/>
+              </a:solidFill>
+              <a:latin typeface="Arial"/>
             </a:endParaRPr>
           </a:p>
           <a:p>
@@ -12610,9 +11046,9 @@
             </a:r>
             <a:endParaRPr b="0" lang="en-US" sz="2800" spc="-1" strike="noStrike">
               <a:solidFill>
-                <a:schemeClr val="dk1"/>
-              </a:solidFill>
-              <a:latin typeface="Calibri"/>
+                <a:srgbClr val="000000"/>
+              </a:solidFill>
+              <a:latin typeface="Arial"/>
             </a:endParaRPr>
           </a:p>
           <a:p>
@@ -12643,9 +11079,9 @@
             </a:r>
             <a:endParaRPr b="0" lang="en-US" sz="2800" spc="-1" strike="noStrike">
               <a:solidFill>
-                <a:schemeClr val="dk1"/>
-              </a:solidFill>
-              <a:latin typeface="Calibri"/>
+                <a:srgbClr val="000000"/>
+              </a:solidFill>
+              <a:latin typeface="Arial"/>
             </a:endParaRPr>
           </a:p>
           <a:p>
@@ -12676,9 +11112,9 @@
             </a:r>
             <a:endParaRPr b="0" lang="en-US" sz="2800" spc="-1" strike="noStrike">
               <a:solidFill>
-                <a:schemeClr val="dk1"/>
-              </a:solidFill>
-              <a:latin typeface="Calibri"/>
+                <a:srgbClr val="000000"/>
+              </a:solidFill>
+              <a:latin typeface="Arial"/>
             </a:endParaRPr>
           </a:p>
           <a:p>
@@ -12696,9 +11132,9 @@
             </a:pPr>
             <a:endParaRPr b="0" lang="en-US" sz="2800" spc="-1" strike="noStrike">
               <a:solidFill>
-                <a:schemeClr val="dk1"/>
-              </a:solidFill>
-              <a:latin typeface="Calibri"/>
+                <a:srgbClr val="000000"/>
+              </a:solidFill>
+              <a:latin typeface="Arial"/>
             </a:endParaRPr>
           </a:p>
         </p:txBody>
@@ -12735,7 +11171,7 @@
       </p:grpSpPr>
       <p:sp>
         <p:nvSpPr>
-          <p:cNvPr id="74" name="PlaceHolder 1"/>
+          <p:cNvPr id="57" name="PlaceHolder 1"/>
           <p:cNvSpPr>
             <a:spLocks noGrp="1"/>
           </p:cNvSpPr>
@@ -12746,7 +11182,7 @@
         <p:spPr>
           <a:xfrm>
             <a:off x="0" y="0"/>
-            <a:ext cx="12191760" cy="6717960"/>
+            <a:ext cx="12191040" cy="6717240"/>
           </a:xfrm>
           <a:prstGeom prst="rect">
             <a:avLst/>
@@ -12758,7 +11194,7 @@
         </p:spPr>
         <p:txBody>
           <a:bodyPr lIns="91440" rIns="91440" tIns="45720" bIns="45720" anchor="t">
-            <a:normAutofit fontScale="96763"/>
+            <a:normAutofit fontScale="96666"/>
           </a:bodyPr>
           <a:p>
             <a:pPr indent="0" defTabSz="914400">
@@ -12784,9 +11220,9 @@
             </a:r>
             <a:endParaRPr b="0" lang="en-US" sz="2800" spc="-1" strike="noStrike">
               <a:solidFill>
-                <a:schemeClr val="dk1"/>
-              </a:solidFill>
-              <a:latin typeface="Calibri"/>
+                <a:srgbClr val="000000"/>
+              </a:solidFill>
+              <a:latin typeface="Arial"/>
             </a:endParaRPr>
           </a:p>
           <a:p>
@@ -12817,9 +11253,9 @@
             </a:r>
             <a:endParaRPr b="0" lang="en-US" sz="2800" spc="-1" strike="noStrike">
               <a:solidFill>
-                <a:schemeClr val="dk1"/>
-              </a:solidFill>
-              <a:latin typeface="Calibri"/>
+                <a:srgbClr val="000000"/>
+              </a:solidFill>
+              <a:latin typeface="Arial"/>
             </a:endParaRPr>
           </a:p>
           <a:p>
@@ -12850,9 +11286,9 @@
             </a:r>
             <a:endParaRPr b="0" lang="en-US" sz="2800" spc="-1" strike="noStrike">
               <a:solidFill>
-                <a:schemeClr val="dk1"/>
-              </a:solidFill>
-              <a:latin typeface="Calibri"/>
+                <a:srgbClr val="000000"/>
+              </a:solidFill>
+              <a:latin typeface="Arial"/>
             </a:endParaRPr>
           </a:p>
           <a:p>
@@ -12883,9 +11319,9 @@
             </a:r>
             <a:endParaRPr b="0" lang="en-US" sz="2800" spc="-1" strike="noStrike">
               <a:solidFill>
-                <a:schemeClr val="dk1"/>
-              </a:solidFill>
-              <a:latin typeface="Calibri"/>
+                <a:srgbClr val="000000"/>
+              </a:solidFill>
+              <a:latin typeface="Arial"/>
             </a:endParaRPr>
           </a:p>
           <a:p>
@@ -12916,9 +11352,9 @@
             </a:r>
             <a:endParaRPr b="0" lang="en-US" sz="2800" spc="-1" strike="noStrike">
               <a:solidFill>
-                <a:schemeClr val="dk1"/>
-              </a:solidFill>
-              <a:latin typeface="Calibri"/>
+                <a:srgbClr val="000000"/>
+              </a:solidFill>
+              <a:latin typeface="Arial"/>
             </a:endParaRPr>
           </a:p>
           <a:p>
@@ -12949,9 +11385,9 @@
             </a:r>
             <a:endParaRPr b="0" lang="en-US" sz="2800" spc="-1" strike="noStrike">
               <a:solidFill>
-                <a:schemeClr val="dk1"/>
-              </a:solidFill>
-              <a:latin typeface="Calibri"/>
+                <a:srgbClr val="000000"/>
+              </a:solidFill>
+              <a:latin typeface="Arial"/>
             </a:endParaRPr>
           </a:p>
           <a:p>
@@ -12982,9 +11418,9 @@
             </a:r>
             <a:endParaRPr b="0" lang="en-US" sz="2800" spc="-1" strike="noStrike">
               <a:solidFill>
-                <a:schemeClr val="dk1"/>
-              </a:solidFill>
-              <a:latin typeface="Calibri"/>
+                <a:srgbClr val="000000"/>
+              </a:solidFill>
+              <a:latin typeface="Arial"/>
             </a:endParaRPr>
           </a:p>
           <a:p>
@@ -13015,9 +11451,9 @@
             </a:r>
             <a:endParaRPr b="0" lang="en-US" sz="2800" spc="-1" strike="noStrike">
               <a:solidFill>
-                <a:schemeClr val="dk1"/>
-              </a:solidFill>
-              <a:latin typeface="Calibri"/>
+                <a:srgbClr val="000000"/>
+              </a:solidFill>
+              <a:latin typeface="Arial"/>
             </a:endParaRPr>
           </a:p>
           <a:p>
@@ -13048,9 +11484,9 @@
             </a:r>
             <a:endParaRPr b="0" lang="en-US" sz="2800" spc="-1" strike="noStrike">
               <a:solidFill>
-                <a:schemeClr val="dk1"/>
-              </a:solidFill>
-              <a:latin typeface="Calibri"/>
+                <a:srgbClr val="000000"/>
+              </a:solidFill>
+              <a:latin typeface="Arial"/>
             </a:endParaRPr>
           </a:p>
           <a:p>
@@ -13101,9 +11537,9 @@
             </a:r>
             <a:endParaRPr b="0" lang="en-US" sz="2800" spc="-1" strike="noStrike">
               <a:solidFill>
-                <a:schemeClr val="dk1"/>
-              </a:solidFill>
-              <a:latin typeface="Calibri"/>
+                <a:srgbClr val="000000"/>
+              </a:solidFill>
+              <a:latin typeface="Arial"/>
             </a:endParaRPr>
           </a:p>
           <a:p>
@@ -13121,9 +11557,9 @@
             </a:pPr>
             <a:endParaRPr b="0" lang="en-US" sz="2800" spc="-1" strike="noStrike">
               <a:solidFill>
-                <a:schemeClr val="dk1"/>
-              </a:solidFill>
-              <a:latin typeface="Calibri"/>
+                <a:srgbClr val="000000"/>
+              </a:solidFill>
+              <a:latin typeface="Arial"/>
             </a:endParaRPr>
           </a:p>
         </p:txBody>
@@ -13160,7 +11596,7 @@
       </p:grpSpPr>
       <p:sp>
         <p:nvSpPr>
-          <p:cNvPr id="75" name="PlaceHolder 1"/>
+          <p:cNvPr id="58" name="PlaceHolder 1"/>
           <p:cNvSpPr>
             <a:spLocks noGrp="1"/>
           </p:cNvSpPr>
@@ -13171,7 +11607,7 @@
         <p:spPr>
           <a:xfrm>
             <a:off x="0" y="0"/>
-            <a:ext cx="12191760" cy="6857640"/>
+            <a:ext cx="12191040" cy="6856920"/>
           </a:xfrm>
           <a:prstGeom prst="rect">
             <a:avLst/>
@@ -13211,9 +11647,9 @@
             </a:r>
             <a:endParaRPr b="0" lang="en-US" sz="2800" spc="-1" strike="noStrike">
               <a:solidFill>
-                <a:schemeClr val="dk1"/>
-              </a:solidFill>
-              <a:latin typeface="Calibri"/>
+                <a:srgbClr val="000000"/>
+              </a:solidFill>
+              <a:latin typeface="Arial"/>
             </a:endParaRPr>
           </a:p>
           <a:p>
@@ -13244,9 +11680,9 @@
             </a:r>
             <a:endParaRPr b="0" lang="en-US" sz="2800" spc="-1" strike="noStrike">
               <a:solidFill>
-                <a:schemeClr val="dk1"/>
-              </a:solidFill>
-              <a:latin typeface="Calibri"/>
+                <a:srgbClr val="000000"/>
+              </a:solidFill>
+              <a:latin typeface="Arial"/>
             </a:endParaRPr>
           </a:p>
           <a:p>
@@ -13277,9 +11713,9 @@
             </a:r>
             <a:endParaRPr b="0" lang="en-US" sz="2800" spc="-1" strike="noStrike">
               <a:solidFill>
-                <a:schemeClr val="dk1"/>
-              </a:solidFill>
-              <a:latin typeface="Calibri"/>
+                <a:srgbClr val="000000"/>
+              </a:solidFill>
+              <a:latin typeface="Arial"/>
             </a:endParaRPr>
           </a:p>
           <a:p>
@@ -13297,9 +11733,9 @@
             </a:pPr>
             <a:endParaRPr b="0" lang="en-US" sz="2800" spc="-1" strike="noStrike">
               <a:solidFill>
-                <a:schemeClr val="dk1"/>
-              </a:solidFill>
-              <a:latin typeface="Calibri"/>
+                <a:srgbClr val="000000"/>
+              </a:solidFill>
+              <a:latin typeface="Arial"/>
             </a:endParaRPr>
           </a:p>
           <a:p>
@@ -13326,9 +11762,9 @@
             </a:r>
             <a:endParaRPr b="0" lang="en-US" sz="2800" spc="-1" strike="noStrike">
               <a:solidFill>
-                <a:schemeClr val="dk1"/>
-              </a:solidFill>
-              <a:latin typeface="Calibri"/>
+                <a:srgbClr val="000000"/>
+              </a:solidFill>
+              <a:latin typeface="Arial"/>
             </a:endParaRPr>
           </a:p>
           <a:p>
@@ -13377,9 +11813,9 @@
             </a:r>
             <a:endParaRPr b="0" lang="en-US" sz="2800" spc="-1" strike="noStrike">
               <a:solidFill>
-                <a:schemeClr val="dk1"/>
-              </a:solidFill>
-              <a:latin typeface="Calibri"/>
+                <a:srgbClr val="000000"/>
+              </a:solidFill>
+              <a:latin typeface="Arial"/>
             </a:endParaRPr>
           </a:p>
           <a:p>
@@ -13410,9 +11846,9 @@
             </a:r>
             <a:endParaRPr b="0" lang="en-US" sz="2800" spc="-1" strike="noStrike">
               <a:solidFill>
-                <a:schemeClr val="dk1"/>
-              </a:solidFill>
-              <a:latin typeface="Calibri"/>
+                <a:srgbClr val="000000"/>
+              </a:solidFill>
+              <a:latin typeface="Arial"/>
             </a:endParaRPr>
           </a:p>
           <a:p>
@@ -13515,9 +11951,9 @@
             </a:r>
             <a:endParaRPr b="0" lang="en-US" sz="2800" spc="-1" strike="noStrike">
               <a:solidFill>
-                <a:schemeClr val="dk1"/>
-              </a:solidFill>
-              <a:latin typeface="Calibri"/>
+                <a:srgbClr val="000000"/>
+              </a:solidFill>
+              <a:latin typeface="Arial"/>
             </a:endParaRPr>
           </a:p>
           <a:p>
@@ -13535,9 +11971,9 @@
             </a:pPr>
             <a:endParaRPr b="0" lang="en-US" sz="2800" spc="-1" strike="noStrike">
               <a:solidFill>
-                <a:schemeClr val="dk1"/>
-              </a:solidFill>
-              <a:latin typeface="Calibri"/>
+                <a:srgbClr val="000000"/>
+              </a:solidFill>
+              <a:latin typeface="Arial"/>
             </a:endParaRPr>
           </a:p>
         </p:txBody>
@@ -13574,7 +12010,7 @@
       </p:grpSpPr>
       <p:sp>
         <p:nvSpPr>
-          <p:cNvPr id="76" name="PlaceHolder 1"/>
+          <p:cNvPr id="59" name="PlaceHolder 1"/>
           <p:cNvSpPr>
             <a:spLocks noGrp="1"/>
           </p:cNvSpPr>
@@ -13585,7 +12021,7 @@
         <p:spPr>
           <a:xfrm>
             <a:off x="838080" y="365040"/>
-            <a:ext cx="10515240" cy="1325160"/>
+            <a:ext cx="10514520" cy="1324440"/>
           </a:xfrm>
           <a:prstGeom prst="rect">
             <a:avLst/>
@@ -13605,6 +12041,9 @@
                 <a:spcPct val="90000"/>
               </a:lnSpc>
               <a:buNone/>
+              <a:tabLst>
+                <a:tab algn="l" pos="0"/>
+              </a:tabLst>
             </a:pPr>
             <a:r>
               <a:rPr b="0" lang="en-US" sz="4400" spc="-1" strike="noStrike">
@@ -13620,16 +12059,16 @@
             </a:br>
             <a:endParaRPr b="0" lang="en-US" sz="4400" spc="-1" strike="noStrike">
               <a:solidFill>
-                <a:schemeClr val="dk1"/>
-              </a:solidFill>
-              <a:latin typeface="Calibri"/>
+                <a:srgbClr val="000000"/>
+              </a:solidFill>
+              <a:latin typeface="Arial"/>
             </a:endParaRPr>
           </a:p>
         </p:txBody>
       </p:sp>
       <p:sp>
         <p:nvSpPr>
-          <p:cNvPr id="77" name="PlaceHolder 2"/>
+          <p:cNvPr id="60" name="PlaceHolder 2"/>
           <p:cNvSpPr>
             <a:spLocks noGrp="1"/>
           </p:cNvSpPr>
@@ -13640,7 +12079,7 @@
         <p:spPr>
           <a:xfrm>
             <a:off x="838080" y="1825560"/>
-            <a:ext cx="10515240" cy="4350960"/>
+            <a:ext cx="10514520" cy="4350240"/>
           </a:xfrm>
           <a:prstGeom prst="rect">
             <a:avLst/>
@@ -13679,9 +12118,9 @@
             </a:r>
             <a:endParaRPr b="0" lang="en-US" sz="2800" spc="-1" strike="noStrike">
               <a:solidFill>
-                <a:schemeClr val="dk1"/>
-              </a:solidFill>
-              <a:latin typeface="Calibri"/>
+                <a:srgbClr val="000000"/>
+              </a:solidFill>
+              <a:latin typeface="Arial"/>
             </a:endParaRPr>
           </a:p>
           <a:p>
@@ -13718,9 +12157,9 @@
             </a:r>
             <a:endParaRPr b="0" lang="en-US" sz="2800" spc="-1" strike="noStrike">
               <a:solidFill>
-                <a:schemeClr val="dk1"/>
-              </a:solidFill>
-              <a:latin typeface="Calibri"/>
+                <a:srgbClr val="000000"/>
+              </a:solidFill>
+              <a:latin typeface="Arial"/>
             </a:endParaRPr>
           </a:p>
           <a:p>
@@ -13748,9 +12187,9 @@
             </a:r>
             <a:endParaRPr b="0" lang="en-US" sz="2800" spc="-1" strike="noStrike">
               <a:solidFill>
-                <a:schemeClr val="dk1"/>
-              </a:solidFill>
-              <a:latin typeface="Calibri"/>
+                <a:srgbClr val="000000"/>
+              </a:solidFill>
+              <a:latin typeface="Arial"/>
             </a:endParaRPr>
           </a:p>
           <a:p>
@@ -13762,12 +12201,15 @@
                 <a:spcPts val="1001"/>
               </a:spcBef>
               <a:buNone/>
-            </a:pPr>
-            <a:endParaRPr b="0" lang="en-US" sz="2800" spc="-1" strike="noStrike">
-              <a:solidFill>
-                <a:schemeClr val="dk1"/>
-              </a:solidFill>
-              <a:latin typeface="Calibri"/>
+              <a:tabLst>
+                <a:tab algn="l" pos="0"/>
+              </a:tabLst>
+            </a:pPr>
+            <a:endParaRPr b="0" lang="en-US" sz="2800" spc="-1" strike="noStrike">
+              <a:solidFill>
+                <a:srgbClr val="000000"/>
+              </a:solidFill>
+              <a:latin typeface="Arial"/>
             </a:endParaRPr>
           </a:p>
           <a:p>
@@ -13779,6 +12221,9 @@
                 <a:spcPts val="1001"/>
               </a:spcBef>
               <a:buNone/>
+              <a:tabLst>
+                <a:tab algn="l" pos="0"/>
+              </a:tabLst>
             </a:pPr>
             <a:r>
               <a:rPr b="0" lang="en-US" sz="2800" spc="-1" strike="noStrike">
@@ -13791,9 +12236,9 @@
             </a:r>
             <a:endParaRPr b="0" lang="en-US" sz="2800" spc="-1" strike="noStrike">
               <a:solidFill>
-                <a:schemeClr val="dk1"/>
-              </a:solidFill>
-              <a:latin typeface="Calibri"/>
+                <a:srgbClr val="000000"/>
+              </a:solidFill>
+              <a:latin typeface="Arial"/>
             </a:endParaRPr>
           </a:p>
           <a:p>
@@ -13805,6 +12250,9 @@
                 <a:spcPts val="1001"/>
               </a:spcBef>
               <a:buNone/>
+              <a:tabLst>
+                <a:tab algn="l" pos="0"/>
+              </a:tabLst>
             </a:pPr>
             <a:r>
               <a:rPr b="0" lang="en-US" sz="2800" spc="-1" strike="noStrike">
@@ -13817,9 +12265,9 @@
             </a:r>
             <a:endParaRPr b="0" lang="en-US" sz="2800" spc="-1" strike="noStrike">
               <a:solidFill>
-                <a:schemeClr val="dk1"/>
-              </a:solidFill>
-              <a:latin typeface="Calibri"/>
+                <a:srgbClr val="000000"/>
+              </a:solidFill>
+              <a:latin typeface="Arial"/>
             </a:endParaRPr>
           </a:p>
           <a:p>
@@ -13831,6 +12279,9 @@
                 <a:spcPts val="1001"/>
               </a:spcBef>
               <a:buNone/>
+              <a:tabLst>
+                <a:tab algn="l" pos="0"/>
+              </a:tabLst>
             </a:pPr>
             <a:r>
               <a:rPr b="0" lang="en-US" sz="2800" spc="-1" strike="noStrike">
@@ -13843,9 +12294,9 @@
             </a:r>
             <a:endParaRPr b="0" lang="en-US" sz="2800" spc="-1" strike="noStrike">
               <a:solidFill>
-                <a:schemeClr val="dk1"/>
-              </a:solidFill>
-              <a:latin typeface="Calibri"/>
+                <a:srgbClr val="000000"/>
+              </a:solidFill>
+              <a:latin typeface="Arial"/>
             </a:endParaRPr>
           </a:p>
           <a:p>
@@ -13861,6 +12312,9 @@
               </a:buClr>
               <a:buFont typeface="Arial"/>
               <a:buChar char="•"/>
+              <a:tabLst>
+                <a:tab algn="l" pos="0"/>
+              </a:tabLst>
             </a:pPr>
             <a:r>
               <a:rPr b="0" lang="en-US" sz="2800" spc="-1" strike="noStrike">
@@ -13873,9 +12327,9 @@
             </a:r>
             <a:endParaRPr b="0" lang="en-US" sz="2800" spc="-1" strike="noStrike">
               <a:solidFill>
-                <a:schemeClr val="dk1"/>
-              </a:solidFill>
-              <a:latin typeface="Calibri"/>
+                <a:srgbClr val="000000"/>
+              </a:solidFill>
+              <a:latin typeface="Arial"/>
             </a:endParaRPr>
           </a:p>
         </p:txBody>
